--- a/银行流水分享_V1.8.pptx
+++ b/银行流水分享_V1.8.pptx
@@ -7,7 +7,6 @@
   <p:sldIdLst>
     <p:sldId id="260" r:id="rId2"/>
     <p:sldId id="269" r:id="rId3"/>
-    <p:sldId id="281" r:id="rId15"/>
     <p:sldId id="280" r:id="rId4"/>
     <p:sldId id="279" r:id="rId5"/>
   </p:sldIdLst>
@@ -11324,6332 +11323,6 @@
 </p:sld>
 </file>
 
-<file path=ppt/slides/slide3.xml><?xml version="1.0" encoding="utf-8"?>
-<p:sld xmlns:a="http://schemas.openxmlformats.org/drawingml/2006/main" xmlns:r="http://schemas.openxmlformats.org/officeDocument/2006/relationships" xmlns:p="http://schemas.openxmlformats.org/presentationml/2006/main">
-  <p:cSld>
-    <p:spTree>
-      <p:nvGrpSpPr>
-        <p:cNvPr id="1" name=""/>
-        <p:cNvGrpSpPr/>
-        <p:nvPr/>
-      </p:nvGrpSpPr>
-      <p:grpSpPr>
-        <a:xfrm>
-          <a:off x="0" y="0"/>
-          <a:ext cx="0" cy="0"/>
-          <a:chOff x="0" y="0"/>
-          <a:chExt cx="0" cy="0"/>
-        </a:xfrm>
-      </p:grpSpPr>
-      <p:sp>
-        <p:nvSpPr>
-          <p:cNvPr id="2" name="title">
-            <a:extLst>
-              <a:ext uri="{FF2B5EF4-FFF2-40B4-BE49-F238E27FC236}">
-                <a16:creationId xmlns:a16="http://schemas.microsoft.com/office/drawing/2014/main" id="{8355AB41-3856-43D4-91F4-2CF8E6943019}"/>
-              </a:ext>
-            </a:extLst>
-          </p:cNvPr>
-          <p:cNvSpPr txBox="1"/>
-          <p:nvPr/>
-        </p:nvSpPr>
-        <p:spPr>
-          <a:xfrm>
-            <a:off x="603504" y="65149"/>
-            <a:ext cx="10972800" cy="621792"/>
-          </a:xfrm>
-          <a:prstGeom prst="rect">
-            <a:avLst/>
-          </a:prstGeom>
-          <a:noFill/>
-          <a:ln>
-            <a:noFill/>
-          </a:ln>
-        </p:spPr>
-        <p:txBody>
-          <a:bodyPr wrap="square" lIns="0" tIns="0" rIns="0" bIns="0" rtlCol="0" anchor="ctr"/>
-          <a:lstStyle/>
-          <a:p>
-            <a:pPr marL="0" marR="0" lvl="0" indent="0" algn="l" defTabSz="914400" rtl="0" eaLnBrk="1" fontAlgn="auto" latinLnBrk="1" hangingPunct="1">
-              <a:lnSpc>
-                <a:spcPct val="130000"/>
-              </a:lnSpc>
-              <a:spcBef>
-                <a:spcPts val="0"/>
-              </a:spcBef>
-              <a:spcAft>
-                <a:spcPts val="0"/>
-              </a:spcAft>
-              <a:buClrTx/>
-              <a:buSzTx/>
-              <a:buFontTx/>
-              <a:buNone/>
-              <a:tabLst/>
-              <a:defRPr>
-                <a:latin typeface="微软雅黑"/>
-                <a:ea typeface="微软雅黑"/>
-              </a:defRPr>
-            </a:pPr>
-            <a:r>
-              <a:rPr lang="zh-CN" altLang="en-US" sz="2000" b="1" noProof="1">
-                <a:solidFill>
-                  <a:srgbClr val="0A0A0A"/>
-                </a:solidFill>
-                <a:latin typeface="微软雅黑"/>
-                <a:ea typeface="微软雅黑"/>
-              </a:rPr>
-              <a:t>从一笔交易到完整客户财务画像直接回答新增还款能力</a:t>
-            </a:r>
-          </a:p>
-        </p:txBody>
-      </p:sp>
-      <p:sp>
-        <p:nvSpPr>
-          <p:cNvPr id="3" name="文本框 2">
-            <a:extLst>
-              <a:ext uri="{FF2B5EF4-FFF2-40B4-BE49-F238E27FC236}">
-                <a16:creationId xmlns:a16="http://schemas.microsoft.com/office/drawing/2014/main" id="{63E6C3C0-EF83-43D9-A24C-47B1A5AB43C9}"/>
-              </a:ext>
-            </a:extLst>
-          </p:cNvPr>
-          <p:cNvSpPr txBox="1"/>
-          <p:nvPr/>
-        </p:nvSpPr>
-        <p:spPr>
-          <a:xfrm>
-            <a:off x="511115" y="566724"/>
-            <a:ext cx="10901632" cy="443391"/>
-          </a:xfrm>
-          <a:prstGeom prst="rect">
-            <a:avLst/>
-          </a:prstGeom>
-          <a:noFill/>
-        </p:spPr>
-        <p:txBody>
-          <a:bodyPr wrap="square">
-            <a:spAutoFit/>
-          </a:bodyPr>
-          <a:lstStyle/>
-          <a:p>
-            <a:pPr marL="0" marR="0" lvl="0" indent="0" algn="l" defTabSz="914400" rtl="0" eaLnBrk="1" fontAlgn="auto" latinLnBrk="0" hangingPunct="1">
-              <a:lnSpc>
-                <a:spcPct val="140000"/>
-              </a:lnSpc>
-              <a:spcBef>
-                <a:spcPts val="0"/>
-              </a:spcBef>
-              <a:spcAft>
-                <a:spcPts val="0"/>
-              </a:spcAft>
-              <a:buClrTx/>
-              <a:buSzTx/>
-              <a:buFontTx/>
-              <a:buNone/>
-              <a:tabLst/>
-              <a:defRPr>
-                <a:latin typeface="微软雅黑"/>
-                <a:ea typeface="微软雅黑"/>
-              </a:defRPr>
-            </a:pPr>
-            <a:r>
-              <a:rPr lang="zh-CN" altLang="en-US" dirty="0">
-                <a:latin typeface="微软雅黑"/>
-                <a:ea typeface="微软雅黑"/>
-              </a:rPr>
-              <a:t>原始流水 → 单笔交易识别 → 用户</a:t>
-            </a:r>
-            <a:r>
-              <a:rPr lang="en-US" altLang="zh-CN" dirty="0">
-                <a:latin typeface="微软雅黑"/>
-                <a:ea typeface="微软雅黑"/>
-              </a:rPr>
-              <a:t>/</a:t>
-            </a:r>
-            <a:r>
-              <a:rPr lang="zh-CN" altLang="en-US" dirty="0">
-                <a:latin typeface="微软雅黑"/>
-                <a:ea typeface="微软雅黑"/>
-              </a:rPr>
-              <a:t>贷款汇总</a:t>
-            </a:r>
-            <a:endParaRPr kumimoji="0" lang="en-US" altLang="zh-CN" sz="1800" b="0" i="0" u="none" strike="noStrike" kern="1200" cap="none" spc="0" normalizeH="0" baseline="0" noProof="1">
-              <a:ln>
-                <a:noFill/>
-              </a:ln>
-              <a:solidFill>
-                <a:prstClr val="black"/>
-              </a:solidFill>
-              <a:effectLst/>
-              <a:uLnTx/>
-              <a:uFillTx/>
-              <a:latin typeface="微软雅黑" panose="020B0503020204020204" pitchFamily="34" charset="-122"/>
-              <a:ea typeface="微软雅黑" panose="020B0503020204020204" pitchFamily="34" charset="-122"/>
-              <a:cs typeface="+mn-cs"/>
-            </a:endParaRPr>
-          </a:p>
-        </p:txBody>
-      </p:sp>
-      <p:sp>
-        <p:nvSpPr>
-          <p:cNvPr id="6" name="s1-title">
-            <a:extLst>
-              <a:ext uri="{FF2B5EF4-FFF2-40B4-BE49-F238E27FC236}">
-                <a16:creationId xmlns:a16="http://schemas.microsoft.com/office/drawing/2014/main" id="{048C4CBE-160F-411B-AF93-58FE8230110E}"/>
-              </a:ext>
-            </a:extLst>
-          </p:cNvPr>
-          <p:cNvSpPr txBox="1"/>
-          <p:nvPr/>
-        </p:nvSpPr>
-        <p:spPr>
-          <a:xfrm>
-            <a:off x="568385" y="1113405"/>
-            <a:ext cx="3810000" cy="228600"/>
-          </a:xfrm>
-          <a:prstGeom prst="rect">
-            <a:avLst/>
-          </a:prstGeom>
-          <a:noFill/>
-          <a:ln>
-            <a:noFill/>
-          </a:ln>
-        </p:spPr>
-        <p:txBody>
-          <a:bodyPr wrap="none" lIns="0" tIns="0" rIns="0" bIns="0" rtlCol="0" anchor="ctr"/>
-          <a:lstStyle/>
-          <a:p>
-            <a:pPr marL="0" marR="0" lvl="0" indent="0" algn="l" defTabSz="914400" rtl="0" eaLnBrk="1" fontAlgn="auto" latinLnBrk="0" hangingPunct="1">
-              <a:lnSpc>
-                <a:spcPct val="125000"/>
-              </a:lnSpc>
-              <a:spcBef>
-                <a:spcPts val="0"/>
-              </a:spcBef>
-              <a:spcAft>
-                <a:spcPts val="0"/>
-              </a:spcAft>
-              <a:buClrTx/>
-              <a:buSzTx/>
-              <a:buFontTx/>
-              <a:buNone/>
-              <a:tabLst/>
-              <a:defRPr>
-                <a:latin typeface="微软雅黑"/>
-                <a:ea typeface="微软雅黑"/>
-              </a:defRPr>
-            </a:pPr>
-            <a:r>
-              <a:rPr kumimoji="0" lang="en-US" altLang="zh-CN" sz="1200" b="1" i="0" u="none" strike="noStrike" kern="1200" cap="none" spc="0" normalizeH="0" baseline="0" noProof="0" dirty="0">
-                <a:ln>
-                  <a:noFill/>
-                </a:ln>
-                <a:solidFill>
-                  <a:srgbClr val="0A0A0A"/>
-                </a:solidFill>
-                <a:effectLst/>
-                <a:uLnTx/>
-                <a:uFillTx/>
-                <a:latin typeface="微软雅黑"/>
-                <a:ea typeface="微软雅黑"/>
-                <a:cs typeface="+mn-cs"/>
-              </a:rPr>
-              <a:t>1. </a:t>
-            </a:r>
-            <a:r>
-              <a:rPr kumimoji="0" lang="zh-CN" altLang="en-US" sz="1200" b="1" i="0" u="none" strike="noStrike" kern="1200" cap="none" spc="0" normalizeH="0" baseline="0" noProof="0" dirty="0">
-                <a:ln>
-                  <a:noFill/>
-                </a:ln>
-                <a:solidFill>
-                  <a:srgbClr val="0A0A0A"/>
-                </a:solidFill>
-                <a:effectLst/>
-                <a:uLnTx/>
-                <a:uFillTx/>
-                <a:latin typeface="微软雅黑"/>
-                <a:ea typeface="微软雅黑"/>
-                <a:cs typeface="+mn-cs"/>
-              </a:rPr>
-              <a:t>原始银行流水（输入示例）</a:t>
-            </a:r>
-            <a:endParaRPr kumimoji="0" lang="en-US" sz="1200" b="0" i="0" u="none" strike="noStrike" kern="1200" cap="none" spc="0" normalizeH="0" baseline="0" noProof="1">
-              <a:ln>
-                <a:noFill/>
-              </a:ln>
-              <a:solidFill>
-                <a:prstClr val="black"/>
-              </a:solidFill>
-              <a:effectLst/>
-              <a:uLnTx/>
-              <a:uFillTx/>
-              <a:latin typeface="微软雅黑" panose="020B0503020204020204" pitchFamily="34" charset="-122"/>
-              <a:ea typeface="微软雅黑" panose="020B0503020204020204" pitchFamily="34" charset="-122"/>
-              <a:cs typeface="+mn-cs"/>
-            </a:endParaRPr>
-          </a:p>
-        </p:txBody>
-      </p:sp>
-      <p:sp>
-        <p:nvSpPr>
-          <p:cNvPr id="10" name="s2-title">
-            <a:extLst>
-              <a:ext uri="{FF2B5EF4-FFF2-40B4-BE49-F238E27FC236}">
-                <a16:creationId xmlns:a16="http://schemas.microsoft.com/office/drawing/2014/main" id="{C74CD74D-A21D-4088-B06A-64E758567EE9}"/>
-              </a:ext>
-            </a:extLst>
-          </p:cNvPr>
-          <p:cNvSpPr txBox="1"/>
-          <p:nvPr/>
-        </p:nvSpPr>
-        <p:spPr>
-          <a:xfrm>
-            <a:off x="568386" y="2523256"/>
-            <a:ext cx="5943600" cy="228600"/>
-          </a:xfrm>
-          <a:prstGeom prst="rect">
-            <a:avLst/>
-          </a:prstGeom>
-          <a:noFill/>
-          <a:ln>
-            <a:noFill/>
-          </a:ln>
-        </p:spPr>
-        <p:txBody>
-          <a:bodyPr wrap="none" lIns="0" tIns="0" rIns="0" bIns="0" rtlCol="0" anchor="ctr"/>
-          <a:lstStyle/>
-          <a:p>
-            <a:pPr marL="0" marR="0" lvl="0" indent="0" algn="l" defTabSz="914400" rtl="0" eaLnBrk="1" fontAlgn="auto" latinLnBrk="0" hangingPunct="1">
-              <a:lnSpc>
-                <a:spcPct val="125000"/>
-              </a:lnSpc>
-              <a:spcBef>
-                <a:spcPts val="0"/>
-              </a:spcBef>
-              <a:spcAft>
-                <a:spcPts val="0"/>
-              </a:spcAft>
-              <a:buClrTx/>
-              <a:buSzTx/>
-              <a:buFontTx/>
-              <a:buNone/>
-              <a:tabLst/>
-              <a:defRPr>
-                <a:latin typeface="微软雅黑"/>
-                <a:ea typeface="微软雅黑"/>
-              </a:defRPr>
-            </a:pPr>
-            <a:r>
-              <a:rPr kumimoji="0" lang="en-US" altLang="zh-CN" sz="1200" b="1" i="0" u="none" strike="noStrike" kern="1200" cap="none" spc="0" normalizeH="0" baseline="0" noProof="0">
-                <a:ln>
-                  <a:noFill/>
-                </a:ln>
-                <a:solidFill>
-                  <a:srgbClr val="0A0A0A"/>
-                </a:solidFill>
-                <a:effectLst/>
-                <a:uLnTx/>
-                <a:uFillTx/>
-                <a:latin typeface="微软雅黑"/>
-                <a:ea typeface="微软雅黑"/>
-                <a:cs typeface="+mn-cs"/>
-              </a:rPr>
-              <a:t>2. </a:t>
-            </a:r>
-            <a:r>
-              <a:rPr kumimoji="0" lang="zh-CN" altLang="en-US" sz="1200" b="1" i="0" u="none" strike="noStrike" kern="1200" cap="none" spc="0" normalizeH="0" baseline="0" noProof="0">
-                <a:ln>
-                  <a:noFill/>
-                </a:ln>
-                <a:solidFill>
-                  <a:srgbClr val="0A0A0A"/>
-                </a:solidFill>
-                <a:effectLst/>
-                <a:uLnTx/>
-                <a:uFillTx/>
-                <a:latin typeface="微软雅黑"/>
-                <a:ea typeface="微软雅黑"/>
-                <a:cs typeface="+mn-cs"/>
-              </a:rPr>
-              <a:t>交易明细维度：理解每一笔交易（输出示例）</a:t>
-            </a:r>
-            <a:endParaRPr kumimoji="0" lang="en-US" sz="1200" b="1" i="0" u="none" strike="noStrike" kern="1200" cap="none" spc="0" normalizeH="0" baseline="0" noProof="1">
-              <a:ln>
-                <a:noFill/>
-              </a:ln>
-              <a:solidFill>
-                <a:srgbClr val="0A0A0A"/>
-              </a:solidFill>
-              <a:effectLst/>
-              <a:uLnTx/>
-              <a:uFillTx/>
-              <a:latin typeface="微软雅黑"/>
-              <a:ea typeface="微软雅黑"/>
-              <a:cs typeface="+mn-cs"/>
-            </a:endParaRPr>
-          </a:p>
-        </p:txBody>
-      </p:sp>
-      <p:sp>
-        <p:nvSpPr>
-          <p:cNvPr id="13" name="s3-title">
-            <a:extLst>
-              <a:ext uri="{FF2B5EF4-FFF2-40B4-BE49-F238E27FC236}">
-                <a16:creationId xmlns:a16="http://schemas.microsoft.com/office/drawing/2014/main" id="{B2B5F18D-2962-46FD-9E6E-562ACD32D72F}"/>
-              </a:ext>
-            </a:extLst>
-          </p:cNvPr>
-          <p:cNvSpPr txBox="1"/>
-          <p:nvPr/>
-        </p:nvSpPr>
-        <p:spPr>
-          <a:xfrm>
-            <a:off x="568385" y="3989324"/>
-            <a:ext cx="5943600" cy="228600"/>
-          </a:xfrm>
-          <a:prstGeom prst="rect">
-            <a:avLst/>
-          </a:prstGeom>
-          <a:noFill/>
-          <a:ln>
-            <a:noFill/>
-          </a:ln>
-        </p:spPr>
-        <p:txBody>
-          <a:bodyPr wrap="none" lIns="0" tIns="0" rIns="0" bIns="0" rtlCol="0" anchor="ctr"/>
-          <a:lstStyle/>
-          <a:p>
-            <a:pPr marL="0" marR="0" lvl="0" indent="0" algn="l" defTabSz="914400" rtl="0" eaLnBrk="1" fontAlgn="auto" latinLnBrk="0" hangingPunct="1">
-              <a:lnSpc>
-                <a:spcPct val="125000"/>
-              </a:lnSpc>
-              <a:spcBef>
-                <a:spcPts val="0"/>
-              </a:spcBef>
-              <a:spcAft>
-                <a:spcPts val="0"/>
-              </a:spcAft>
-              <a:buClrTx/>
-              <a:buSzTx/>
-              <a:buFontTx/>
-              <a:buNone/>
-              <a:tabLst/>
-              <a:defRPr>
-                <a:latin typeface="微软雅黑"/>
-                <a:ea typeface="微软雅黑"/>
-              </a:defRPr>
-            </a:pPr>
-            <a:r>
-              <a:rPr kumimoji="0" lang="en-US" altLang="zh-CN" sz="1200" b="1" i="0" u="none" strike="noStrike" kern="1200" cap="none" spc="0" normalizeH="0" baseline="0" noProof="0" dirty="0">
-                <a:ln>
-                  <a:noFill/>
-                </a:ln>
-                <a:solidFill>
-                  <a:srgbClr val="0A0A0A"/>
-                </a:solidFill>
-                <a:effectLst/>
-                <a:uLnTx/>
-                <a:uFillTx/>
-                <a:latin typeface="微软雅黑"/>
-                <a:ea typeface="微软雅黑"/>
-                <a:cs typeface="+mn-cs"/>
-              </a:rPr>
-              <a:t>3. </a:t>
-            </a:r>
-            <a:r>
-              <a:rPr kumimoji="0" lang="zh-CN" altLang="en-US" sz="1200" b="1" i="0" u="none" strike="noStrike" kern="1200" cap="none" spc="0" normalizeH="0" baseline="0" noProof="0" dirty="0">
-                <a:ln>
-                  <a:noFill/>
-                </a:ln>
-                <a:solidFill>
-                  <a:srgbClr val="0A0A0A"/>
-                </a:solidFill>
-                <a:effectLst/>
-                <a:uLnTx/>
-                <a:uFillTx/>
-                <a:latin typeface="微软雅黑"/>
-                <a:ea typeface="微软雅黑"/>
-                <a:cs typeface="+mn-cs"/>
-              </a:rPr>
-              <a:t>用户汇总维度：形成完整负债画像（输出示例）</a:t>
-            </a:r>
-            <a:endParaRPr kumimoji="0" lang="en-US" sz="1200" b="1" i="0" u="none" strike="noStrike" kern="1200" cap="none" spc="0" normalizeH="0" baseline="0" noProof="1">
-              <a:ln>
-                <a:noFill/>
-              </a:ln>
-              <a:solidFill>
-                <a:srgbClr val="0A0A0A"/>
-              </a:solidFill>
-              <a:effectLst/>
-              <a:uLnTx/>
-              <a:uFillTx/>
-              <a:latin typeface="微软雅黑"/>
-              <a:ea typeface="微软雅黑"/>
-              <a:cs typeface="+mn-cs"/>
-            </a:endParaRPr>
-          </a:p>
-        </p:txBody>
-      </p:sp>
-      <p:graphicFrame>
-        <p:nvGraphicFramePr>
-          <p:cNvPr id="15" name="init-table">
-            <a:extLst>
-              <a:ext uri="{FF2B5EF4-FFF2-40B4-BE49-F238E27FC236}">
-                <a16:creationId xmlns:a16="http://schemas.microsoft.com/office/drawing/2014/main" id="{B20AEE83-7381-40E9-867F-987DE9C5BE2C}"/>
-              </a:ext>
-            </a:extLst>
-          </p:cNvPr>
-          <p:cNvGraphicFramePr>
-            <a:graphicFrameLocks noGrp="1"/>
-          </p:cNvGraphicFramePr>
-          <p:nvPr>
-            <p:extLst>
-              <p:ext uri="{D42A27DB-BD31-4B8C-83A1-F6EECF244321}">
-                <p14:modId xmlns:p14="http://schemas.microsoft.com/office/powerpoint/2010/main" val="4096992607"/>
-              </p:ext>
-            </p:extLst>
-          </p:nvPr>
-        </p:nvGraphicFramePr>
-        <p:xfrm>
-          <a:off x="568385" y="1435904"/>
-          <a:ext cx="10901630" cy="1022238"/>
-        </p:xfrm>
-        <a:graphic>
-          <a:graphicData uri="http://schemas.openxmlformats.org/drawingml/2006/table">
-            <a:tbl>
-              <a:tblPr/>
-              <a:tblGrid>
-                <a:gridCol w="1326689">
-                  <a:extLst>
-                    <a:ext uri="{9D8B030D-6E8A-4147-A177-3AD203B41FA5}">
-                      <a16:colId xmlns:a16="http://schemas.microsoft.com/office/drawing/2014/main" val="20000"/>
-                    </a:ext>
-                  </a:extLst>
-                </a:gridCol>
-                <a:gridCol w="1679834">
-                  <a:extLst>
-                    <a:ext uri="{9D8B030D-6E8A-4147-A177-3AD203B41FA5}">
-                      <a16:colId xmlns:a16="http://schemas.microsoft.com/office/drawing/2014/main" val="20001"/>
-                    </a:ext>
-                  </a:extLst>
-                </a:gridCol>
-                <a:gridCol w="1738206">
-                  <a:extLst>
-                    <a:ext uri="{9D8B030D-6E8A-4147-A177-3AD203B41FA5}">
-                      <a16:colId xmlns:a16="http://schemas.microsoft.com/office/drawing/2014/main" val="20002"/>
-                    </a:ext>
-                  </a:extLst>
-                </a:gridCol>
-                <a:gridCol w="6156901">
-                  <a:extLst>
-                    <a:ext uri="{9D8B030D-6E8A-4147-A177-3AD203B41FA5}">
-                      <a16:colId xmlns:a16="http://schemas.microsoft.com/office/drawing/2014/main" val="4140160165"/>
-                    </a:ext>
-                  </a:extLst>
-                </a:gridCol>
-              </a:tblGrid>
-              <a:tr h="170373">
-                <a:tc>
-                  <a:txBody>
-                    <a:bodyPr/>
-                    <a:lstStyle/>
-                    <a:p>
-                      <a:pPr marL="0" algn="ctr" defTabSz="914400" rtl="0" eaLnBrk="1" latinLnBrk="0" hangingPunct="1"/>
-                      <a:r>
-                        <a:rPr sz="800" b="1" kern="1200" dirty="0" err="1">
-                          <a:solidFill>
-                            <a:srgbClr val="0A0A0A"/>
-                          </a:solidFill>
-                          <a:latin typeface="微软雅黑" panose="020B0503020204020204" pitchFamily="34" charset="-122"/>
-                          <a:ea typeface="微软雅黑" panose="020B0503020204020204" pitchFamily="34" charset="-122"/>
-                          <a:cs typeface="+mn-cs"/>
-                        </a:rPr>
-                        <a:t>日期</a:t>
-                      </a:r>
-                      <a:endParaRPr sz="800" b="1" kern="1200" dirty="0">
-                        <a:solidFill>
-                          <a:srgbClr val="0A0A0A"/>
-                        </a:solidFill>
-                        <a:latin typeface="微软雅黑" panose="020B0503020204020204" pitchFamily="34" charset="-122"/>
-                        <a:ea typeface="微软雅黑" panose="020B0503020204020204" pitchFamily="34" charset="-122"/>
-                        <a:cs typeface="+mn-cs"/>
-                      </a:endParaRPr>
-                    </a:p>
-                  </a:txBody>
-                  <a:tcPr marL="27432" marR="27432" marT="9144" marB="9144">
-                    <a:lnL>
-                      <a:noFill/>
-                    </a:lnL>
-                    <a:lnR>
-                      <a:noFill/>
-                    </a:lnR>
-                    <a:lnT>
-                      <a:noFill/>
-                    </a:lnT>
-                    <a:lnB w="19050">
-                      <a:solidFill>
-                        <a:srgbClr val="0A0A0A"/>
-                      </a:solidFill>
-                    </a:lnB>
-                    <a:noFill/>
-                  </a:tcPr>
-                </a:tc>
-                <a:tc>
-                  <a:txBody>
-                    <a:bodyPr/>
-                    <a:lstStyle/>
-                    <a:p>
-                      <a:pPr marL="0" algn="ctr" defTabSz="914400" rtl="0" eaLnBrk="1" latinLnBrk="0" hangingPunct="1"/>
-                      <a:r>
-                        <a:rPr sz="800" b="1" kern="1200" dirty="0" err="1">
-                          <a:solidFill>
-                            <a:srgbClr val="0A0A0A"/>
-                          </a:solidFill>
-                          <a:latin typeface="微软雅黑" panose="020B0503020204020204" pitchFamily="34" charset="-122"/>
-                          <a:ea typeface="微软雅黑" panose="020B0503020204020204" pitchFamily="34" charset="-122"/>
-                          <a:cs typeface="+mn-cs"/>
-                        </a:rPr>
-                        <a:t>金额</a:t>
-                      </a:r>
-                      <a:endParaRPr sz="800" b="1" kern="1200" dirty="0">
-                        <a:solidFill>
-                          <a:srgbClr val="0A0A0A"/>
-                        </a:solidFill>
-                        <a:latin typeface="微软雅黑" panose="020B0503020204020204" pitchFamily="34" charset="-122"/>
-                        <a:ea typeface="微软雅黑" panose="020B0503020204020204" pitchFamily="34" charset="-122"/>
-                        <a:cs typeface="+mn-cs"/>
-                      </a:endParaRPr>
-                    </a:p>
-                  </a:txBody>
-                  <a:tcPr marL="27432" marR="27432" marT="9144" marB="9144">
-                    <a:lnL>
-                      <a:noFill/>
-                    </a:lnL>
-                    <a:lnR>
-                      <a:noFill/>
-                    </a:lnR>
-                    <a:lnT>
-                      <a:noFill/>
-                    </a:lnT>
-                    <a:lnB w="19050">
-                      <a:solidFill>
-                        <a:srgbClr val="0A0A0A"/>
-                      </a:solidFill>
-                    </a:lnB>
-                    <a:noFill/>
-                  </a:tcPr>
-                </a:tc>
-                <a:tc>
-                  <a:txBody>
-                    <a:bodyPr/>
-                    <a:lstStyle/>
-                    <a:p>
-                      <a:pPr marL="0" algn="ctr" defTabSz="914400" rtl="0" eaLnBrk="1" latinLnBrk="0" hangingPunct="1"/>
-                      <a:r>
-                        <a:rPr sz="800" b="1" kern="1200" dirty="0" err="1">
-                          <a:solidFill>
-                            <a:srgbClr val="0A0A0A"/>
-                          </a:solidFill>
-                          <a:latin typeface="微软雅黑" panose="020B0503020204020204" pitchFamily="34" charset="-122"/>
-                          <a:ea typeface="微软雅黑" panose="020B0503020204020204" pitchFamily="34" charset="-122"/>
-                          <a:cs typeface="+mn-cs"/>
-                        </a:rPr>
-                        <a:t>方向</a:t>
-                      </a:r>
-                      <a:endParaRPr sz="800" b="1" kern="1200" dirty="0">
-                        <a:solidFill>
-                          <a:srgbClr val="0A0A0A"/>
-                        </a:solidFill>
-                        <a:latin typeface="微软雅黑" panose="020B0503020204020204" pitchFamily="34" charset="-122"/>
-                        <a:ea typeface="微软雅黑" panose="020B0503020204020204" pitchFamily="34" charset="-122"/>
-                        <a:cs typeface="+mn-cs"/>
-                      </a:endParaRPr>
-                    </a:p>
-                  </a:txBody>
-                  <a:tcPr marL="27432" marR="27432" marT="9144" marB="9144">
-                    <a:lnL>
-                      <a:noFill/>
-                    </a:lnL>
-                    <a:lnR>
-                      <a:noFill/>
-                    </a:lnR>
-                    <a:lnT>
-                      <a:noFill/>
-                    </a:lnT>
-                    <a:lnB w="19050">
-                      <a:solidFill>
-                        <a:srgbClr val="0A0A0A"/>
-                      </a:solidFill>
-                    </a:lnB>
-                    <a:noFill/>
-                  </a:tcPr>
-                </a:tc>
-                <a:tc>
-                  <a:txBody>
-                    <a:bodyPr/>
-                    <a:lstStyle/>
-                    <a:p>
-                      <a:pPr marL="0" algn="ctr" defTabSz="914400" rtl="0" eaLnBrk="1" latinLnBrk="0" hangingPunct="1"/>
-                      <a:r>
-                        <a:rPr sz="800" b="1" kern="1200" dirty="0" err="1">
-                          <a:solidFill>
-                            <a:srgbClr val="0A0A0A"/>
-                          </a:solidFill>
-                          <a:latin typeface="微软雅黑" panose="020B0503020204020204" pitchFamily="34" charset="-122"/>
-                          <a:ea typeface="微软雅黑" panose="020B0503020204020204" pitchFamily="34" charset="-122"/>
-                          <a:cs typeface="+mn-cs"/>
-                        </a:rPr>
-                        <a:t>交易描述</a:t>
-                      </a:r>
-                      <a:endParaRPr sz="800" b="1" kern="1200" dirty="0">
-                        <a:solidFill>
-                          <a:srgbClr val="0A0A0A"/>
-                        </a:solidFill>
-                        <a:latin typeface="微软雅黑" panose="020B0503020204020204" pitchFamily="34" charset="-122"/>
-                        <a:ea typeface="微软雅黑" panose="020B0503020204020204" pitchFamily="34" charset="-122"/>
-                        <a:cs typeface="+mn-cs"/>
-                      </a:endParaRPr>
-                    </a:p>
-                  </a:txBody>
-                  <a:tcPr marL="27432" marR="27432" marT="9144" marB="9144">
-                    <a:lnL>
-                      <a:noFill/>
-                    </a:lnL>
-                    <a:lnR>
-                      <a:noFill/>
-                    </a:lnR>
-                    <a:lnT>
-                      <a:noFill/>
-                    </a:lnT>
-                    <a:lnB w="19050" cap="flat" cmpd="sng" algn="ctr">
-                      <a:solidFill>
-                        <a:srgbClr val="0A0A0A"/>
-                      </a:solidFill>
-                      <a:prstDash val="solid"/>
-                      <a:round/>
-                      <a:headEnd type="none" w="med" len="med"/>
-                      <a:tailEnd type="none" w="med" len="med"/>
-                    </a:lnB>
-                    <a:noFill/>
-                  </a:tcPr>
-                </a:tc>
-                <a:extLst>
-                  <a:ext uri="{0D108BD9-81ED-4DB2-BD59-A6C34878D82A}">
-                    <a16:rowId xmlns:a16="http://schemas.microsoft.com/office/drawing/2014/main" val="10000"/>
-                  </a:ext>
-                </a:extLst>
-              </a:tr>
-              <a:tr h="170373">
-                <a:tc>
-                  <a:txBody>
-                    <a:bodyPr/>
-                    <a:lstStyle/>
-                    <a:p>
-                      <a:pPr marL="0" algn="ctr" defTabSz="914400" rtl="0" eaLnBrk="1" latinLnBrk="0" hangingPunct="1"/>
-                      <a:r>
-                        <a:rPr sz="800" b="0" kern="1200" dirty="0">
-                          <a:solidFill>
-                            <a:srgbClr val="0A0A0A"/>
-                          </a:solidFill>
-                          <a:latin typeface="微软雅黑" panose="020B0503020204020204" pitchFamily="34" charset="-122"/>
-                          <a:ea typeface="微软雅黑" panose="020B0503020204020204" pitchFamily="34" charset="-122"/>
-                          <a:cs typeface="+mn-cs"/>
-                        </a:rPr>
-                        <a:t>2026/03/26</a:t>
-                      </a:r>
-                    </a:p>
-                  </a:txBody>
-                  <a:tcPr marL="27432" marR="27432" marT="9144" marB="9144">
-                    <a:lnL>
-                      <a:noFill/>
-                    </a:lnL>
-                    <a:lnR>
-                      <a:noFill/>
-                    </a:lnR>
-                    <a:lnT w="19050" cap="flat" cmpd="sng" algn="ctr">
-                      <a:solidFill>
-                        <a:srgbClr val="0A0A0A"/>
-                      </a:solidFill>
-                      <a:prstDash val="solid"/>
-                      <a:round/>
-                      <a:headEnd type="none" w="med" len="med"/>
-                      <a:tailEnd type="none" w="med" len="med"/>
-                    </a:lnT>
-                    <a:lnB w="9525">
-                      <a:solidFill>
-                        <a:srgbClr val="D6D6D6"/>
-                      </a:solidFill>
-                    </a:lnB>
-                    <a:noFill/>
-                  </a:tcPr>
-                </a:tc>
-                <a:tc>
-                  <a:txBody>
-                    <a:bodyPr/>
-                    <a:lstStyle/>
-                    <a:p>
-                      <a:pPr marL="0" algn="ctr" defTabSz="914400" rtl="0" eaLnBrk="1" latinLnBrk="0" hangingPunct="1"/>
-                      <a:r>
-                        <a:rPr sz="800" b="0" kern="1200" dirty="0">
-                          <a:solidFill>
-                            <a:srgbClr val="0A0A0A"/>
-                          </a:solidFill>
-                          <a:latin typeface="微软雅黑" panose="020B0503020204020204" pitchFamily="34" charset="-122"/>
-                          <a:ea typeface="微软雅黑" panose="020B0503020204020204" pitchFamily="34" charset="-122"/>
-                          <a:cs typeface="+mn-cs"/>
-                        </a:rPr>
-                        <a:t>A$156</a:t>
-                      </a:r>
-                    </a:p>
-                  </a:txBody>
-                  <a:tcPr marL="27432" marR="27432" marT="9144" marB="9144">
-                    <a:lnL>
-                      <a:noFill/>
-                    </a:lnL>
-                    <a:lnR>
-                      <a:noFill/>
-                    </a:lnR>
-                    <a:lnT w="19050" cap="flat" cmpd="sng" algn="ctr">
-                      <a:solidFill>
-                        <a:srgbClr val="0A0A0A"/>
-                      </a:solidFill>
-                      <a:prstDash val="solid"/>
-                      <a:round/>
-                      <a:headEnd type="none" w="med" len="med"/>
-                      <a:tailEnd type="none" w="med" len="med"/>
-                    </a:lnT>
-                    <a:lnB w="9525">
-                      <a:solidFill>
-                        <a:srgbClr val="D6D6D6"/>
-                      </a:solidFill>
-                    </a:lnB>
-                    <a:noFill/>
-                  </a:tcPr>
-                </a:tc>
-                <a:tc>
-                  <a:txBody>
-                    <a:bodyPr/>
-                    <a:lstStyle/>
-                    <a:p>
-                      <a:pPr marL="0" algn="ctr" defTabSz="914400" rtl="0" eaLnBrk="1" latinLnBrk="0" hangingPunct="1"/>
-                      <a:r>
-                        <a:rPr sz="800" b="0" kern="1200" dirty="0">
-                          <a:solidFill>
-                            <a:srgbClr val="0A0A0A"/>
-                          </a:solidFill>
-                          <a:latin typeface="微软雅黑" panose="020B0503020204020204" pitchFamily="34" charset="-122"/>
-                          <a:ea typeface="微软雅黑" panose="020B0503020204020204" pitchFamily="34" charset="-122"/>
-                          <a:cs typeface="+mn-cs"/>
-                        </a:rPr>
-                        <a:t>Debit</a:t>
-                      </a:r>
-                    </a:p>
-                  </a:txBody>
-                  <a:tcPr marL="27432" marR="27432" marT="9144" marB="9144">
-                    <a:lnL>
-                      <a:noFill/>
-                    </a:lnL>
-                    <a:lnR>
-                      <a:noFill/>
-                    </a:lnR>
-                    <a:lnT w="19050" cap="flat" cmpd="sng" algn="ctr">
-                      <a:solidFill>
-                        <a:srgbClr val="0A0A0A"/>
-                      </a:solidFill>
-                      <a:prstDash val="solid"/>
-                      <a:round/>
-                      <a:headEnd type="none" w="med" len="med"/>
-                      <a:tailEnd type="none" w="med" len="med"/>
-                    </a:lnT>
-                    <a:lnB w="9525">
-                      <a:solidFill>
-                        <a:srgbClr val="D6D6D6"/>
-                      </a:solidFill>
-                    </a:lnB>
-                    <a:noFill/>
-                  </a:tcPr>
-                </a:tc>
-                <a:tc>
-                  <a:txBody>
-                    <a:bodyPr/>
-                    <a:lstStyle/>
-                    <a:p>
-                      <a:pPr marL="0" algn="ctr" defTabSz="914400" rtl="0" eaLnBrk="1" latinLnBrk="0" hangingPunct="1"/>
-                      <a:r>
-                        <a:rPr sz="800" b="0" kern="1200" dirty="0">
-                          <a:solidFill>
-                            <a:srgbClr val="0A0A0A"/>
-                          </a:solidFill>
-                          <a:latin typeface="微软雅黑" panose="020B0503020204020204" pitchFamily="34" charset="-122"/>
-                          <a:ea typeface="微软雅黑" panose="020B0503020204020204" pitchFamily="34" charset="-122"/>
-                          <a:cs typeface="+mn-cs"/>
-                        </a:rPr>
-                        <a:t>BILL PAY Fair Go Finance DT.58oa72 SACC 239</a:t>
-                      </a:r>
-                    </a:p>
-                  </a:txBody>
-                  <a:tcPr marL="27432" marR="27432" marT="9144" marB="9144">
-                    <a:lnL>
-                      <a:noFill/>
-                    </a:lnL>
-                    <a:lnR>
-                      <a:noFill/>
-                    </a:lnR>
-                    <a:lnT w="19050" cap="flat" cmpd="sng" algn="ctr">
-                      <a:solidFill>
-                        <a:srgbClr val="0A0A0A"/>
-                      </a:solidFill>
-                      <a:prstDash val="solid"/>
-                      <a:round/>
-                      <a:headEnd type="none" w="med" len="med"/>
-                      <a:tailEnd type="none" w="med" len="med"/>
-                    </a:lnT>
-                    <a:lnB w="9525" cap="flat" cmpd="sng" algn="ctr">
-                      <a:solidFill>
-                        <a:srgbClr val="D6D6D6"/>
-                      </a:solidFill>
-                      <a:prstDash val="solid"/>
-                      <a:round/>
-                      <a:headEnd type="none" w="med" len="med"/>
-                      <a:tailEnd type="none" w="med" len="med"/>
-                    </a:lnB>
-                    <a:noFill/>
-                  </a:tcPr>
-                </a:tc>
-                <a:extLst>
-                  <a:ext uri="{0D108BD9-81ED-4DB2-BD59-A6C34878D82A}">
-                    <a16:rowId xmlns:a16="http://schemas.microsoft.com/office/drawing/2014/main" val="10001"/>
-                  </a:ext>
-                </a:extLst>
-              </a:tr>
-              <a:tr h="170373">
-                <a:tc>
-                  <a:txBody>
-                    <a:bodyPr/>
-                    <a:lstStyle/>
-                    <a:p>
-                      <a:pPr marL="0" algn="ctr" defTabSz="914400" rtl="0" eaLnBrk="1" latinLnBrk="0" hangingPunct="1"/>
-                      <a:r>
-                        <a:rPr sz="800" b="0" kern="1200" dirty="0">
-                          <a:solidFill>
-                            <a:srgbClr val="0A0A0A"/>
-                          </a:solidFill>
-                          <a:latin typeface="微软雅黑" panose="020B0503020204020204" pitchFamily="34" charset="-122"/>
-                          <a:ea typeface="微软雅黑" panose="020B0503020204020204" pitchFamily="34" charset="-122"/>
-                          <a:cs typeface="+mn-cs"/>
-                        </a:rPr>
-                        <a:t>2026/03/28</a:t>
-                      </a:r>
-                    </a:p>
-                  </a:txBody>
-                  <a:tcPr marL="27432" marR="27432" marT="9144" marB="9144">
-                    <a:lnL>
-                      <a:noFill/>
-                    </a:lnL>
-                    <a:lnR>
-                      <a:noFill/>
-                    </a:lnR>
-                    <a:lnT w="9525" cap="flat" cmpd="sng" algn="ctr">
-                      <a:solidFill>
-                        <a:srgbClr val="D6D6D6"/>
-                      </a:solidFill>
-                      <a:prstDash val="solid"/>
-                      <a:round/>
-                      <a:headEnd type="none" w="med" len="med"/>
-                      <a:tailEnd type="none" w="med" len="med"/>
-                    </a:lnT>
-                    <a:lnB w="9525">
-                      <a:solidFill>
-                        <a:srgbClr val="D6D6D6"/>
-                      </a:solidFill>
-                    </a:lnB>
-                    <a:noFill/>
-                  </a:tcPr>
-                </a:tc>
-                <a:tc>
-                  <a:txBody>
-                    <a:bodyPr/>
-                    <a:lstStyle/>
-                    <a:p>
-                      <a:pPr marL="0" algn="ctr" defTabSz="914400" rtl="0" eaLnBrk="1" latinLnBrk="0" hangingPunct="1"/>
-                      <a:r>
-                        <a:rPr sz="800" b="0" kern="1200" dirty="0">
-                          <a:solidFill>
-                            <a:srgbClr val="0A0A0A"/>
-                          </a:solidFill>
-                          <a:latin typeface="微软雅黑" panose="020B0503020204020204" pitchFamily="34" charset="-122"/>
-                          <a:ea typeface="微软雅黑" panose="020B0503020204020204" pitchFamily="34" charset="-122"/>
-                          <a:cs typeface="+mn-cs"/>
-                        </a:rPr>
-                        <a:t>A$12.40</a:t>
-                      </a:r>
-                    </a:p>
-                  </a:txBody>
-                  <a:tcPr marL="27432" marR="27432" marT="9144" marB="9144">
-                    <a:lnL>
-                      <a:noFill/>
-                    </a:lnL>
-                    <a:lnR>
-                      <a:noFill/>
-                    </a:lnR>
-                    <a:lnT w="9525" cap="flat" cmpd="sng" algn="ctr">
-                      <a:solidFill>
-                        <a:srgbClr val="D6D6D6"/>
-                      </a:solidFill>
-                      <a:prstDash val="solid"/>
-                      <a:round/>
-                      <a:headEnd type="none" w="med" len="med"/>
-                      <a:tailEnd type="none" w="med" len="med"/>
-                    </a:lnT>
-                    <a:lnB w="9525">
-                      <a:solidFill>
-                        <a:srgbClr val="D6D6D6"/>
-                      </a:solidFill>
-                    </a:lnB>
-                    <a:noFill/>
-                  </a:tcPr>
-                </a:tc>
-                <a:tc>
-                  <a:txBody>
-                    <a:bodyPr/>
-                    <a:lstStyle/>
-                    <a:p>
-                      <a:pPr marL="0" algn="ctr" defTabSz="914400" rtl="0" eaLnBrk="1" latinLnBrk="0" hangingPunct="1"/>
-                      <a:r>
-                        <a:rPr sz="800" b="0" kern="1200" dirty="0">
-                          <a:solidFill>
-                            <a:srgbClr val="0A0A0A"/>
-                          </a:solidFill>
-                          <a:latin typeface="微软雅黑" panose="020B0503020204020204" pitchFamily="34" charset="-122"/>
-                          <a:ea typeface="微软雅黑" panose="020B0503020204020204" pitchFamily="34" charset="-122"/>
-                          <a:cs typeface="+mn-cs"/>
-                        </a:rPr>
-                        <a:t>Debit</a:t>
-                      </a:r>
-                    </a:p>
-                  </a:txBody>
-                  <a:tcPr marL="27432" marR="27432" marT="9144" marB="9144">
-                    <a:lnL>
-                      <a:noFill/>
-                    </a:lnL>
-                    <a:lnR>
-                      <a:noFill/>
-                    </a:lnR>
-                    <a:lnT w="9525" cap="flat" cmpd="sng" algn="ctr">
-                      <a:solidFill>
-                        <a:srgbClr val="D6D6D6"/>
-                      </a:solidFill>
-                      <a:prstDash val="solid"/>
-                      <a:round/>
-                      <a:headEnd type="none" w="med" len="med"/>
-                      <a:tailEnd type="none" w="med" len="med"/>
-                    </a:lnT>
-                    <a:lnB w="9525">
-                      <a:solidFill>
-                        <a:srgbClr val="D6D6D6"/>
-                      </a:solidFill>
-                    </a:lnB>
-                    <a:noFill/>
-                  </a:tcPr>
-                </a:tc>
-                <a:tc>
-                  <a:txBody>
-                    <a:bodyPr/>
-                    <a:lstStyle/>
-                    <a:p>
-                      <a:pPr marL="0" algn="ctr" defTabSz="914400" rtl="0" eaLnBrk="1" latinLnBrk="0" hangingPunct="1"/>
-                      <a:r>
-                        <a:rPr sz="800" b="0" kern="1200" dirty="0">
-                          <a:solidFill>
-                            <a:srgbClr val="0A0A0A"/>
-                          </a:solidFill>
-                          <a:latin typeface="微软雅黑" panose="020B0503020204020204" pitchFamily="34" charset="-122"/>
-                          <a:ea typeface="微软雅黑" panose="020B0503020204020204" pitchFamily="34" charset="-122"/>
-                          <a:cs typeface="+mn-cs"/>
-                        </a:rPr>
-                        <a:t>MCDONALDS BRISBANE</a:t>
-                      </a:r>
-                    </a:p>
-                  </a:txBody>
-                  <a:tcPr marL="27432" marR="27432" marT="9144" marB="9144">
-                    <a:lnL>
-                      <a:noFill/>
-                    </a:lnL>
-                    <a:lnR>
-                      <a:noFill/>
-                    </a:lnR>
-                    <a:lnT w="9525" cap="flat" cmpd="sng" algn="ctr">
-                      <a:solidFill>
-                        <a:srgbClr val="D6D6D6"/>
-                      </a:solidFill>
-                      <a:prstDash val="solid"/>
-                      <a:round/>
-                      <a:headEnd type="none" w="med" len="med"/>
-                      <a:tailEnd type="none" w="med" len="med"/>
-                    </a:lnT>
-                    <a:lnB w="9525" cap="flat" cmpd="sng" algn="ctr">
-                      <a:solidFill>
-                        <a:srgbClr val="D6D6D6"/>
-                      </a:solidFill>
-                      <a:prstDash val="solid"/>
-                      <a:round/>
-                      <a:headEnd type="none" w="med" len="med"/>
-                      <a:tailEnd type="none" w="med" len="med"/>
-                    </a:lnB>
-                    <a:noFill/>
-                  </a:tcPr>
-                </a:tc>
-                <a:extLst>
-                  <a:ext uri="{0D108BD9-81ED-4DB2-BD59-A6C34878D82A}">
-                    <a16:rowId xmlns:a16="http://schemas.microsoft.com/office/drawing/2014/main" val="10002"/>
-                  </a:ext>
-                </a:extLst>
-              </a:tr>
-              <a:tr h="170373">
-                <a:tc>
-                  <a:txBody>
-                    <a:bodyPr/>
-                    <a:lstStyle/>
-                    <a:p>
-                      <a:pPr marL="0" algn="ctr" defTabSz="914400" rtl="0" eaLnBrk="1" latinLnBrk="0" hangingPunct="1"/>
-                      <a:r>
-                        <a:rPr sz="800" b="0" kern="1200">
-                          <a:solidFill>
-                            <a:srgbClr val="0A0A0A"/>
-                          </a:solidFill>
-                          <a:latin typeface="微软雅黑" panose="020B0503020204020204" pitchFamily="34" charset="-122"/>
-                          <a:ea typeface="微软雅黑" panose="020B0503020204020204" pitchFamily="34" charset="-122"/>
-                          <a:cs typeface="+mn-cs"/>
-                        </a:rPr>
-                        <a:t>2026/04/02</a:t>
-                      </a:r>
-                    </a:p>
-                  </a:txBody>
-                  <a:tcPr marL="27432" marR="27432" marT="9144" marB="9144">
-                    <a:lnL>
-                      <a:noFill/>
-                    </a:lnL>
-                    <a:lnR>
-                      <a:noFill/>
-                    </a:lnR>
-                    <a:lnT w="9525" cap="flat" cmpd="sng" algn="ctr">
-                      <a:solidFill>
-                        <a:srgbClr val="D6D6D6"/>
-                      </a:solidFill>
-                      <a:prstDash val="solid"/>
-                      <a:round/>
-                      <a:headEnd type="none" w="med" len="med"/>
-                      <a:tailEnd type="none" w="med" len="med"/>
-                    </a:lnT>
-                    <a:lnB w="9525">
-                      <a:solidFill>
-                        <a:srgbClr val="D6D6D6"/>
-                      </a:solidFill>
-                    </a:lnB>
-                    <a:noFill/>
-                  </a:tcPr>
-                </a:tc>
-                <a:tc>
-                  <a:txBody>
-                    <a:bodyPr/>
-                    <a:lstStyle/>
-                    <a:p>
-                      <a:pPr marL="0" algn="ctr" defTabSz="914400" rtl="0" eaLnBrk="1" latinLnBrk="0" hangingPunct="1"/>
-                      <a:r>
-                        <a:rPr sz="800" b="0" kern="1200" dirty="0">
-                          <a:solidFill>
-                            <a:srgbClr val="0A0A0A"/>
-                          </a:solidFill>
-                          <a:latin typeface="微软雅黑" panose="020B0503020204020204" pitchFamily="34" charset="-122"/>
-                          <a:ea typeface="微软雅黑" panose="020B0503020204020204" pitchFamily="34" charset="-122"/>
-                          <a:cs typeface="+mn-cs"/>
-                        </a:rPr>
-                        <a:t>A$35.90</a:t>
-                      </a:r>
-                    </a:p>
-                  </a:txBody>
-                  <a:tcPr marL="27432" marR="27432" marT="9144" marB="9144">
-                    <a:lnL>
-                      <a:noFill/>
-                    </a:lnL>
-                    <a:lnR>
-                      <a:noFill/>
-                    </a:lnR>
-                    <a:lnT w="9525" cap="flat" cmpd="sng" algn="ctr">
-                      <a:solidFill>
-                        <a:srgbClr val="D6D6D6"/>
-                      </a:solidFill>
-                      <a:prstDash val="solid"/>
-                      <a:round/>
-                      <a:headEnd type="none" w="med" len="med"/>
-                      <a:tailEnd type="none" w="med" len="med"/>
-                    </a:lnT>
-                    <a:lnB w="9525">
-                      <a:solidFill>
-                        <a:srgbClr val="D6D6D6"/>
-                      </a:solidFill>
-                    </a:lnB>
-                    <a:noFill/>
-                  </a:tcPr>
-                </a:tc>
-                <a:tc>
-                  <a:txBody>
-                    <a:bodyPr/>
-                    <a:lstStyle/>
-                    <a:p>
-                      <a:pPr marL="0" algn="ctr" defTabSz="914400" rtl="0" eaLnBrk="1" latinLnBrk="0" hangingPunct="1"/>
-                      <a:r>
-                        <a:rPr sz="800" b="0" kern="1200" dirty="0">
-                          <a:solidFill>
-                            <a:srgbClr val="0A0A0A"/>
-                          </a:solidFill>
-                          <a:latin typeface="微软雅黑" panose="020B0503020204020204" pitchFamily="34" charset="-122"/>
-                          <a:ea typeface="微软雅黑" panose="020B0503020204020204" pitchFamily="34" charset="-122"/>
-                          <a:cs typeface="+mn-cs"/>
-                        </a:rPr>
-                        <a:t>Debit</a:t>
-                      </a:r>
-                    </a:p>
-                  </a:txBody>
-                  <a:tcPr marL="27432" marR="27432" marT="9144" marB="9144">
-                    <a:lnL>
-                      <a:noFill/>
-                    </a:lnL>
-                    <a:lnR>
-                      <a:noFill/>
-                    </a:lnR>
-                    <a:lnT w="9525" cap="flat" cmpd="sng" algn="ctr">
-                      <a:solidFill>
-                        <a:srgbClr val="D6D6D6"/>
-                      </a:solidFill>
-                      <a:prstDash val="solid"/>
-                      <a:round/>
-                      <a:headEnd type="none" w="med" len="med"/>
-                      <a:tailEnd type="none" w="med" len="med"/>
-                    </a:lnT>
-                    <a:lnB w="9525">
-                      <a:solidFill>
-                        <a:srgbClr val="D6D6D6"/>
-                      </a:solidFill>
-                    </a:lnB>
-                    <a:noFill/>
-                  </a:tcPr>
-                </a:tc>
-                <a:tc>
-                  <a:txBody>
-                    <a:bodyPr/>
-                    <a:lstStyle/>
-                    <a:p>
-                      <a:pPr marL="0" algn="ctr" defTabSz="914400" rtl="0" eaLnBrk="1" latinLnBrk="0" hangingPunct="1"/>
-                      <a:r>
-                        <a:rPr sz="800" b="0" kern="1200" dirty="0">
-                          <a:solidFill>
-                            <a:srgbClr val="0A0A0A"/>
-                          </a:solidFill>
-                          <a:latin typeface="微软雅黑" panose="020B0503020204020204" pitchFamily="34" charset="-122"/>
-                          <a:ea typeface="微软雅黑" panose="020B0503020204020204" pitchFamily="34" charset="-122"/>
-                          <a:cs typeface="+mn-cs"/>
-                        </a:rPr>
-                        <a:t>CHEMIST WAREHOUSE 123</a:t>
-                      </a:r>
-                    </a:p>
-                  </a:txBody>
-                  <a:tcPr marL="27432" marR="27432" marT="9144" marB="9144">
-                    <a:lnL>
-                      <a:noFill/>
-                    </a:lnL>
-                    <a:lnR>
-                      <a:noFill/>
-                    </a:lnR>
-                    <a:lnT w="9525" cap="flat" cmpd="sng" algn="ctr">
-                      <a:solidFill>
-                        <a:srgbClr val="D6D6D6"/>
-                      </a:solidFill>
-                      <a:prstDash val="solid"/>
-                      <a:round/>
-                      <a:headEnd type="none" w="med" len="med"/>
-                      <a:tailEnd type="none" w="med" len="med"/>
-                    </a:lnT>
-                    <a:lnB w="9525" cap="flat" cmpd="sng" algn="ctr">
-                      <a:solidFill>
-                        <a:srgbClr val="D6D6D6"/>
-                      </a:solidFill>
-                      <a:prstDash val="solid"/>
-                      <a:round/>
-                      <a:headEnd type="none" w="med" len="med"/>
-                      <a:tailEnd type="none" w="med" len="med"/>
-                    </a:lnB>
-                    <a:noFill/>
-                  </a:tcPr>
-                </a:tc>
-                <a:extLst>
-                  <a:ext uri="{0D108BD9-81ED-4DB2-BD59-A6C34878D82A}">
-                    <a16:rowId xmlns:a16="http://schemas.microsoft.com/office/drawing/2014/main" val="10003"/>
-                  </a:ext>
-                </a:extLst>
-              </a:tr>
-              <a:tr h="170373">
-                <a:tc>
-                  <a:txBody>
-                    <a:bodyPr/>
-                    <a:lstStyle/>
-                    <a:p>
-                      <a:pPr marL="0" algn="ctr" defTabSz="914400" rtl="0" eaLnBrk="1" latinLnBrk="0" hangingPunct="1"/>
-                      <a:r>
-                        <a:rPr sz="800" b="0" kern="1200">
-                          <a:solidFill>
-                            <a:srgbClr val="0A0A0A"/>
-                          </a:solidFill>
-                          <a:latin typeface="微软雅黑" panose="020B0503020204020204" pitchFamily="34" charset="-122"/>
-                          <a:ea typeface="微软雅黑" panose="020B0503020204020204" pitchFamily="34" charset="-122"/>
-                          <a:cs typeface="+mn-cs"/>
-                        </a:rPr>
-                        <a:t>2026/04/08</a:t>
-                      </a:r>
-                    </a:p>
-                  </a:txBody>
-                  <a:tcPr marL="27432" marR="27432" marT="9144" marB="9144">
-                    <a:lnL>
-                      <a:noFill/>
-                    </a:lnL>
-                    <a:lnR>
-                      <a:noFill/>
-                    </a:lnR>
-                    <a:lnT w="9525" cap="flat" cmpd="sng" algn="ctr">
-                      <a:solidFill>
-                        <a:srgbClr val="D6D6D6"/>
-                      </a:solidFill>
-                      <a:prstDash val="solid"/>
-                      <a:round/>
-                      <a:headEnd type="none" w="med" len="med"/>
-                      <a:tailEnd type="none" w="med" len="med"/>
-                    </a:lnT>
-                    <a:lnB w="9525">
-                      <a:solidFill>
-                        <a:srgbClr val="D6D6D6"/>
-                      </a:solidFill>
-                    </a:lnB>
-                    <a:noFill/>
-                  </a:tcPr>
-                </a:tc>
-                <a:tc>
-                  <a:txBody>
-                    <a:bodyPr/>
-                    <a:lstStyle/>
-                    <a:p>
-                      <a:pPr marL="0" algn="ctr" defTabSz="914400" rtl="0" eaLnBrk="1" latinLnBrk="0" hangingPunct="1"/>
-                      <a:r>
-                        <a:rPr sz="800" b="0" kern="1200" dirty="0">
-                          <a:solidFill>
-                            <a:srgbClr val="0A0A0A"/>
-                          </a:solidFill>
-                          <a:latin typeface="微软雅黑" panose="020B0503020204020204" pitchFamily="34" charset="-122"/>
-                          <a:ea typeface="微软雅黑" panose="020B0503020204020204" pitchFamily="34" charset="-122"/>
-                          <a:cs typeface="+mn-cs"/>
-                        </a:rPr>
-                        <a:t>A$8.99</a:t>
-                      </a:r>
-                    </a:p>
-                  </a:txBody>
-                  <a:tcPr marL="27432" marR="27432" marT="9144" marB="9144">
-                    <a:lnL>
-                      <a:noFill/>
-                    </a:lnL>
-                    <a:lnR>
-                      <a:noFill/>
-                    </a:lnR>
-                    <a:lnT w="9525" cap="flat" cmpd="sng" algn="ctr">
-                      <a:solidFill>
-                        <a:srgbClr val="D6D6D6"/>
-                      </a:solidFill>
-                      <a:prstDash val="solid"/>
-                      <a:round/>
-                      <a:headEnd type="none" w="med" len="med"/>
-                      <a:tailEnd type="none" w="med" len="med"/>
-                    </a:lnT>
-                    <a:lnB w="9525">
-                      <a:solidFill>
-                        <a:srgbClr val="D6D6D6"/>
-                      </a:solidFill>
-                    </a:lnB>
-                    <a:noFill/>
-                  </a:tcPr>
-                </a:tc>
-                <a:tc>
-                  <a:txBody>
-                    <a:bodyPr/>
-                    <a:lstStyle/>
-                    <a:p>
-                      <a:pPr marL="0" algn="ctr" defTabSz="914400" rtl="0" eaLnBrk="1" latinLnBrk="0" hangingPunct="1"/>
-                      <a:r>
-                        <a:rPr sz="800" b="0" kern="1200">
-                          <a:solidFill>
-                            <a:srgbClr val="0A0A0A"/>
-                          </a:solidFill>
-                          <a:latin typeface="微软雅黑" panose="020B0503020204020204" pitchFamily="34" charset="-122"/>
-                          <a:ea typeface="微软雅黑" panose="020B0503020204020204" pitchFamily="34" charset="-122"/>
-                          <a:cs typeface="+mn-cs"/>
-                        </a:rPr>
-                        <a:t>Debit</a:t>
-                      </a:r>
-                    </a:p>
-                  </a:txBody>
-                  <a:tcPr marL="27432" marR="27432" marT="9144" marB="9144">
-                    <a:lnL>
-                      <a:noFill/>
-                    </a:lnL>
-                    <a:lnR>
-                      <a:noFill/>
-                    </a:lnR>
-                    <a:lnT w="9525" cap="flat" cmpd="sng" algn="ctr">
-                      <a:solidFill>
-                        <a:srgbClr val="D6D6D6"/>
-                      </a:solidFill>
-                      <a:prstDash val="solid"/>
-                      <a:round/>
-                      <a:headEnd type="none" w="med" len="med"/>
-                      <a:tailEnd type="none" w="med" len="med"/>
-                    </a:lnT>
-                    <a:lnB w="9525">
-                      <a:solidFill>
-                        <a:srgbClr val="D6D6D6"/>
-                      </a:solidFill>
-                    </a:lnB>
-                    <a:noFill/>
-                  </a:tcPr>
-                </a:tc>
-                <a:tc>
-                  <a:txBody>
-                    <a:bodyPr/>
-                    <a:lstStyle/>
-                    <a:p>
-                      <a:pPr marL="0" algn="ctr" defTabSz="914400" rtl="0" eaLnBrk="1" latinLnBrk="0" hangingPunct="1"/>
-                      <a:r>
-                        <a:rPr sz="800" b="0" kern="1200" dirty="0">
-                          <a:solidFill>
-                            <a:srgbClr val="0A0A0A"/>
-                          </a:solidFill>
-                          <a:latin typeface="微软雅黑" panose="020B0503020204020204" pitchFamily="34" charset="-122"/>
-                          <a:ea typeface="微软雅黑" panose="020B0503020204020204" pitchFamily="34" charset="-122"/>
-                          <a:cs typeface="+mn-cs"/>
-                        </a:rPr>
-                        <a:t>AMZNPRIMEA*</a:t>
-                      </a:r>
-                    </a:p>
-                  </a:txBody>
-                  <a:tcPr marL="27432" marR="27432" marT="9144" marB="9144">
-                    <a:lnL>
-                      <a:noFill/>
-                    </a:lnL>
-                    <a:lnR>
-                      <a:noFill/>
-                    </a:lnR>
-                    <a:lnT w="9525" cap="flat" cmpd="sng" algn="ctr">
-                      <a:solidFill>
-                        <a:srgbClr val="D6D6D6"/>
-                      </a:solidFill>
-                      <a:prstDash val="solid"/>
-                      <a:round/>
-                      <a:headEnd type="none" w="med" len="med"/>
-                      <a:tailEnd type="none" w="med" len="med"/>
-                    </a:lnT>
-                    <a:lnB w="9525" cap="flat" cmpd="sng" algn="ctr">
-                      <a:solidFill>
-                        <a:srgbClr val="D6D6D6"/>
-                      </a:solidFill>
-                      <a:prstDash val="solid"/>
-                      <a:round/>
-                      <a:headEnd type="none" w="med" len="med"/>
-                      <a:tailEnd type="none" w="med" len="med"/>
-                    </a:lnB>
-                    <a:noFill/>
-                  </a:tcPr>
-                </a:tc>
-                <a:extLst>
-                  <a:ext uri="{0D108BD9-81ED-4DB2-BD59-A6C34878D82A}">
-                    <a16:rowId xmlns:a16="http://schemas.microsoft.com/office/drawing/2014/main" val="10004"/>
-                  </a:ext>
-                </a:extLst>
-              </a:tr>
-              <a:tr h="170373">
-                <a:tc>
-                  <a:txBody>
-                    <a:bodyPr/>
-                    <a:lstStyle/>
-                    <a:p>
-                      <a:pPr marL="0" algn="ctr" defTabSz="914400" rtl="0" eaLnBrk="1" latinLnBrk="0" hangingPunct="1"/>
-                      <a:r>
-                        <a:rPr sz="800" b="0" kern="1200">
-                          <a:solidFill>
-                            <a:srgbClr val="0A0A0A"/>
-                          </a:solidFill>
-                          <a:latin typeface="微软雅黑" panose="020B0503020204020204" pitchFamily="34" charset="-122"/>
-                          <a:ea typeface="微软雅黑" panose="020B0503020204020204" pitchFamily="34" charset="-122"/>
-                          <a:cs typeface="+mn-cs"/>
-                        </a:rPr>
-                        <a:t>2026/04/10</a:t>
-                      </a:r>
-                    </a:p>
-                  </a:txBody>
-                  <a:tcPr marL="27432" marR="27432" marT="9144" marB="9144">
-                    <a:lnL>
-                      <a:noFill/>
-                    </a:lnL>
-                    <a:lnR>
-                      <a:noFill/>
-                    </a:lnR>
-                    <a:lnT w="9525" cap="flat" cmpd="sng" algn="ctr">
-                      <a:solidFill>
-                        <a:srgbClr val="D6D6D6"/>
-                      </a:solidFill>
-                      <a:prstDash val="solid"/>
-                      <a:round/>
-                      <a:headEnd type="none" w="med" len="med"/>
-                      <a:tailEnd type="none" w="med" len="med"/>
-                    </a:lnT>
-                    <a:lnB w="9525">
-                      <a:solidFill>
-                        <a:srgbClr val="D6D6D6"/>
-                      </a:solidFill>
-                    </a:lnB>
-                    <a:noFill/>
-                  </a:tcPr>
-                </a:tc>
-                <a:tc>
-                  <a:txBody>
-                    <a:bodyPr/>
-                    <a:lstStyle/>
-                    <a:p>
-                      <a:pPr marL="0" algn="ctr" defTabSz="914400" rtl="0" eaLnBrk="1" latinLnBrk="0" hangingPunct="1"/>
-                      <a:r>
-                        <a:rPr sz="800" b="0" kern="1200">
-                          <a:solidFill>
-                            <a:srgbClr val="0A0A0A"/>
-                          </a:solidFill>
-                          <a:latin typeface="微软雅黑" panose="020B0503020204020204" pitchFamily="34" charset="-122"/>
-                          <a:ea typeface="微软雅黑" panose="020B0503020204020204" pitchFamily="34" charset="-122"/>
-                          <a:cs typeface="+mn-cs"/>
-                        </a:rPr>
-                        <a:t>A$3,420.50</a:t>
-                      </a:r>
-                    </a:p>
-                  </a:txBody>
-                  <a:tcPr marL="27432" marR="27432" marT="9144" marB="9144">
-                    <a:lnL>
-                      <a:noFill/>
-                    </a:lnL>
-                    <a:lnR>
-                      <a:noFill/>
-                    </a:lnR>
-                    <a:lnT w="9525" cap="flat" cmpd="sng" algn="ctr">
-                      <a:solidFill>
-                        <a:srgbClr val="D6D6D6"/>
-                      </a:solidFill>
-                      <a:prstDash val="solid"/>
-                      <a:round/>
-                      <a:headEnd type="none" w="med" len="med"/>
-                      <a:tailEnd type="none" w="med" len="med"/>
-                    </a:lnT>
-                    <a:lnB w="9525">
-                      <a:solidFill>
-                        <a:srgbClr val="D6D6D6"/>
-                      </a:solidFill>
-                    </a:lnB>
-                    <a:noFill/>
-                  </a:tcPr>
-                </a:tc>
-                <a:tc>
-                  <a:txBody>
-                    <a:bodyPr/>
-                    <a:lstStyle/>
-                    <a:p>
-                      <a:pPr marL="0" algn="ctr" defTabSz="914400" rtl="0" eaLnBrk="1" latinLnBrk="0" hangingPunct="1"/>
-                      <a:r>
-                        <a:rPr sz="800" b="0" kern="1200">
-                          <a:solidFill>
-                            <a:srgbClr val="0A0A0A"/>
-                          </a:solidFill>
-                          <a:latin typeface="微软雅黑" panose="020B0503020204020204" pitchFamily="34" charset="-122"/>
-                          <a:ea typeface="微软雅黑" panose="020B0503020204020204" pitchFamily="34" charset="-122"/>
-                          <a:cs typeface="+mn-cs"/>
-                        </a:rPr>
-                        <a:t>Credit</a:t>
-                      </a:r>
-                    </a:p>
-                  </a:txBody>
-                  <a:tcPr marL="27432" marR="27432" marT="9144" marB="9144">
-                    <a:lnL>
-                      <a:noFill/>
-                    </a:lnL>
-                    <a:lnR>
-                      <a:noFill/>
-                    </a:lnR>
-                    <a:lnT w="9525" cap="flat" cmpd="sng" algn="ctr">
-                      <a:solidFill>
-                        <a:srgbClr val="D6D6D6"/>
-                      </a:solidFill>
-                      <a:prstDash val="solid"/>
-                      <a:round/>
-                      <a:headEnd type="none" w="med" len="med"/>
-                      <a:tailEnd type="none" w="med" len="med"/>
-                    </a:lnT>
-                    <a:lnB w="9525">
-                      <a:solidFill>
-                        <a:srgbClr val="D6D6D6"/>
-                      </a:solidFill>
-                    </a:lnB>
-                    <a:noFill/>
-                  </a:tcPr>
-                </a:tc>
-                <a:tc>
-                  <a:txBody>
-                    <a:bodyPr/>
-                    <a:lstStyle/>
-                    <a:p>
-                      <a:pPr marL="0" algn="ctr" defTabSz="914400" rtl="0" eaLnBrk="1" latinLnBrk="0" hangingPunct="1"/>
-                      <a:r>
-                        <a:rPr sz="800" b="0" kern="1200" dirty="0">
-                          <a:solidFill>
-                            <a:srgbClr val="0A0A0A"/>
-                          </a:solidFill>
-                          <a:latin typeface="微软雅黑" panose="020B0503020204020204" pitchFamily="34" charset="-122"/>
-                          <a:ea typeface="微软雅黑" panose="020B0503020204020204" pitchFamily="34" charset="-122"/>
-                          <a:cs typeface="+mn-cs"/>
-                        </a:rPr>
-                        <a:t>PAYROLL ACME PTY LTD</a:t>
-                      </a:r>
-                    </a:p>
-                  </a:txBody>
-                  <a:tcPr marL="27432" marR="27432" marT="9144" marB="9144">
-                    <a:lnL>
-                      <a:noFill/>
-                    </a:lnL>
-                    <a:lnR>
-                      <a:noFill/>
-                    </a:lnR>
-                    <a:lnT w="9525" cap="flat" cmpd="sng" algn="ctr">
-                      <a:solidFill>
-                        <a:srgbClr val="D6D6D6"/>
-                      </a:solidFill>
-                      <a:prstDash val="solid"/>
-                      <a:round/>
-                      <a:headEnd type="none" w="med" len="med"/>
-                      <a:tailEnd type="none" w="med" len="med"/>
-                    </a:lnT>
-                    <a:lnB w="9525">
-                      <a:solidFill>
-                        <a:srgbClr val="D6D6D6"/>
-                      </a:solidFill>
-                    </a:lnB>
-                    <a:noFill/>
-                  </a:tcPr>
-                </a:tc>
-                <a:extLst>
-                  <a:ext uri="{0D108BD9-81ED-4DB2-BD59-A6C34878D82A}">
-                    <a16:rowId xmlns:a16="http://schemas.microsoft.com/office/drawing/2014/main" val="10005"/>
-                  </a:ext>
-                </a:extLst>
-              </a:tr>
-            </a:tbl>
-          </a:graphicData>
-        </a:graphic>
-      </p:graphicFrame>
-      <p:graphicFrame>
-        <p:nvGraphicFramePr>
-          <p:cNvPr id="16" name="init-table">
-            <a:extLst>
-              <a:ext uri="{FF2B5EF4-FFF2-40B4-BE49-F238E27FC236}">
-                <a16:creationId xmlns:a16="http://schemas.microsoft.com/office/drawing/2014/main" id="{3C86CAD7-1100-4D7C-B8CF-F22C4AFE4904}"/>
-              </a:ext>
-            </a:extLst>
-          </p:cNvPr>
-          <p:cNvGraphicFramePr>
-            <a:graphicFrameLocks noGrp="1"/>
-          </p:cNvGraphicFramePr>
-          <p:nvPr>
-            <p:extLst>
-              <p:ext uri="{D42A27DB-BD31-4B8C-83A1-F6EECF244321}">
-                <p14:modId xmlns:p14="http://schemas.microsoft.com/office/powerpoint/2010/main" val="4233041013"/>
-              </p:ext>
-            </p:extLst>
-          </p:nvPr>
-        </p:nvGraphicFramePr>
-        <p:xfrm>
-          <a:off x="568385" y="2839315"/>
-          <a:ext cx="10901631" cy="1022238"/>
-        </p:xfrm>
-        <a:graphic>
-          <a:graphicData uri="http://schemas.openxmlformats.org/drawingml/2006/table">
-            <a:tbl>
-              <a:tblPr/>
-              <a:tblGrid>
-                <a:gridCol w="796947">
-                  <a:extLst>
-                    <a:ext uri="{9D8B030D-6E8A-4147-A177-3AD203B41FA5}">
-                      <a16:colId xmlns:a16="http://schemas.microsoft.com/office/drawing/2014/main" val="20000"/>
-                    </a:ext>
-                  </a:extLst>
-                </a:gridCol>
-                <a:gridCol w="3717051">
-                  <a:extLst>
-                    <a:ext uri="{9D8B030D-6E8A-4147-A177-3AD203B41FA5}">
-                      <a16:colId xmlns:a16="http://schemas.microsoft.com/office/drawing/2014/main" val="20001"/>
-                    </a:ext>
-                  </a:extLst>
-                </a:gridCol>
-                <a:gridCol w="1159622">
-                  <a:extLst>
-                    <a:ext uri="{9D8B030D-6E8A-4147-A177-3AD203B41FA5}">
-                      <a16:colId xmlns:a16="http://schemas.microsoft.com/office/drawing/2014/main" val="2631831465"/>
-                    </a:ext>
-                  </a:extLst>
-                </a:gridCol>
-                <a:gridCol w="1277223">
-                  <a:extLst>
-                    <a:ext uri="{9D8B030D-6E8A-4147-A177-3AD203B41FA5}">
-                      <a16:colId xmlns:a16="http://schemas.microsoft.com/office/drawing/2014/main" val="20002"/>
-                    </a:ext>
-                  </a:extLst>
-                </a:gridCol>
-                <a:gridCol w="923613">
-                  <a:extLst>
-                    <a:ext uri="{9D8B030D-6E8A-4147-A177-3AD203B41FA5}">
-                      <a16:colId xmlns:a16="http://schemas.microsoft.com/office/drawing/2014/main" val="4140160165"/>
-                    </a:ext>
-                  </a:extLst>
-                </a:gridCol>
-                <a:gridCol w="676780">
-                  <a:extLst>
-                    <a:ext uri="{9D8B030D-6E8A-4147-A177-3AD203B41FA5}">
-                      <a16:colId xmlns:a16="http://schemas.microsoft.com/office/drawing/2014/main" val="2534051383"/>
-                    </a:ext>
-                  </a:extLst>
-                </a:gridCol>
-                <a:gridCol w="2350395">
-                  <a:extLst>
-                    <a:ext uri="{9D8B030D-6E8A-4147-A177-3AD203B41FA5}">
-                      <a16:colId xmlns:a16="http://schemas.microsoft.com/office/drawing/2014/main" val="994888910"/>
-                    </a:ext>
-                  </a:extLst>
-                </a:gridCol>
-              </a:tblGrid>
-              <a:tr h="170373">
-                <a:tc>
-                  <a:txBody>
-                    <a:bodyPr/>
-                    <a:lstStyle/>
-                    <a:p>
-                      <a:pPr algn="l"/>
-                      <a:r>
-                        <a:rPr sz="800" b="1">
-                          <a:solidFill>
-                            <a:srgbClr val="0A0A0A"/>
-                          </a:solidFill>
-                          <a:latin typeface="微软雅黑"/>
-                          <a:ea typeface="微软雅黑"/>
-                        </a:rPr>
-                        <a:t>日期</a:t>
-                      </a:r>
-                    </a:p>
-                  </a:txBody>
-                  <a:tcPr marL="27432" marR="27432" marT="9144" marB="9144">
-                    <a:lnL>
-                      <a:noFill/>
-                    </a:lnL>
-                    <a:lnR>
-                      <a:noFill/>
-                    </a:lnR>
-                    <a:lnT>
-                      <a:noFill/>
-                    </a:lnT>
-                    <a:lnB w="19050">
-                      <a:solidFill>
-                        <a:srgbClr val="0A0A0A"/>
-                      </a:solidFill>
-                    </a:lnB>
-                    <a:noFill/>
-                  </a:tcPr>
-                </a:tc>
-                <a:tc>
-                  <a:txBody>
-                    <a:bodyPr/>
-                    <a:lstStyle/>
-                    <a:p>
-                      <a:pPr algn="l"/>
-                      <a:r>
-                        <a:rPr sz="800" b="1" dirty="0" err="1">
-                          <a:solidFill>
-                            <a:srgbClr val="0A0A0A"/>
-                          </a:solidFill>
-                          <a:latin typeface="微软雅黑"/>
-                          <a:ea typeface="微软雅黑"/>
-                        </a:rPr>
-                        <a:t>交易描述</a:t>
-                      </a:r>
-                      <a:endParaRPr sz="800" b="1" dirty="0">
-                        <a:solidFill>
-                          <a:srgbClr val="0A0A0A"/>
-                        </a:solidFill>
-                        <a:latin typeface="微软雅黑"/>
-                        <a:ea typeface="微软雅黑"/>
-                      </a:endParaRPr>
-                    </a:p>
-                  </a:txBody>
-                  <a:tcPr marL="27432" marR="27432" marT="9144" marB="9144">
-                    <a:lnL>
-                      <a:noFill/>
-                    </a:lnL>
-                    <a:lnR>
-                      <a:noFill/>
-                    </a:lnR>
-                    <a:lnT>
-                      <a:noFill/>
-                    </a:lnT>
-                    <a:lnB w="19050">
-                      <a:solidFill>
-                        <a:srgbClr val="0A0A0A"/>
-                      </a:solidFill>
-                    </a:lnB>
-                    <a:noFill/>
-                  </a:tcPr>
-                </a:tc>
-                <a:tc>
-                  <a:txBody>
-                    <a:bodyPr/>
-                    <a:lstStyle/>
-                    <a:p>
-                      <a:pPr algn="l"/>
-                      <a:r>
-                        <a:rPr sz="800" b="1" dirty="0" err="1">
-                          <a:solidFill>
-                            <a:srgbClr val="0A0A0A"/>
-                          </a:solidFill>
-                          <a:latin typeface="微软雅黑"/>
-                          <a:ea typeface="微软雅黑"/>
-                        </a:rPr>
-                        <a:t>交易金额</a:t>
-                      </a:r>
-                      <a:endParaRPr sz="800" b="1" dirty="0">
-                        <a:solidFill>
-                          <a:srgbClr val="0A0A0A"/>
-                        </a:solidFill>
-                        <a:latin typeface="微软雅黑"/>
-                        <a:ea typeface="微软雅黑"/>
-                      </a:endParaRPr>
-                    </a:p>
-                  </a:txBody>
-                  <a:tcPr marL="27432" marR="27432" marT="9144" marB="9144">
-                    <a:lnL>
-                      <a:noFill/>
-                    </a:lnL>
-                    <a:lnR>
-                      <a:noFill/>
-                    </a:lnR>
-                    <a:lnT>
-                      <a:noFill/>
-                    </a:lnT>
-                    <a:lnB w="19050" cap="flat" cmpd="sng" algn="ctr">
-                      <a:solidFill>
-                        <a:srgbClr val="0A0A0A"/>
-                      </a:solidFill>
-                      <a:prstDash val="solid"/>
-                      <a:round/>
-                      <a:headEnd type="none" w="med" len="med"/>
-                      <a:tailEnd type="none" w="med" len="med"/>
-                    </a:lnB>
-                    <a:noFill/>
-                  </a:tcPr>
-                </a:tc>
-                <a:tc>
-                  <a:txBody>
-                    <a:bodyPr/>
-                    <a:lstStyle/>
-                    <a:p>
-                      <a:pPr algn="l"/>
-                      <a:r>
-                        <a:rPr sz="800" b="1" dirty="0" err="1">
-                          <a:solidFill>
-                            <a:srgbClr val="0A0A0A"/>
-                          </a:solidFill>
-                          <a:latin typeface="微软雅黑"/>
-                          <a:ea typeface="微软雅黑"/>
-                        </a:rPr>
-                        <a:t>标准交易对手</a:t>
-                      </a:r>
-                      <a:endParaRPr sz="800" b="1" dirty="0">
-                        <a:solidFill>
-                          <a:srgbClr val="0A0A0A"/>
-                        </a:solidFill>
-                        <a:latin typeface="微软雅黑"/>
-                        <a:ea typeface="微软雅黑"/>
-                      </a:endParaRPr>
-                    </a:p>
-                  </a:txBody>
-                  <a:tcPr marL="27432" marR="27432" marT="9144" marB="9144">
-                    <a:lnL>
-                      <a:noFill/>
-                    </a:lnL>
-                    <a:lnR>
-                      <a:noFill/>
-                    </a:lnR>
-                    <a:lnT>
-                      <a:noFill/>
-                    </a:lnT>
-                    <a:lnB w="19050">
-                      <a:solidFill>
-                        <a:srgbClr val="0A0A0A"/>
-                      </a:solidFill>
-                    </a:lnB>
-                    <a:noFill/>
-                  </a:tcPr>
-                </a:tc>
-                <a:tc>
-                  <a:txBody>
-                    <a:bodyPr/>
-                    <a:lstStyle/>
-                    <a:p>
-                      <a:pPr algn="l"/>
-                      <a:r>
-                        <a:rPr sz="800" b="1" dirty="0" err="1">
-                          <a:solidFill>
-                            <a:srgbClr val="0A0A0A"/>
-                          </a:solidFill>
-                          <a:latin typeface="微软雅黑"/>
-                          <a:ea typeface="微软雅黑"/>
-                        </a:rPr>
-                        <a:t>主体类型</a:t>
-                      </a:r>
-                      <a:endParaRPr sz="800" b="1" dirty="0">
-                        <a:solidFill>
-                          <a:srgbClr val="0A0A0A"/>
-                        </a:solidFill>
-                        <a:latin typeface="微软雅黑"/>
-                        <a:ea typeface="微软雅黑"/>
-                      </a:endParaRPr>
-                    </a:p>
-                  </a:txBody>
-                  <a:tcPr marL="27432" marR="27432" marT="9144" marB="9144">
-                    <a:lnL>
-                      <a:noFill/>
-                    </a:lnL>
-                    <a:lnR>
-                      <a:noFill/>
-                    </a:lnR>
-                    <a:lnT>
-                      <a:noFill/>
-                    </a:lnT>
-                    <a:lnB w="19050" cap="flat" cmpd="sng" algn="ctr">
-                      <a:solidFill>
-                        <a:srgbClr val="0A0A0A"/>
-                      </a:solidFill>
-                      <a:prstDash val="solid"/>
-                      <a:round/>
-                      <a:headEnd type="none" w="med" len="med"/>
-                      <a:tailEnd type="none" w="med" len="med"/>
-                    </a:lnB>
-                    <a:noFill/>
-                  </a:tcPr>
-                </a:tc>
-                <a:tc>
-                  <a:txBody>
-                    <a:bodyPr/>
-                    <a:lstStyle/>
-                    <a:p>
-                      <a:pPr algn="l"/>
-                      <a:r>
-                        <a:rPr sz="800" b="1">
-                          <a:solidFill>
-                            <a:srgbClr val="0A0A0A"/>
-                          </a:solidFill>
-                          <a:latin typeface="微软雅黑"/>
-                          <a:ea typeface="微软雅黑"/>
-                        </a:rPr>
-                        <a:t>一级分类</a:t>
-                      </a:r>
-                    </a:p>
-                  </a:txBody>
-                  <a:tcPr marL="27432" marR="27432" marT="9144" marB="9144">
-                    <a:lnL>
-                      <a:noFill/>
-                    </a:lnL>
-                    <a:lnR>
-                      <a:noFill/>
-                    </a:lnR>
-                    <a:lnT>
-                      <a:noFill/>
-                    </a:lnT>
-                    <a:lnB w="19050" cap="flat" cmpd="sng" algn="ctr">
-                      <a:solidFill>
-                        <a:srgbClr val="0A0A0A"/>
-                      </a:solidFill>
-                      <a:prstDash val="solid"/>
-                      <a:round/>
-                      <a:headEnd type="none" w="med" len="med"/>
-                      <a:tailEnd type="none" w="med" len="med"/>
-                    </a:lnB>
-                    <a:noFill/>
-                  </a:tcPr>
-                </a:tc>
-                <a:tc>
-                  <a:txBody>
-                    <a:bodyPr/>
-                    <a:lstStyle/>
-                    <a:p>
-                      <a:pPr algn="l"/>
-                      <a:r>
-                        <a:rPr sz="800" b="1">
-                          <a:solidFill>
-                            <a:srgbClr val="0A0A0A"/>
-                          </a:solidFill>
-                          <a:latin typeface="微软雅黑"/>
-                          <a:ea typeface="微软雅黑"/>
-                        </a:rPr>
-                        <a:t>分类依据</a:t>
-                      </a:r>
-                    </a:p>
-                  </a:txBody>
-                  <a:tcPr marL="27432" marR="27432" marT="9144" marB="9144">
-                    <a:lnL>
-                      <a:noFill/>
-                    </a:lnL>
-                    <a:lnR>
-                      <a:noFill/>
-                    </a:lnR>
-                    <a:lnT>
-                      <a:noFill/>
-                    </a:lnT>
-                    <a:lnB w="19050" cap="flat" cmpd="sng" algn="ctr">
-                      <a:solidFill>
-                        <a:srgbClr val="0A0A0A"/>
-                      </a:solidFill>
-                      <a:prstDash val="solid"/>
-                      <a:round/>
-                      <a:headEnd type="none" w="med" len="med"/>
-                      <a:tailEnd type="none" w="med" len="med"/>
-                    </a:lnB>
-                    <a:noFill/>
-                  </a:tcPr>
-                </a:tc>
-                <a:extLst>
-                  <a:ext uri="{0D108BD9-81ED-4DB2-BD59-A6C34878D82A}">
-                    <a16:rowId xmlns:a16="http://schemas.microsoft.com/office/drawing/2014/main" val="10000"/>
-                  </a:ext>
-                </a:extLst>
-              </a:tr>
-              <a:tr h="170373">
-                <a:tc>
-                  <a:txBody>
-                    <a:bodyPr/>
-                    <a:lstStyle/>
-                    <a:p>
-                      <a:pPr marL="0" algn="l" defTabSz="914400" rtl="0" eaLnBrk="1" latinLnBrk="0" hangingPunct="1"/>
-                      <a:r>
-                        <a:rPr sz="800" b="0" kern="1200" dirty="0">
-                          <a:solidFill>
-                            <a:srgbClr val="0A0A0A"/>
-                          </a:solidFill>
-                          <a:latin typeface="微软雅黑" panose="020B0503020204020204" pitchFamily="34" charset="-122"/>
-                          <a:ea typeface="微软雅黑" panose="020B0503020204020204" pitchFamily="34" charset="-122"/>
-                          <a:cs typeface="+mn-cs"/>
-                        </a:rPr>
-                        <a:t>2026/03/26</a:t>
-                      </a:r>
-                    </a:p>
-                  </a:txBody>
-                  <a:tcPr marL="27432" marR="27432" marT="9144" marB="9144">
-                    <a:lnL>
-                      <a:noFill/>
-                    </a:lnL>
-                    <a:lnR>
-                      <a:noFill/>
-                    </a:lnR>
-                    <a:lnT w="19050" cap="flat" cmpd="sng" algn="ctr">
-                      <a:solidFill>
-                        <a:srgbClr val="0A0A0A"/>
-                      </a:solidFill>
-                      <a:prstDash val="solid"/>
-                      <a:round/>
-                      <a:headEnd type="none" w="med" len="med"/>
-                      <a:tailEnd type="none" w="med" len="med"/>
-                    </a:lnT>
-                    <a:lnB w="9525">
-                      <a:solidFill>
-                        <a:srgbClr val="D6D6D6"/>
-                      </a:solidFill>
-                    </a:lnB>
-                    <a:noFill/>
-                  </a:tcPr>
-                </a:tc>
-                <a:tc>
-                  <a:txBody>
-                    <a:bodyPr/>
-                    <a:lstStyle/>
-                    <a:p>
-                      <a:pPr marL="0" algn="l" defTabSz="914400" rtl="0" eaLnBrk="1" latinLnBrk="0" hangingPunct="1"/>
-                      <a:r>
-                        <a:rPr sz="800" b="0" kern="1200" dirty="0">
-                          <a:solidFill>
-                            <a:srgbClr val="0A0A0A"/>
-                          </a:solidFill>
-                          <a:latin typeface="微软雅黑" panose="020B0503020204020204" pitchFamily="34" charset="-122"/>
-                          <a:ea typeface="微软雅黑" panose="020B0503020204020204" pitchFamily="34" charset="-122"/>
-                          <a:cs typeface="+mn-cs"/>
-                        </a:rPr>
-                        <a:t>BILL PAY Fair Go Finance DT.58oa72 SACC 239</a:t>
-                      </a:r>
-                    </a:p>
-                  </a:txBody>
-                  <a:tcPr marL="27432" marR="27432" marT="9144" marB="9144">
-                    <a:lnL>
-                      <a:noFill/>
-                    </a:lnL>
-                    <a:lnR>
-                      <a:noFill/>
-                    </a:lnR>
-                    <a:lnT w="19050" cap="flat" cmpd="sng" algn="ctr">
-                      <a:solidFill>
-                        <a:srgbClr val="0A0A0A"/>
-                      </a:solidFill>
-                      <a:prstDash val="solid"/>
-                      <a:round/>
-                      <a:headEnd type="none" w="med" len="med"/>
-                      <a:tailEnd type="none" w="med" len="med"/>
-                    </a:lnT>
-                    <a:lnB w="9525">
-                      <a:solidFill>
-                        <a:srgbClr val="D6D6D6"/>
-                      </a:solidFill>
-                    </a:lnB>
-                    <a:noFill/>
-                  </a:tcPr>
-                </a:tc>
-                <a:tc>
-                  <a:txBody>
-                    <a:bodyPr/>
-                    <a:lstStyle/>
-                    <a:p>
-                      <a:pPr marL="0" algn="l" defTabSz="914400" rtl="0" eaLnBrk="1" latinLnBrk="0" hangingPunct="1"/>
-                      <a:r>
-                        <a:rPr sz="800" b="0" kern="1200" dirty="0">
-                          <a:solidFill>
-                            <a:srgbClr val="0A0A0A"/>
-                          </a:solidFill>
-                          <a:latin typeface="微软雅黑" panose="020B0503020204020204" pitchFamily="34" charset="-122"/>
-                          <a:ea typeface="微软雅黑" panose="020B0503020204020204" pitchFamily="34" charset="-122"/>
-                          <a:cs typeface="+mn-cs"/>
-                        </a:rPr>
-                        <a:t>A$156</a:t>
-                      </a:r>
-                    </a:p>
-                  </a:txBody>
-                  <a:tcPr marL="27432" marR="27432" marT="9144" marB="9144">
-                    <a:lnL>
-                      <a:noFill/>
-                    </a:lnL>
-                    <a:lnR>
-                      <a:noFill/>
-                    </a:lnR>
-                    <a:lnT w="19050" cap="flat" cmpd="sng" algn="ctr">
-                      <a:solidFill>
-                        <a:srgbClr val="0A0A0A"/>
-                      </a:solidFill>
-                      <a:prstDash val="solid"/>
-                      <a:round/>
-                      <a:headEnd type="none" w="med" len="med"/>
-                      <a:tailEnd type="none" w="med" len="med"/>
-                    </a:lnT>
-                    <a:lnB w="9525" cap="flat" cmpd="sng" algn="ctr">
-                      <a:solidFill>
-                        <a:srgbClr val="D6D6D6"/>
-                      </a:solidFill>
-                      <a:prstDash val="solid"/>
-                      <a:round/>
-                      <a:headEnd type="none" w="med" len="med"/>
-                      <a:tailEnd type="none" w="med" len="med"/>
-                    </a:lnB>
-                    <a:noFill/>
-                  </a:tcPr>
-                </a:tc>
-                <a:tc>
-                  <a:txBody>
-                    <a:bodyPr/>
-                    <a:lstStyle/>
-                    <a:p>
-                      <a:pPr marL="0" algn="l" defTabSz="914400" rtl="0" eaLnBrk="1" latinLnBrk="0" hangingPunct="1"/>
-                      <a:r>
-                        <a:rPr sz="800" b="0" kern="1200">
-                          <a:solidFill>
-                            <a:srgbClr val="0A0A0A"/>
-                          </a:solidFill>
-                          <a:latin typeface="微软雅黑" panose="020B0503020204020204" pitchFamily="34" charset="-122"/>
-                          <a:ea typeface="微软雅黑" panose="020B0503020204020204" pitchFamily="34" charset="-122"/>
-                          <a:cs typeface="+mn-cs"/>
-                        </a:rPr>
-                        <a:t>Fair Go Finance</a:t>
-                      </a:r>
-                    </a:p>
-                  </a:txBody>
-                  <a:tcPr marL="27432" marR="27432" marT="9144" marB="9144">
-                    <a:lnL>
-                      <a:noFill/>
-                    </a:lnL>
-                    <a:lnR>
-                      <a:noFill/>
-                    </a:lnR>
-                    <a:lnT w="19050" cap="flat" cmpd="sng" algn="ctr">
-                      <a:solidFill>
-                        <a:srgbClr val="0A0A0A"/>
-                      </a:solidFill>
-                      <a:prstDash val="solid"/>
-                      <a:round/>
-                      <a:headEnd type="none" w="med" len="med"/>
-                      <a:tailEnd type="none" w="med" len="med"/>
-                    </a:lnT>
-                    <a:lnB w="9525">
-                      <a:solidFill>
-                        <a:srgbClr val="D6D6D6"/>
-                      </a:solidFill>
-                    </a:lnB>
-                    <a:noFill/>
-                  </a:tcPr>
-                </a:tc>
-                <a:tc>
-                  <a:txBody>
-                    <a:bodyPr/>
-                    <a:lstStyle/>
-                    <a:p>
-                      <a:pPr marL="0" algn="l" defTabSz="914400" rtl="0" eaLnBrk="1" latinLnBrk="0" hangingPunct="1"/>
-                      <a:r>
-                        <a:rPr sz="800" b="0" kern="1200" dirty="0" err="1">
-                          <a:solidFill>
-                            <a:srgbClr val="0A0A0A"/>
-                          </a:solidFill>
-                          <a:latin typeface="微软雅黑" panose="020B0503020204020204" pitchFamily="34" charset="-122"/>
-                          <a:ea typeface="微软雅黑" panose="020B0503020204020204" pitchFamily="34" charset="-122"/>
-                          <a:cs typeface="+mn-cs"/>
-                        </a:rPr>
-                        <a:t>小额信贷机构</a:t>
-                      </a:r>
-                      <a:endParaRPr sz="800" b="0" kern="1200" dirty="0">
-                        <a:solidFill>
-                          <a:srgbClr val="0A0A0A"/>
-                        </a:solidFill>
-                        <a:latin typeface="微软雅黑" panose="020B0503020204020204" pitchFamily="34" charset="-122"/>
-                        <a:ea typeface="微软雅黑" panose="020B0503020204020204" pitchFamily="34" charset="-122"/>
-                        <a:cs typeface="+mn-cs"/>
-                      </a:endParaRPr>
-                    </a:p>
-                  </a:txBody>
-                  <a:tcPr marL="27432" marR="27432" marT="9144" marB="9144">
-                    <a:lnL>
-                      <a:noFill/>
-                    </a:lnL>
-                    <a:lnR>
-                      <a:noFill/>
-                    </a:lnR>
-                    <a:lnT w="19050" cap="flat" cmpd="sng" algn="ctr">
-                      <a:solidFill>
-                        <a:srgbClr val="0A0A0A"/>
-                      </a:solidFill>
-                      <a:prstDash val="solid"/>
-                      <a:round/>
-                      <a:headEnd type="none" w="med" len="med"/>
-                      <a:tailEnd type="none" w="med" len="med"/>
-                    </a:lnT>
-                    <a:lnB w="9525" cap="flat" cmpd="sng" algn="ctr">
-                      <a:solidFill>
-                        <a:srgbClr val="D6D6D6"/>
-                      </a:solidFill>
-                      <a:prstDash val="solid"/>
-                      <a:round/>
-                      <a:headEnd type="none" w="med" len="med"/>
-                      <a:tailEnd type="none" w="med" len="med"/>
-                    </a:lnB>
-                    <a:noFill/>
-                  </a:tcPr>
-                </a:tc>
-                <a:tc>
-                  <a:txBody>
-                    <a:bodyPr/>
-                    <a:lstStyle/>
-                    <a:p>
-                      <a:pPr marL="0" algn="l" defTabSz="914400" rtl="0" eaLnBrk="1" latinLnBrk="0" hangingPunct="1"/>
-                      <a:r>
-                        <a:rPr sz="800" b="0" kern="1200">
-                          <a:solidFill>
-                            <a:srgbClr val="0A0A0A"/>
-                          </a:solidFill>
-                          <a:latin typeface="微软雅黑" panose="020B0503020204020204" pitchFamily="34" charset="-122"/>
-                          <a:ea typeface="微软雅黑" panose="020B0503020204020204" pitchFamily="34" charset="-122"/>
-                          <a:cs typeface="+mn-cs"/>
-                        </a:rPr>
-                        <a:t>贷款及还款</a:t>
-                      </a:r>
-                    </a:p>
-                  </a:txBody>
-                  <a:tcPr marL="27432" marR="27432" marT="9144" marB="9144">
-                    <a:lnL>
-                      <a:noFill/>
-                    </a:lnL>
-                    <a:lnR>
-                      <a:noFill/>
-                    </a:lnR>
-                    <a:lnT w="19050" cap="flat" cmpd="sng" algn="ctr">
-                      <a:solidFill>
-                        <a:srgbClr val="0A0A0A"/>
-                      </a:solidFill>
-                      <a:prstDash val="solid"/>
-                      <a:round/>
-                      <a:headEnd type="none" w="med" len="med"/>
-                      <a:tailEnd type="none" w="med" len="med"/>
-                    </a:lnT>
-                    <a:lnB w="9525" cap="flat" cmpd="sng" algn="ctr">
-                      <a:solidFill>
-                        <a:srgbClr val="D6D6D6"/>
-                      </a:solidFill>
-                      <a:prstDash val="solid"/>
-                      <a:round/>
-                      <a:headEnd type="none" w="med" len="med"/>
-                      <a:tailEnd type="none" w="med" len="med"/>
-                    </a:lnB>
-                    <a:noFill/>
-                  </a:tcPr>
-                </a:tc>
-                <a:tc>
-                  <a:txBody>
-                    <a:bodyPr/>
-                    <a:lstStyle/>
-                    <a:p>
-                      <a:pPr marL="0" algn="l" defTabSz="914400" rtl="0" eaLnBrk="1" latinLnBrk="0" hangingPunct="1"/>
-                      <a:r>
-                        <a:rPr sz="800" b="0" kern="1200">
-                          <a:solidFill>
-                            <a:srgbClr val="0A0A0A"/>
-                          </a:solidFill>
-                          <a:latin typeface="微软雅黑" panose="020B0503020204020204" pitchFamily="34" charset="-122"/>
-                          <a:ea typeface="微软雅黑" panose="020B0503020204020204" pitchFamily="34" charset="-122"/>
-                          <a:cs typeface="+mn-cs"/>
-                        </a:rPr>
-                        <a:t>交易方向、机构名称、产品关键词及历史交易模式</a:t>
-                      </a:r>
-                    </a:p>
-                  </a:txBody>
-                  <a:tcPr marL="27432" marR="27432" marT="9144" marB="9144">
-                    <a:lnL>
-                      <a:noFill/>
-                    </a:lnL>
-                    <a:lnR>
-                      <a:noFill/>
-                    </a:lnR>
-                    <a:lnT w="19050" cap="flat" cmpd="sng" algn="ctr">
-                      <a:solidFill>
-                        <a:srgbClr val="0A0A0A"/>
-                      </a:solidFill>
-                      <a:prstDash val="solid"/>
-                      <a:round/>
-                      <a:headEnd type="none" w="med" len="med"/>
-                      <a:tailEnd type="none" w="med" len="med"/>
-                    </a:lnT>
-                    <a:lnB w="9525" cap="flat" cmpd="sng" algn="ctr">
-                      <a:solidFill>
-                        <a:srgbClr val="D6D6D6"/>
-                      </a:solidFill>
-                      <a:prstDash val="solid"/>
-                      <a:round/>
-                      <a:headEnd type="none" w="med" len="med"/>
-                      <a:tailEnd type="none" w="med" len="med"/>
-                    </a:lnB>
-                    <a:noFill/>
-                  </a:tcPr>
-                </a:tc>
-                <a:extLst>
-                  <a:ext uri="{0D108BD9-81ED-4DB2-BD59-A6C34878D82A}">
-                    <a16:rowId xmlns:a16="http://schemas.microsoft.com/office/drawing/2014/main" val="10001"/>
-                  </a:ext>
-                </a:extLst>
-              </a:tr>
-              <a:tr h="170373">
-                <a:tc>
-                  <a:txBody>
-                    <a:bodyPr/>
-                    <a:lstStyle/>
-                    <a:p>
-                      <a:pPr marL="0" algn="l" defTabSz="914400" rtl="0" eaLnBrk="1" latinLnBrk="0" hangingPunct="1"/>
-                      <a:r>
-                        <a:rPr sz="800" b="0" kern="1200">
-                          <a:solidFill>
-                            <a:srgbClr val="0A0A0A"/>
-                          </a:solidFill>
-                          <a:latin typeface="微软雅黑" panose="020B0503020204020204" pitchFamily="34" charset="-122"/>
-                          <a:ea typeface="微软雅黑" panose="020B0503020204020204" pitchFamily="34" charset="-122"/>
-                          <a:cs typeface="+mn-cs"/>
-                        </a:rPr>
-                        <a:t>2026/03/28</a:t>
-                      </a:r>
-                    </a:p>
-                  </a:txBody>
-                  <a:tcPr marL="27432" marR="27432" marT="9144" marB="9144">
-                    <a:lnL>
-                      <a:noFill/>
-                    </a:lnL>
-                    <a:lnR>
-                      <a:noFill/>
-                    </a:lnR>
-                    <a:lnT w="9525" cap="flat" cmpd="sng" algn="ctr">
-                      <a:solidFill>
-                        <a:srgbClr val="D6D6D6"/>
-                      </a:solidFill>
-                      <a:prstDash val="solid"/>
-                      <a:round/>
-                      <a:headEnd type="none" w="med" len="med"/>
-                      <a:tailEnd type="none" w="med" len="med"/>
-                    </a:lnT>
-                    <a:lnB w="9525">
-                      <a:solidFill>
-                        <a:srgbClr val="D6D6D6"/>
-                      </a:solidFill>
-                    </a:lnB>
-                    <a:noFill/>
-                  </a:tcPr>
-                </a:tc>
-                <a:tc>
-                  <a:txBody>
-                    <a:bodyPr/>
-                    <a:lstStyle/>
-                    <a:p>
-                      <a:pPr marL="0" algn="l" defTabSz="914400" rtl="0" eaLnBrk="1" latinLnBrk="0" hangingPunct="1"/>
-                      <a:r>
-                        <a:rPr sz="800" b="0" kern="1200" dirty="0">
-                          <a:solidFill>
-                            <a:srgbClr val="0A0A0A"/>
-                          </a:solidFill>
-                          <a:latin typeface="微软雅黑" panose="020B0503020204020204" pitchFamily="34" charset="-122"/>
-                          <a:ea typeface="微软雅黑" panose="020B0503020204020204" pitchFamily="34" charset="-122"/>
-                          <a:cs typeface="+mn-cs"/>
-                        </a:rPr>
-                        <a:t>MCDONALDS BRISBANE</a:t>
-                      </a:r>
-                    </a:p>
-                  </a:txBody>
-                  <a:tcPr marL="27432" marR="27432" marT="9144" marB="9144">
-                    <a:lnL>
-                      <a:noFill/>
-                    </a:lnL>
-                    <a:lnR>
-                      <a:noFill/>
-                    </a:lnR>
-                    <a:lnT w="9525" cap="flat" cmpd="sng" algn="ctr">
-                      <a:solidFill>
-                        <a:srgbClr val="D6D6D6"/>
-                      </a:solidFill>
-                      <a:prstDash val="solid"/>
-                      <a:round/>
-                      <a:headEnd type="none" w="med" len="med"/>
-                      <a:tailEnd type="none" w="med" len="med"/>
-                    </a:lnT>
-                    <a:lnB w="9525">
-                      <a:solidFill>
-                        <a:srgbClr val="D6D6D6"/>
-                      </a:solidFill>
-                    </a:lnB>
-                    <a:noFill/>
-                  </a:tcPr>
-                </a:tc>
-                <a:tc>
-                  <a:txBody>
-                    <a:bodyPr/>
-                    <a:lstStyle/>
-                    <a:p>
-                      <a:pPr marL="0" algn="l" defTabSz="914400" rtl="0" eaLnBrk="1" latinLnBrk="0" hangingPunct="1"/>
-                      <a:r>
-                        <a:rPr sz="800" b="0" kern="1200">
-                          <a:solidFill>
-                            <a:srgbClr val="0A0A0A"/>
-                          </a:solidFill>
-                          <a:latin typeface="微软雅黑" panose="020B0503020204020204" pitchFamily="34" charset="-122"/>
-                          <a:ea typeface="微软雅黑" panose="020B0503020204020204" pitchFamily="34" charset="-122"/>
-                          <a:cs typeface="+mn-cs"/>
-                        </a:rPr>
-                        <a:t>A$12.40</a:t>
-                      </a:r>
-                    </a:p>
-                  </a:txBody>
-                  <a:tcPr marL="27432" marR="27432" marT="9144" marB="9144">
-                    <a:lnL>
-                      <a:noFill/>
-                    </a:lnL>
-                    <a:lnR>
-                      <a:noFill/>
-                    </a:lnR>
-                    <a:lnT w="9525" cap="flat" cmpd="sng" algn="ctr">
-                      <a:solidFill>
-                        <a:srgbClr val="D6D6D6"/>
-                      </a:solidFill>
-                      <a:prstDash val="solid"/>
-                      <a:round/>
-                      <a:headEnd type="none" w="med" len="med"/>
-                      <a:tailEnd type="none" w="med" len="med"/>
-                    </a:lnT>
-                    <a:lnB w="9525" cap="flat" cmpd="sng" algn="ctr">
-                      <a:solidFill>
-                        <a:srgbClr val="D6D6D6"/>
-                      </a:solidFill>
-                      <a:prstDash val="solid"/>
-                      <a:round/>
-                      <a:headEnd type="none" w="med" len="med"/>
-                      <a:tailEnd type="none" w="med" len="med"/>
-                    </a:lnB>
-                    <a:noFill/>
-                  </a:tcPr>
-                </a:tc>
-                <a:tc>
-                  <a:txBody>
-                    <a:bodyPr/>
-                    <a:lstStyle/>
-                    <a:p>
-                      <a:pPr marL="0" algn="l" defTabSz="914400" rtl="0" eaLnBrk="1" latinLnBrk="0" hangingPunct="1"/>
-                      <a:r>
-                        <a:rPr sz="800" b="0" kern="1200" dirty="0">
-                          <a:solidFill>
-                            <a:srgbClr val="0A0A0A"/>
-                          </a:solidFill>
-                          <a:latin typeface="微软雅黑" panose="020B0503020204020204" pitchFamily="34" charset="-122"/>
-                          <a:ea typeface="微软雅黑" panose="020B0503020204020204" pitchFamily="34" charset="-122"/>
-                          <a:cs typeface="+mn-cs"/>
-                        </a:rPr>
-                        <a:t>McDonald's</a:t>
-                      </a:r>
-                    </a:p>
-                  </a:txBody>
-                  <a:tcPr marL="27432" marR="27432" marT="9144" marB="9144">
-                    <a:lnL>
-                      <a:noFill/>
-                    </a:lnL>
-                    <a:lnR>
-                      <a:noFill/>
-                    </a:lnR>
-                    <a:lnT w="9525" cap="flat" cmpd="sng" algn="ctr">
-                      <a:solidFill>
-                        <a:srgbClr val="D6D6D6"/>
-                      </a:solidFill>
-                      <a:prstDash val="solid"/>
-                      <a:round/>
-                      <a:headEnd type="none" w="med" len="med"/>
-                      <a:tailEnd type="none" w="med" len="med"/>
-                    </a:lnT>
-                    <a:lnB w="9525">
-                      <a:solidFill>
-                        <a:srgbClr val="D6D6D6"/>
-                      </a:solidFill>
-                    </a:lnB>
-                    <a:noFill/>
-                  </a:tcPr>
-                </a:tc>
-                <a:tc>
-                  <a:txBody>
-                    <a:bodyPr/>
-                    <a:lstStyle/>
-                    <a:p>
-                      <a:pPr marL="0" algn="l" defTabSz="914400" rtl="0" eaLnBrk="1" latinLnBrk="0" hangingPunct="1"/>
-                      <a:r>
-                        <a:rPr sz="800" b="0" kern="1200">
-                          <a:solidFill>
-                            <a:srgbClr val="0A0A0A"/>
-                          </a:solidFill>
-                          <a:latin typeface="微软雅黑" panose="020B0503020204020204" pitchFamily="34" charset="-122"/>
-                          <a:ea typeface="微软雅黑" panose="020B0503020204020204" pitchFamily="34" charset="-122"/>
-                          <a:cs typeface="+mn-cs"/>
-                        </a:rPr>
-                        <a:t>商户企业</a:t>
-                      </a:r>
-                    </a:p>
-                  </a:txBody>
-                  <a:tcPr marL="27432" marR="27432" marT="9144" marB="9144">
-                    <a:lnL>
-                      <a:noFill/>
-                    </a:lnL>
-                    <a:lnR>
-                      <a:noFill/>
-                    </a:lnR>
-                    <a:lnT w="9525" cap="flat" cmpd="sng" algn="ctr">
-                      <a:solidFill>
-                        <a:srgbClr val="D6D6D6"/>
-                      </a:solidFill>
-                      <a:prstDash val="solid"/>
-                      <a:round/>
-                      <a:headEnd type="none" w="med" len="med"/>
-                      <a:tailEnd type="none" w="med" len="med"/>
-                    </a:lnT>
-                    <a:lnB w="9525" cap="flat" cmpd="sng" algn="ctr">
-                      <a:solidFill>
-                        <a:srgbClr val="D6D6D6"/>
-                      </a:solidFill>
-                      <a:prstDash val="solid"/>
-                      <a:round/>
-                      <a:headEnd type="none" w="med" len="med"/>
-                      <a:tailEnd type="none" w="med" len="med"/>
-                    </a:lnB>
-                    <a:noFill/>
-                  </a:tcPr>
-                </a:tc>
-                <a:tc>
-                  <a:txBody>
-                    <a:bodyPr/>
-                    <a:lstStyle/>
-                    <a:p>
-                      <a:pPr marL="0" algn="l" defTabSz="914400" rtl="0" eaLnBrk="1" latinLnBrk="0" hangingPunct="1"/>
-                      <a:r>
-                        <a:rPr sz="800" b="0" kern="1200">
-                          <a:solidFill>
-                            <a:srgbClr val="0A0A0A"/>
-                          </a:solidFill>
-                          <a:latin typeface="微软雅黑" panose="020B0503020204020204" pitchFamily="34" charset="-122"/>
-                          <a:ea typeface="微软雅黑" panose="020B0503020204020204" pitchFamily="34" charset="-122"/>
-                          <a:cs typeface="+mn-cs"/>
-                        </a:rPr>
-                        <a:t>消费</a:t>
-                      </a:r>
-                    </a:p>
-                  </a:txBody>
-                  <a:tcPr marL="27432" marR="27432" marT="9144" marB="9144">
-                    <a:lnL>
-                      <a:noFill/>
-                    </a:lnL>
-                    <a:lnR>
-                      <a:noFill/>
-                    </a:lnR>
-                    <a:lnT w="9525" cap="flat" cmpd="sng" algn="ctr">
-                      <a:solidFill>
-                        <a:srgbClr val="D6D6D6"/>
-                      </a:solidFill>
-                      <a:prstDash val="solid"/>
-                      <a:round/>
-                      <a:headEnd type="none" w="med" len="med"/>
-                      <a:tailEnd type="none" w="med" len="med"/>
-                    </a:lnT>
-                    <a:lnB w="9525" cap="flat" cmpd="sng" algn="ctr">
-                      <a:solidFill>
-                        <a:srgbClr val="D6D6D6"/>
-                      </a:solidFill>
-                      <a:prstDash val="solid"/>
-                      <a:round/>
-                      <a:headEnd type="none" w="med" len="med"/>
-                      <a:tailEnd type="none" w="med" len="med"/>
-                    </a:lnB>
-                    <a:noFill/>
-                  </a:tcPr>
-                </a:tc>
-                <a:tc>
-                  <a:txBody>
-                    <a:bodyPr/>
-                    <a:lstStyle/>
-                    <a:p>
-                      <a:pPr marL="0" algn="l" defTabSz="914400" rtl="0" eaLnBrk="1" latinLnBrk="0" hangingPunct="1"/>
-                      <a:r>
-                        <a:rPr sz="800" b="0" kern="1200">
-                          <a:solidFill>
-                            <a:srgbClr val="0A0A0A"/>
-                          </a:solidFill>
-                          <a:latin typeface="微软雅黑" panose="020B0503020204020204" pitchFamily="34" charset="-122"/>
-                          <a:ea typeface="微软雅黑" panose="020B0503020204020204" pitchFamily="34" charset="-122"/>
-                          <a:cs typeface="+mn-cs"/>
-                        </a:rPr>
-                        <a:t>商户知识库标准名匹配</a:t>
-                      </a:r>
-                    </a:p>
-                  </a:txBody>
-                  <a:tcPr marL="27432" marR="27432" marT="9144" marB="9144">
-                    <a:lnL>
-                      <a:noFill/>
-                    </a:lnL>
-                    <a:lnR>
-                      <a:noFill/>
-                    </a:lnR>
-                    <a:lnT w="9525" cap="flat" cmpd="sng" algn="ctr">
-                      <a:solidFill>
-                        <a:srgbClr val="D6D6D6"/>
-                      </a:solidFill>
-                      <a:prstDash val="solid"/>
-                      <a:round/>
-                      <a:headEnd type="none" w="med" len="med"/>
-                      <a:tailEnd type="none" w="med" len="med"/>
-                    </a:lnT>
-                    <a:lnB w="9525" cap="flat" cmpd="sng" algn="ctr">
-                      <a:solidFill>
-                        <a:srgbClr val="D6D6D6"/>
-                      </a:solidFill>
-                      <a:prstDash val="solid"/>
-                      <a:round/>
-                      <a:headEnd type="none" w="med" len="med"/>
-                      <a:tailEnd type="none" w="med" len="med"/>
-                    </a:lnB>
-                    <a:noFill/>
-                  </a:tcPr>
-                </a:tc>
-                <a:extLst>
-                  <a:ext uri="{0D108BD9-81ED-4DB2-BD59-A6C34878D82A}">
-                    <a16:rowId xmlns:a16="http://schemas.microsoft.com/office/drawing/2014/main" val="10002"/>
-                  </a:ext>
-                </a:extLst>
-              </a:tr>
-              <a:tr h="170373">
-                <a:tc>
-                  <a:txBody>
-                    <a:bodyPr/>
-                    <a:lstStyle/>
-                    <a:p>
-                      <a:pPr marL="0" algn="l" defTabSz="914400" rtl="0" eaLnBrk="1" latinLnBrk="0" hangingPunct="1"/>
-                      <a:r>
-                        <a:rPr sz="800" b="0" kern="1200">
-                          <a:solidFill>
-                            <a:srgbClr val="0A0A0A"/>
-                          </a:solidFill>
-                          <a:latin typeface="微软雅黑" panose="020B0503020204020204" pitchFamily="34" charset="-122"/>
-                          <a:ea typeface="微软雅黑" panose="020B0503020204020204" pitchFamily="34" charset="-122"/>
-                          <a:cs typeface="+mn-cs"/>
-                        </a:rPr>
-                        <a:t>2026/04/02</a:t>
-                      </a:r>
-                    </a:p>
-                  </a:txBody>
-                  <a:tcPr marL="27432" marR="27432" marT="9144" marB="9144">
-                    <a:lnL>
-                      <a:noFill/>
-                    </a:lnL>
-                    <a:lnR>
-                      <a:noFill/>
-                    </a:lnR>
-                    <a:lnT w="9525" cap="flat" cmpd="sng" algn="ctr">
-                      <a:solidFill>
-                        <a:srgbClr val="D6D6D6"/>
-                      </a:solidFill>
-                      <a:prstDash val="solid"/>
-                      <a:round/>
-                      <a:headEnd type="none" w="med" len="med"/>
-                      <a:tailEnd type="none" w="med" len="med"/>
-                    </a:lnT>
-                    <a:lnB w="9525">
-                      <a:solidFill>
-                        <a:srgbClr val="D6D6D6"/>
-                      </a:solidFill>
-                    </a:lnB>
-                    <a:noFill/>
-                  </a:tcPr>
-                </a:tc>
-                <a:tc>
-                  <a:txBody>
-                    <a:bodyPr/>
-                    <a:lstStyle/>
-                    <a:p>
-                      <a:pPr marL="0" algn="l" defTabSz="914400" rtl="0" eaLnBrk="1" latinLnBrk="0" hangingPunct="1"/>
-                      <a:r>
-                        <a:rPr sz="800" b="0" kern="1200" dirty="0">
-                          <a:solidFill>
-                            <a:srgbClr val="0A0A0A"/>
-                          </a:solidFill>
-                          <a:latin typeface="微软雅黑" panose="020B0503020204020204" pitchFamily="34" charset="-122"/>
-                          <a:ea typeface="微软雅黑" panose="020B0503020204020204" pitchFamily="34" charset="-122"/>
-                          <a:cs typeface="+mn-cs"/>
-                        </a:rPr>
-                        <a:t>CHEMIST WAREHOUSE 123</a:t>
-                      </a:r>
-                    </a:p>
-                  </a:txBody>
-                  <a:tcPr marL="27432" marR="27432" marT="9144" marB="9144">
-                    <a:lnL>
-                      <a:noFill/>
-                    </a:lnL>
-                    <a:lnR>
-                      <a:noFill/>
-                    </a:lnR>
-                    <a:lnT w="9525" cap="flat" cmpd="sng" algn="ctr">
-                      <a:solidFill>
-                        <a:srgbClr val="D6D6D6"/>
-                      </a:solidFill>
-                      <a:prstDash val="solid"/>
-                      <a:round/>
-                      <a:headEnd type="none" w="med" len="med"/>
-                      <a:tailEnd type="none" w="med" len="med"/>
-                    </a:lnT>
-                    <a:lnB w="9525">
-                      <a:solidFill>
-                        <a:srgbClr val="D6D6D6"/>
-                      </a:solidFill>
-                    </a:lnB>
-                    <a:noFill/>
-                  </a:tcPr>
-                </a:tc>
-                <a:tc>
-                  <a:txBody>
-                    <a:bodyPr/>
-                    <a:lstStyle/>
-                    <a:p>
-                      <a:pPr marL="0" algn="l" defTabSz="914400" rtl="0" eaLnBrk="1" latinLnBrk="0" hangingPunct="1"/>
-                      <a:r>
-                        <a:rPr sz="800" b="0" kern="1200" dirty="0">
-                          <a:solidFill>
-                            <a:srgbClr val="0A0A0A"/>
-                          </a:solidFill>
-                          <a:latin typeface="微软雅黑" panose="020B0503020204020204" pitchFamily="34" charset="-122"/>
-                          <a:ea typeface="微软雅黑" panose="020B0503020204020204" pitchFamily="34" charset="-122"/>
-                          <a:cs typeface="+mn-cs"/>
-                        </a:rPr>
-                        <a:t>A$35.90</a:t>
-                      </a:r>
-                    </a:p>
-                  </a:txBody>
-                  <a:tcPr marL="27432" marR="27432" marT="9144" marB="9144">
-                    <a:lnL>
-                      <a:noFill/>
-                    </a:lnL>
-                    <a:lnR>
-                      <a:noFill/>
-                    </a:lnR>
-                    <a:lnT w="9525" cap="flat" cmpd="sng" algn="ctr">
-                      <a:solidFill>
-                        <a:srgbClr val="D6D6D6"/>
-                      </a:solidFill>
-                      <a:prstDash val="solid"/>
-                      <a:round/>
-                      <a:headEnd type="none" w="med" len="med"/>
-                      <a:tailEnd type="none" w="med" len="med"/>
-                    </a:lnT>
-                    <a:lnB w="9525" cap="flat" cmpd="sng" algn="ctr">
-                      <a:solidFill>
-                        <a:srgbClr val="D6D6D6"/>
-                      </a:solidFill>
-                      <a:prstDash val="solid"/>
-                      <a:round/>
-                      <a:headEnd type="none" w="med" len="med"/>
-                      <a:tailEnd type="none" w="med" len="med"/>
-                    </a:lnB>
-                    <a:noFill/>
-                  </a:tcPr>
-                </a:tc>
-                <a:tc>
-                  <a:txBody>
-                    <a:bodyPr/>
-                    <a:lstStyle/>
-                    <a:p>
-                      <a:pPr marL="0" algn="l" defTabSz="914400" rtl="0" eaLnBrk="1" latinLnBrk="0" hangingPunct="1"/>
-                      <a:r>
-                        <a:rPr sz="800" b="0" kern="1200">
-                          <a:solidFill>
-                            <a:srgbClr val="0A0A0A"/>
-                          </a:solidFill>
-                          <a:latin typeface="微软雅黑" panose="020B0503020204020204" pitchFamily="34" charset="-122"/>
-                          <a:ea typeface="微软雅黑" panose="020B0503020204020204" pitchFamily="34" charset="-122"/>
-                          <a:cs typeface="+mn-cs"/>
-                        </a:rPr>
-                        <a:t>Chemist Warehouse</a:t>
-                      </a:r>
-                    </a:p>
-                  </a:txBody>
-                  <a:tcPr marL="27432" marR="27432" marT="9144" marB="9144">
-                    <a:lnL>
-                      <a:noFill/>
-                    </a:lnL>
-                    <a:lnR>
-                      <a:noFill/>
-                    </a:lnR>
-                    <a:lnT w="9525" cap="flat" cmpd="sng" algn="ctr">
-                      <a:solidFill>
-                        <a:srgbClr val="D6D6D6"/>
-                      </a:solidFill>
-                      <a:prstDash val="solid"/>
-                      <a:round/>
-                      <a:headEnd type="none" w="med" len="med"/>
-                      <a:tailEnd type="none" w="med" len="med"/>
-                    </a:lnT>
-                    <a:lnB w="9525">
-                      <a:solidFill>
-                        <a:srgbClr val="D6D6D6"/>
-                      </a:solidFill>
-                    </a:lnB>
-                    <a:noFill/>
-                  </a:tcPr>
-                </a:tc>
-                <a:tc>
-                  <a:txBody>
-                    <a:bodyPr/>
-                    <a:lstStyle/>
-                    <a:p>
-                      <a:pPr marL="0" algn="l" defTabSz="914400" rtl="0" eaLnBrk="1" latinLnBrk="0" hangingPunct="1"/>
-                      <a:r>
-                        <a:rPr sz="800" b="0" kern="1200" dirty="0" err="1">
-                          <a:solidFill>
-                            <a:srgbClr val="0A0A0A"/>
-                          </a:solidFill>
-                          <a:latin typeface="微软雅黑" panose="020B0503020204020204" pitchFamily="34" charset="-122"/>
-                          <a:ea typeface="微软雅黑" panose="020B0503020204020204" pitchFamily="34" charset="-122"/>
-                          <a:cs typeface="+mn-cs"/>
-                        </a:rPr>
-                        <a:t>商户企业</a:t>
-                      </a:r>
-                      <a:endParaRPr sz="800" b="0" kern="1200" dirty="0">
-                        <a:solidFill>
-                          <a:srgbClr val="0A0A0A"/>
-                        </a:solidFill>
-                        <a:latin typeface="微软雅黑" panose="020B0503020204020204" pitchFamily="34" charset="-122"/>
-                        <a:ea typeface="微软雅黑" panose="020B0503020204020204" pitchFamily="34" charset="-122"/>
-                        <a:cs typeface="+mn-cs"/>
-                      </a:endParaRPr>
-                    </a:p>
-                  </a:txBody>
-                  <a:tcPr marL="27432" marR="27432" marT="9144" marB="9144">
-                    <a:lnL>
-                      <a:noFill/>
-                    </a:lnL>
-                    <a:lnR>
-                      <a:noFill/>
-                    </a:lnR>
-                    <a:lnT w="9525" cap="flat" cmpd="sng" algn="ctr">
-                      <a:solidFill>
-                        <a:srgbClr val="D6D6D6"/>
-                      </a:solidFill>
-                      <a:prstDash val="solid"/>
-                      <a:round/>
-                      <a:headEnd type="none" w="med" len="med"/>
-                      <a:tailEnd type="none" w="med" len="med"/>
-                    </a:lnT>
-                    <a:lnB w="9525" cap="flat" cmpd="sng" algn="ctr">
-                      <a:solidFill>
-                        <a:srgbClr val="D6D6D6"/>
-                      </a:solidFill>
-                      <a:prstDash val="solid"/>
-                      <a:round/>
-                      <a:headEnd type="none" w="med" len="med"/>
-                      <a:tailEnd type="none" w="med" len="med"/>
-                    </a:lnB>
-                    <a:noFill/>
-                  </a:tcPr>
-                </a:tc>
-                <a:tc>
-                  <a:txBody>
-                    <a:bodyPr/>
-                    <a:lstStyle/>
-                    <a:p>
-                      <a:pPr marL="0" algn="l" defTabSz="914400" rtl="0" eaLnBrk="1" latinLnBrk="0" hangingPunct="1"/>
-                      <a:r>
-                        <a:rPr sz="800" b="0" kern="1200">
-                          <a:solidFill>
-                            <a:srgbClr val="0A0A0A"/>
-                          </a:solidFill>
-                          <a:latin typeface="微软雅黑" panose="020B0503020204020204" pitchFamily="34" charset="-122"/>
-                          <a:ea typeface="微软雅黑" panose="020B0503020204020204" pitchFamily="34" charset="-122"/>
-                          <a:cs typeface="+mn-cs"/>
-                        </a:rPr>
-                        <a:t>消费</a:t>
-                      </a:r>
-                    </a:p>
-                  </a:txBody>
-                  <a:tcPr marL="27432" marR="27432" marT="9144" marB="9144">
-                    <a:lnL>
-                      <a:noFill/>
-                    </a:lnL>
-                    <a:lnR>
-                      <a:noFill/>
-                    </a:lnR>
-                    <a:lnT w="9525" cap="flat" cmpd="sng" algn="ctr">
-                      <a:solidFill>
-                        <a:srgbClr val="D6D6D6"/>
-                      </a:solidFill>
-                      <a:prstDash val="solid"/>
-                      <a:round/>
-                      <a:headEnd type="none" w="med" len="med"/>
-                      <a:tailEnd type="none" w="med" len="med"/>
-                    </a:lnT>
-                    <a:lnB w="9525" cap="flat" cmpd="sng" algn="ctr">
-                      <a:solidFill>
-                        <a:srgbClr val="D6D6D6"/>
-                      </a:solidFill>
-                      <a:prstDash val="solid"/>
-                      <a:round/>
-                      <a:headEnd type="none" w="med" len="med"/>
-                      <a:tailEnd type="none" w="med" len="med"/>
-                    </a:lnB>
-                    <a:noFill/>
-                  </a:tcPr>
-                </a:tc>
-                <a:tc>
-                  <a:txBody>
-                    <a:bodyPr/>
-                    <a:lstStyle/>
-                    <a:p>
-                      <a:pPr marL="0" algn="l" defTabSz="914400" rtl="0" eaLnBrk="1" latinLnBrk="0" hangingPunct="1"/>
-                      <a:r>
-                        <a:rPr sz="800" b="0" kern="1200">
-                          <a:solidFill>
-                            <a:srgbClr val="0A0A0A"/>
-                          </a:solidFill>
-                          <a:latin typeface="微软雅黑" panose="020B0503020204020204" pitchFamily="34" charset="-122"/>
-                          <a:ea typeface="微软雅黑" panose="020B0503020204020204" pitchFamily="34" charset="-122"/>
-                          <a:cs typeface="+mn-cs"/>
-                        </a:rPr>
-                        <a:t>商户知识库标准名匹配</a:t>
-                      </a:r>
-                    </a:p>
-                  </a:txBody>
-                  <a:tcPr marL="27432" marR="27432" marT="9144" marB="9144">
-                    <a:lnL>
-                      <a:noFill/>
-                    </a:lnL>
-                    <a:lnR>
-                      <a:noFill/>
-                    </a:lnR>
-                    <a:lnT w="9525" cap="flat" cmpd="sng" algn="ctr">
-                      <a:solidFill>
-                        <a:srgbClr val="D6D6D6"/>
-                      </a:solidFill>
-                      <a:prstDash val="solid"/>
-                      <a:round/>
-                      <a:headEnd type="none" w="med" len="med"/>
-                      <a:tailEnd type="none" w="med" len="med"/>
-                    </a:lnT>
-                    <a:lnB w="9525" cap="flat" cmpd="sng" algn="ctr">
-                      <a:solidFill>
-                        <a:srgbClr val="D6D6D6"/>
-                      </a:solidFill>
-                      <a:prstDash val="solid"/>
-                      <a:round/>
-                      <a:headEnd type="none" w="med" len="med"/>
-                      <a:tailEnd type="none" w="med" len="med"/>
-                    </a:lnB>
-                    <a:noFill/>
-                  </a:tcPr>
-                </a:tc>
-                <a:extLst>
-                  <a:ext uri="{0D108BD9-81ED-4DB2-BD59-A6C34878D82A}">
-                    <a16:rowId xmlns:a16="http://schemas.microsoft.com/office/drawing/2014/main" val="10003"/>
-                  </a:ext>
-                </a:extLst>
-              </a:tr>
-              <a:tr h="170373">
-                <a:tc>
-                  <a:txBody>
-                    <a:bodyPr/>
-                    <a:lstStyle/>
-                    <a:p>
-                      <a:pPr marL="0" algn="l" defTabSz="914400" rtl="0" eaLnBrk="1" latinLnBrk="0" hangingPunct="1"/>
-                      <a:r>
-                        <a:rPr sz="800" b="0" kern="1200">
-                          <a:solidFill>
-                            <a:srgbClr val="0A0A0A"/>
-                          </a:solidFill>
-                          <a:latin typeface="微软雅黑" panose="020B0503020204020204" pitchFamily="34" charset="-122"/>
-                          <a:ea typeface="微软雅黑" panose="020B0503020204020204" pitchFamily="34" charset="-122"/>
-                          <a:cs typeface="+mn-cs"/>
-                        </a:rPr>
-                        <a:t>2026/04/08</a:t>
-                      </a:r>
-                    </a:p>
-                  </a:txBody>
-                  <a:tcPr marL="27432" marR="27432" marT="9144" marB="9144">
-                    <a:lnL>
-                      <a:noFill/>
-                    </a:lnL>
-                    <a:lnR>
-                      <a:noFill/>
-                    </a:lnR>
-                    <a:lnT w="9525" cap="flat" cmpd="sng" algn="ctr">
-                      <a:solidFill>
-                        <a:srgbClr val="D6D6D6"/>
-                      </a:solidFill>
-                      <a:prstDash val="solid"/>
-                      <a:round/>
-                      <a:headEnd type="none" w="med" len="med"/>
-                      <a:tailEnd type="none" w="med" len="med"/>
-                    </a:lnT>
-                    <a:lnB w="9525">
-                      <a:solidFill>
-                        <a:srgbClr val="D6D6D6"/>
-                      </a:solidFill>
-                    </a:lnB>
-                    <a:noFill/>
-                  </a:tcPr>
-                </a:tc>
-                <a:tc>
-                  <a:txBody>
-                    <a:bodyPr/>
-                    <a:lstStyle/>
-                    <a:p>
-                      <a:pPr marL="0" algn="l" defTabSz="914400" rtl="0" eaLnBrk="1" latinLnBrk="0" hangingPunct="1"/>
-                      <a:r>
-                        <a:rPr sz="800" b="0" kern="1200" dirty="0">
-                          <a:solidFill>
-                            <a:srgbClr val="0A0A0A"/>
-                          </a:solidFill>
-                          <a:latin typeface="微软雅黑" panose="020B0503020204020204" pitchFamily="34" charset="-122"/>
-                          <a:ea typeface="微软雅黑" panose="020B0503020204020204" pitchFamily="34" charset="-122"/>
-                          <a:cs typeface="+mn-cs"/>
-                        </a:rPr>
-                        <a:t>AMZNPRIMEA*</a:t>
-                      </a:r>
-                    </a:p>
-                  </a:txBody>
-                  <a:tcPr marL="27432" marR="27432" marT="9144" marB="9144">
-                    <a:lnL>
-                      <a:noFill/>
-                    </a:lnL>
-                    <a:lnR>
-                      <a:noFill/>
-                    </a:lnR>
-                    <a:lnT w="9525" cap="flat" cmpd="sng" algn="ctr">
-                      <a:solidFill>
-                        <a:srgbClr val="D6D6D6"/>
-                      </a:solidFill>
-                      <a:prstDash val="solid"/>
-                      <a:round/>
-                      <a:headEnd type="none" w="med" len="med"/>
-                      <a:tailEnd type="none" w="med" len="med"/>
-                    </a:lnT>
-                    <a:lnB w="9525">
-                      <a:solidFill>
-                        <a:srgbClr val="D6D6D6"/>
-                      </a:solidFill>
-                    </a:lnB>
-                    <a:noFill/>
-                  </a:tcPr>
-                </a:tc>
-                <a:tc>
-                  <a:txBody>
-                    <a:bodyPr/>
-                    <a:lstStyle/>
-                    <a:p>
-                      <a:pPr marL="0" algn="l" defTabSz="914400" rtl="0" eaLnBrk="1" latinLnBrk="0" hangingPunct="1"/>
-                      <a:r>
-                        <a:rPr sz="800" b="0" kern="1200" dirty="0">
-                          <a:solidFill>
-                            <a:srgbClr val="0A0A0A"/>
-                          </a:solidFill>
-                          <a:latin typeface="微软雅黑" panose="020B0503020204020204" pitchFamily="34" charset="-122"/>
-                          <a:ea typeface="微软雅黑" panose="020B0503020204020204" pitchFamily="34" charset="-122"/>
-                          <a:cs typeface="+mn-cs"/>
-                        </a:rPr>
-                        <a:t>A$8.99</a:t>
-                      </a:r>
-                    </a:p>
-                  </a:txBody>
-                  <a:tcPr marL="27432" marR="27432" marT="9144" marB="9144">
-                    <a:lnL>
-                      <a:noFill/>
-                    </a:lnL>
-                    <a:lnR>
-                      <a:noFill/>
-                    </a:lnR>
-                    <a:lnT w="9525" cap="flat" cmpd="sng" algn="ctr">
-                      <a:solidFill>
-                        <a:srgbClr val="D6D6D6"/>
-                      </a:solidFill>
-                      <a:prstDash val="solid"/>
-                      <a:round/>
-                      <a:headEnd type="none" w="med" len="med"/>
-                      <a:tailEnd type="none" w="med" len="med"/>
-                    </a:lnT>
-                    <a:lnB w="9525" cap="flat" cmpd="sng" algn="ctr">
-                      <a:solidFill>
-                        <a:srgbClr val="D6D6D6"/>
-                      </a:solidFill>
-                      <a:prstDash val="solid"/>
-                      <a:round/>
-                      <a:headEnd type="none" w="med" len="med"/>
-                      <a:tailEnd type="none" w="med" len="med"/>
-                    </a:lnB>
-                    <a:noFill/>
-                  </a:tcPr>
-                </a:tc>
-                <a:tc>
-                  <a:txBody>
-                    <a:bodyPr/>
-                    <a:lstStyle/>
-                    <a:p>
-                      <a:pPr marL="0" algn="l" defTabSz="914400" rtl="0" eaLnBrk="1" latinLnBrk="0" hangingPunct="1"/>
-                      <a:r>
-                        <a:rPr sz="800" b="0" kern="1200">
-                          <a:solidFill>
-                            <a:srgbClr val="0A0A0A"/>
-                          </a:solidFill>
-                          <a:latin typeface="微软雅黑" panose="020B0503020204020204" pitchFamily="34" charset="-122"/>
-                          <a:ea typeface="微软雅黑" panose="020B0503020204020204" pitchFamily="34" charset="-122"/>
-                          <a:cs typeface="+mn-cs"/>
-                        </a:rPr>
-                        <a:t>Amazon Prime</a:t>
-                      </a:r>
-                    </a:p>
-                  </a:txBody>
-                  <a:tcPr marL="27432" marR="27432" marT="9144" marB="9144">
-                    <a:lnL>
-                      <a:noFill/>
-                    </a:lnL>
-                    <a:lnR>
-                      <a:noFill/>
-                    </a:lnR>
-                    <a:lnT w="9525" cap="flat" cmpd="sng" algn="ctr">
-                      <a:solidFill>
-                        <a:srgbClr val="D6D6D6"/>
-                      </a:solidFill>
-                      <a:prstDash val="solid"/>
-                      <a:round/>
-                      <a:headEnd type="none" w="med" len="med"/>
-                      <a:tailEnd type="none" w="med" len="med"/>
-                    </a:lnT>
-                    <a:lnB w="9525">
-                      <a:solidFill>
-                        <a:srgbClr val="D6D6D6"/>
-                      </a:solidFill>
-                    </a:lnB>
-                    <a:noFill/>
-                  </a:tcPr>
-                </a:tc>
-                <a:tc>
-                  <a:txBody>
-                    <a:bodyPr/>
-                    <a:lstStyle/>
-                    <a:p>
-                      <a:pPr marL="0" algn="l" defTabSz="914400" rtl="0" eaLnBrk="1" latinLnBrk="0" hangingPunct="1"/>
-                      <a:r>
-                        <a:rPr sz="800" b="0" kern="1200">
-                          <a:solidFill>
-                            <a:srgbClr val="0A0A0A"/>
-                          </a:solidFill>
-                          <a:latin typeface="微软雅黑" panose="020B0503020204020204" pitchFamily="34" charset="-122"/>
-                          <a:ea typeface="微软雅黑" panose="020B0503020204020204" pitchFamily="34" charset="-122"/>
-                          <a:cs typeface="+mn-cs"/>
-                        </a:rPr>
-                        <a:t>商户企业</a:t>
-                      </a:r>
-                    </a:p>
-                  </a:txBody>
-                  <a:tcPr marL="27432" marR="27432" marT="9144" marB="9144">
-                    <a:lnL>
-                      <a:noFill/>
-                    </a:lnL>
-                    <a:lnR>
-                      <a:noFill/>
-                    </a:lnR>
-                    <a:lnT w="9525" cap="flat" cmpd="sng" algn="ctr">
-                      <a:solidFill>
-                        <a:srgbClr val="D6D6D6"/>
-                      </a:solidFill>
-                      <a:prstDash val="solid"/>
-                      <a:round/>
-                      <a:headEnd type="none" w="med" len="med"/>
-                      <a:tailEnd type="none" w="med" len="med"/>
-                    </a:lnT>
-                    <a:lnB w="9525" cap="flat" cmpd="sng" algn="ctr">
-                      <a:solidFill>
-                        <a:srgbClr val="D6D6D6"/>
-                      </a:solidFill>
-                      <a:prstDash val="solid"/>
-                      <a:round/>
-                      <a:headEnd type="none" w="med" len="med"/>
-                      <a:tailEnd type="none" w="med" len="med"/>
-                    </a:lnB>
-                    <a:noFill/>
-                  </a:tcPr>
-                </a:tc>
-                <a:tc>
-                  <a:txBody>
-                    <a:bodyPr/>
-                    <a:lstStyle/>
-                    <a:p>
-                      <a:pPr marL="0" algn="l" defTabSz="914400" rtl="0" eaLnBrk="1" latinLnBrk="0" hangingPunct="1"/>
-                      <a:r>
-                        <a:rPr sz="800" b="0" kern="1200">
-                          <a:solidFill>
-                            <a:srgbClr val="0A0A0A"/>
-                          </a:solidFill>
-                          <a:latin typeface="微软雅黑" panose="020B0503020204020204" pitchFamily="34" charset="-122"/>
-                          <a:ea typeface="微软雅黑" panose="020B0503020204020204" pitchFamily="34" charset="-122"/>
-                          <a:cs typeface="+mn-cs"/>
-                        </a:rPr>
-                        <a:t>订阅</a:t>
-                      </a:r>
-                    </a:p>
-                  </a:txBody>
-                  <a:tcPr marL="27432" marR="27432" marT="9144" marB="9144">
-                    <a:lnL>
-                      <a:noFill/>
-                    </a:lnL>
-                    <a:lnR>
-                      <a:noFill/>
-                    </a:lnR>
-                    <a:lnT w="9525" cap="flat" cmpd="sng" algn="ctr">
-                      <a:solidFill>
-                        <a:srgbClr val="D6D6D6"/>
-                      </a:solidFill>
-                      <a:prstDash val="solid"/>
-                      <a:round/>
-                      <a:headEnd type="none" w="med" len="med"/>
-                      <a:tailEnd type="none" w="med" len="med"/>
-                    </a:lnT>
-                    <a:lnB w="9525" cap="flat" cmpd="sng" algn="ctr">
-                      <a:solidFill>
-                        <a:srgbClr val="D6D6D6"/>
-                      </a:solidFill>
-                      <a:prstDash val="solid"/>
-                      <a:round/>
-                      <a:headEnd type="none" w="med" len="med"/>
-                      <a:tailEnd type="none" w="med" len="med"/>
-                    </a:lnB>
-                    <a:noFill/>
-                  </a:tcPr>
-                </a:tc>
-                <a:tc>
-                  <a:txBody>
-                    <a:bodyPr/>
-                    <a:lstStyle/>
-                    <a:p>
-                      <a:pPr marL="0" algn="l" defTabSz="914400" rtl="0" eaLnBrk="1" latinLnBrk="0" hangingPunct="1"/>
-                      <a:r>
-                        <a:rPr sz="800" b="0" kern="1200">
-                          <a:solidFill>
-                            <a:srgbClr val="0A0A0A"/>
-                          </a:solidFill>
-                          <a:latin typeface="微软雅黑" panose="020B0503020204020204" pitchFamily="34" charset="-122"/>
-                          <a:ea typeface="微软雅黑" panose="020B0503020204020204" pitchFamily="34" charset="-122"/>
-                          <a:cs typeface="+mn-cs"/>
-                        </a:rPr>
-                        <a:t>商户知识库标准名匹配</a:t>
-                      </a:r>
-                    </a:p>
-                  </a:txBody>
-                  <a:tcPr marL="27432" marR="27432" marT="9144" marB="9144">
-                    <a:lnL>
-                      <a:noFill/>
-                    </a:lnL>
-                    <a:lnR>
-                      <a:noFill/>
-                    </a:lnR>
-                    <a:lnT w="9525" cap="flat" cmpd="sng" algn="ctr">
-                      <a:solidFill>
-                        <a:srgbClr val="D6D6D6"/>
-                      </a:solidFill>
-                      <a:prstDash val="solid"/>
-                      <a:round/>
-                      <a:headEnd type="none" w="med" len="med"/>
-                      <a:tailEnd type="none" w="med" len="med"/>
-                    </a:lnT>
-                    <a:lnB w="9525" cap="flat" cmpd="sng" algn="ctr">
-                      <a:solidFill>
-                        <a:srgbClr val="D6D6D6"/>
-                      </a:solidFill>
-                      <a:prstDash val="solid"/>
-                      <a:round/>
-                      <a:headEnd type="none" w="med" len="med"/>
-                      <a:tailEnd type="none" w="med" len="med"/>
-                    </a:lnB>
-                    <a:noFill/>
-                  </a:tcPr>
-                </a:tc>
-                <a:extLst>
-                  <a:ext uri="{0D108BD9-81ED-4DB2-BD59-A6C34878D82A}">
-                    <a16:rowId xmlns:a16="http://schemas.microsoft.com/office/drawing/2014/main" val="10004"/>
-                  </a:ext>
-                </a:extLst>
-              </a:tr>
-              <a:tr h="170373">
-                <a:tc>
-                  <a:txBody>
-                    <a:bodyPr/>
-                    <a:lstStyle/>
-                    <a:p>
-                      <a:pPr marL="0" algn="l" defTabSz="914400" rtl="0" eaLnBrk="1" latinLnBrk="0" hangingPunct="1"/>
-                      <a:r>
-                        <a:rPr sz="800" b="0" kern="1200">
-                          <a:solidFill>
-                            <a:srgbClr val="0A0A0A"/>
-                          </a:solidFill>
-                          <a:latin typeface="微软雅黑" panose="020B0503020204020204" pitchFamily="34" charset="-122"/>
-                          <a:ea typeface="微软雅黑" panose="020B0503020204020204" pitchFamily="34" charset="-122"/>
-                          <a:cs typeface="+mn-cs"/>
-                        </a:rPr>
-                        <a:t>2026/04/10</a:t>
-                      </a:r>
-                    </a:p>
-                  </a:txBody>
-                  <a:tcPr marL="27432" marR="27432" marT="9144" marB="9144">
-                    <a:lnL>
-                      <a:noFill/>
-                    </a:lnL>
-                    <a:lnR>
-                      <a:noFill/>
-                    </a:lnR>
-                    <a:lnT w="9525" cap="flat" cmpd="sng" algn="ctr">
-                      <a:solidFill>
-                        <a:srgbClr val="D6D6D6"/>
-                      </a:solidFill>
-                      <a:prstDash val="solid"/>
-                      <a:round/>
-                      <a:headEnd type="none" w="med" len="med"/>
-                      <a:tailEnd type="none" w="med" len="med"/>
-                    </a:lnT>
-                    <a:lnB w="9525">
-                      <a:solidFill>
-                        <a:srgbClr val="D6D6D6"/>
-                      </a:solidFill>
-                    </a:lnB>
-                    <a:noFill/>
-                  </a:tcPr>
-                </a:tc>
-                <a:tc>
-                  <a:txBody>
-                    <a:bodyPr/>
-                    <a:lstStyle/>
-                    <a:p>
-                      <a:pPr marL="0" algn="l" defTabSz="914400" rtl="0" eaLnBrk="1" latinLnBrk="0" hangingPunct="1"/>
-                      <a:r>
-                        <a:rPr sz="800" b="0" kern="1200" dirty="0">
-                          <a:solidFill>
-                            <a:srgbClr val="0A0A0A"/>
-                          </a:solidFill>
-                          <a:latin typeface="微软雅黑" panose="020B0503020204020204" pitchFamily="34" charset="-122"/>
-                          <a:ea typeface="微软雅黑" panose="020B0503020204020204" pitchFamily="34" charset="-122"/>
-                          <a:cs typeface="+mn-cs"/>
-                        </a:rPr>
-                        <a:t>PAYROLL ACME PTY LTD</a:t>
-                      </a:r>
-                    </a:p>
-                  </a:txBody>
-                  <a:tcPr marL="27432" marR="27432" marT="9144" marB="9144">
-                    <a:lnL>
-                      <a:noFill/>
-                    </a:lnL>
-                    <a:lnR>
-                      <a:noFill/>
-                    </a:lnR>
-                    <a:lnT w="9525" cap="flat" cmpd="sng" algn="ctr">
-                      <a:solidFill>
-                        <a:srgbClr val="D6D6D6"/>
-                      </a:solidFill>
-                      <a:prstDash val="solid"/>
-                      <a:round/>
-                      <a:headEnd type="none" w="med" len="med"/>
-                      <a:tailEnd type="none" w="med" len="med"/>
-                    </a:lnT>
-                    <a:lnB w="9525">
-                      <a:solidFill>
-                        <a:srgbClr val="D6D6D6"/>
-                      </a:solidFill>
-                    </a:lnB>
-                    <a:noFill/>
-                  </a:tcPr>
-                </a:tc>
-                <a:tc>
-                  <a:txBody>
-                    <a:bodyPr/>
-                    <a:lstStyle/>
-                    <a:p>
-                      <a:pPr marL="0" algn="l" defTabSz="914400" rtl="0" eaLnBrk="1" latinLnBrk="0" hangingPunct="1"/>
-                      <a:r>
-                        <a:rPr sz="800" b="0" kern="1200" dirty="0">
-                          <a:solidFill>
-                            <a:srgbClr val="0A0A0A"/>
-                          </a:solidFill>
-                          <a:latin typeface="微软雅黑" panose="020B0503020204020204" pitchFamily="34" charset="-122"/>
-                          <a:ea typeface="微软雅黑" panose="020B0503020204020204" pitchFamily="34" charset="-122"/>
-                          <a:cs typeface="+mn-cs"/>
-                        </a:rPr>
-                        <a:t>A$3,420.50</a:t>
-                      </a:r>
-                    </a:p>
-                  </a:txBody>
-                  <a:tcPr marL="27432" marR="27432" marT="9144" marB="9144">
-                    <a:lnL>
-                      <a:noFill/>
-                    </a:lnL>
-                    <a:lnR>
-                      <a:noFill/>
-                    </a:lnR>
-                    <a:lnT w="9525" cap="flat" cmpd="sng" algn="ctr">
-                      <a:solidFill>
-                        <a:srgbClr val="D6D6D6"/>
-                      </a:solidFill>
-                      <a:prstDash val="solid"/>
-                      <a:round/>
-                      <a:headEnd type="none" w="med" len="med"/>
-                      <a:tailEnd type="none" w="med" len="med"/>
-                    </a:lnT>
-                    <a:lnB w="9525">
-                      <a:solidFill>
-                        <a:srgbClr val="D6D6D6"/>
-                      </a:solidFill>
-                    </a:lnB>
-                    <a:noFill/>
-                  </a:tcPr>
-                </a:tc>
-                <a:tc>
-                  <a:txBody>
-                    <a:bodyPr/>
-                    <a:lstStyle/>
-                    <a:p>
-                      <a:pPr marL="0" algn="l" defTabSz="914400" rtl="0" eaLnBrk="1" latinLnBrk="0" hangingPunct="1"/>
-                      <a:r>
-                        <a:rPr sz="800" b="0" kern="1200">
-                          <a:solidFill>
-                            <a:srgbClr val="0A0A0A"/>
-                          </a:solidFill>
-                          <a:latin typeface="微软雅黑" panose="020B0503020204020204" pitchFamily="34" charset="-122"/>
-                          <a:ea typeface="微软雅黑" panose="020B0503020204020204" pitchFamily="34" charset="-122"/>
-                          <a:cs typeface="+mn-cs"/>
-                        </a:rPr>
-                        <a:t>ACME PTY LTD</a:t>
-                      </a:r>
-                    </a:p>
-                  </a:txBody>
-                  <a:tcPr marL="27432" marR="27432" marT="9144" marB="9144">
-                    <a:lnL>
-                      <a:noFill/>
-                    </a:lnL>
-                    <a:lnR>
-                      <a:noFill/>
-                    </a:lnR>
-                    <a:lnT w="9525" cap="flat" cmpd="sng" algn="ctr">
-                      <a:solidFill>
-                        <a:srgbClr val="D6D6D6"/>
-                      </a:solidFill>
-                      <a:prstDash val="solid"/>
-                      <a:round/>
-                      <a:headEnd type="none" w="med" len="med"/>
-                      <a:tailEnd type="none" w="med" len="med"/>
-                    </a:lnT>
-                    <a:lnB w="9525">
-                      <a:solidFill>
-                        <a:srgbClr val="D6D6D6"/>
-                      </a:solidFill>
-                    </a:lnB>
-                    <a:noFill/>
-                  </a:tcPr>
-                </a:tc>
-                <a:tc>
-                  <a:txBody>
-                    <a:bodyPr/>
-                    <a:lstStyle/>
-                    <a:p>
-                      <a:pPr marL="0" algn="l" defTabSz="914400" rtl="0" eaLnBrk="1" latinLnBrk="0" hangingPunct="1"/>
-                      <a:r>
-                        <a:rPr sz="800" b="0" kern="1200">
-                          <a:solidFill>
-                            <a:srgbClr val="0A0A0A"/>
-                          </a:solidFill>
-                          <a:latin typeface="微软雅黑" panose="020B0503020204020204" pitchFamily="34" charset="-122"/>
-                          <a:ea typeface="微软雅黑" panose="020B0503020204020204" pitchFamily="34" charset="-122"/>
-                          <a:cs typeface="+mn-cs"/>
-                        </a:rPr>
-                        <a:t>雇主 / 收入付款方</a:t>
-                      </a:r>
-                    </a:p>
-                  </a:txBody>
-                  <a:tcPr marL="27432" marR="27432" marT="9144" marB="9144">
-                    <a:lnL>
-                      <a:noFill/>
-                    </a:lnL>
-                    <a:lnR>
-                      <a:noFill/>
-                    </a:lnR>
-                    <a:lnT w="9525" cap="flat" cmpd="sng" algn="ctr">
-                      <a:solidFill>
-                        <a:srgbClr val="D6D6D6"/>
-                      </a:solidFill>
-                      <a:prstDash val="solid"/>
-                      <a:round/>
-                      <a:headEnd type="none" w="med" len="med"/>
-                      <a:tailEnd type="none" w="med" len="med"/>
-                    </a:lnT>
-                    <a:lnB w="9525">
-                      <a:solidFill>
-                        <a:srgbClr val="D6D6D6"/>
-                      </a:solidFill>
-                    </a:lnB>
-                    <a:noFill/>
-                  </a:tcPr>
-                </a:tc>
-                <a:tc>
-                  <a:txBody>
-                    <a:bodyPr/>
-                    <a:lstStyle/>
-                    <a:p>
-                      <a:pPr marL="0" algn="l" defTabSz="914400" rtl="0" eaLnBrk="1" latinLnBrk="0" hangingPunct="1"/>
-                      <a:r>
-                        <a:rPr sz="800" b="0" kern="1200">
-                          <a:solidFill>
-                            <a:srgbClr val="0A0A0A"/>
-                          </a:solidFill>
-                          <a:latin typeface="微软雅黑" panose="020B0503020204020204" pitchFamily="34" charset="-122"/>
-                          <a:ea typeface="微软雅黑" panose="020B0503020204020204" pitchFamily="34" charset="-122"/>
-                          <a:cs typeface="+mn-cs"/>
-                        </a:rPr>
-                        <a:t>收入</a:t>
-                      </a:r>
-                    </a:p>
-                  </a:txBody>
-                  <a:tcPr marL="27432" marR="27432" marT="9144" marB="9144">
-                    <a:lnL>
-                      <a:noFill/>
-                    </a:lnL>
-                    <a:lnR>
-                      <a:noFill/>
-                    </a:lnR>
-                    <a:lnT w="9525" cap="flat" cmpd="sng" algn="ctr">
-                      <a:solidFill>
-                        <a:srgbClr val="D6D6D6"/>
-                      </a:solidFill>
-                      <a:prstDash val="solid"/>
-                      <a:round/>
-                      <a:headEnd type="none" w="med" len="med"/>
-                      <a:tailEnd type="none" w="med" len="med"/>
-                    </a:lnT>
-                    <a:lnB w="9525">
-                      <a:solidFill>
-                        <a:srgbClr val="D6D6D6"/>
-                      </a:solidFill>
-                    </a:lnB>
-                    <a:noFill/>
-                  </a:tcPr>
-                </a:tc>
-                <a:tc>
-                  <a:txBody>
-                    <a:bodyPr/>
-                    <a:lstStyle/>
-                    <a:p>
-                      <a:pPr marL="0" algn="l" defTabSz="914400" rtl="0" eaLnBrk="1" latinLnBrk="0" hangingPunct="1"/>
-                      <a:r>
-                        <a:rPr sz="800" b="0" kern="1200" dirty="0" err="1">
-                          <a:solidFill>
-                            <a:srgbClr val="0A0A0A"/>
-                          </a:solidFill>
-                          <a:latin typeface="微软雅黑" panose="020B0503020204020204" pitchFamily="34" charset="-122"/>
-                          <a:ea typeface="微软雅黑" panose="020B0503020204020204" pitchFamily="34" charset="-122"/>
-                          <a:cs typeface="+mn-cs"/>
-                        </a:rPr>
-                        <a:t>工资文本模式</a:t>
-                      </a:r>
-                      <a:r>
-                        <a:rPr sz="800" b="0" kern="1200" dirty="0">
-                          <a:solidFill>
-                            <a:srgbClr val="0A0A0A"/>
-                          </a:solidFill>
-                          <a:latin typeface="微软雅黑" panose="020B0503020204020204" pitchFamily="34" charset="-122"/>
-                          <a:ea typeface="微软雅黑" panose="020B0503020204020204" pitchFamily="34" charset="-122"/>
-                          <a:cs typeface="+mn-cs"/>
-                        </a:rPr>
-                        <a:t> + </a:t>
-                      </a:r>
-                      <a:r>
-                        <a:rPr sz="800" b="0" kern="1200" dirty="0" err="1">
-                          <a:solidFill>
-                            <a:srgbClr val="0A0A0A"/>
-                          </a:solidFill>
-                          <a:latin typeface="微软雅黑" panose="020B0503020204020204" pitchFamily="34" charset="-122"/>
-                          <a:ea typeface="微软雅黑" panose="020B0503020204020204" pitchFamily="34" charset="-122"/>
-                          <a:cs typeface="+mn-cs"/>
-                        </a:rPr>
-                        <a:t>双周周期</a:t>
-                      </a:r>
-                      <a:r>
-                        <a:rPr sz="800" b="0" kern="1200" dirty="0">
-                          <a:solidFill>
-                            <a:srgbClr val="0A0A0A"/>
-                          </a:solidFill>
-                          <a:latin typeface="微软雅黑" panose="020B0503020204020204" pitchFamily="34" charset="-122"/>
-                          <a:ea typeface="微软雅黑" panose="020B0503020204020204" pitchFamily="34" charset="-122"/>
-                          <a:cs typeface="+mn-cs"/>
-                        </a:rPr>
-                        <a:t> + </a:t>
-                      </a:r>
-                      <a:r>
-                        <a:rPr sz="800" b="0" kern="1200" dirty="0" err="1">
-                          <a:solidFill>
-                            <a:srgbClr val="0A0A0A"/>
-                          </a:solidFill>
-                          <a:latin typeface="微软雅黑" panose="020B0503020204020204" pitchFamily="34" charset="-122"/>
-                          <a:ea typeface="微软雅黑" panose="020B0503020204020204" pitchFamily="34" charset="-122"/>
-                          <a:cs typeface="+mn-cs"/>
-                        </a:rPr>
-                        <a:t>稳定金额</a:t>
-                      </a:r>
-                      <a:endParaRPr sz="800" b="0" kern="1200" dirty="0">
-                        <a:solidFill>
-                          <a:srgbClr val="0A0A0A"/>
-                        </a:solidFill>
-                        <a:latin typeface="微软雅黑" panose="020B0503020204020204" pitchFamily="34" charset="-122"/>
-                        <a:ea typeface="微软雅黑" panose="020B0503020204020204" pitchFamily="34" charset="-122"/>
-                        <a:cs typeface="+mn-cs"/>
-                      </a:endParaRPr>
-                    </a:p>
-                  </a:txBody>
-                  <a:tcPr marL="27432" marR="27432" marT="9144" marB="9144">
-                    <a:lnL>
-                      <a:noFill/>
-                    </a:lnL>
-                    <a:lnR>
-                      <a:noFill/>
-                    </a:lnR>
-                    <a:lnT w="9525" cap="flat" cmpd="sng" algn="ctr">
-                      <a:solidFill>
-                        <a:srgbClr val="D6D6D6"/>
-                      </a:solidFill>
-                      <a:prstDash val="solid"/>
-                      <a:round/>
-                      <a:headEnd type="none" w="med" len="med"/>
-                      <a:tailEnd type="none" w="med" len="med"/>
-                    </a:lnT>
-                    <a:lnB w="9525">
-                      <a:solidFill>
-                        <a:srgbClr val="D6D6D6"/>
-                      </a:solidFill>
-                    </a:lnB>
-                    <a:noFill/>
-                  </a:tcPr>
-                </a:tc>
-                <a:extLst>
-                  <a:ext uri="{0D108BD9-81ED-4DB2-BD59-A6C34878D82A}">
-                    <a16:rowId xmlns:a16="http://schemas.microsoft.com/office/drawing/2014/main" val="10005"/>
-                  </a:ext>
-                </a:extLst>
-              </a:tr>
-            </a:tbl>
-          </a:graphicData>
-        </a:graphic>
-      </p:graphicFrame>
-      <p:graphicFrame>
-        <p:nvGraphicFramePr>
-          <p:cNvPr id="17" name="income-table">
-            <a:extLst>
-              <a:ext uri="{FF2B5EF4-FFF2-40B4-BE49-F238E27FC236}">
-                <a16:creationId xmlns:a16="http://schemas.microsoft.com/office/drawing/2014/main" id="{FC75553F-AD69-4A96-9AF1-99CAAD3835B1}"/>
-              </a:ext>
-            </a:extLst>
-          </p:cNvPr>
-          <p:cNvGraphicFramePr>
-            <a:graphicFrameLocks noGrp="1"/>
-          </p:cNvGraphicFramePr>
-          <p:nvPr>
-            <p:extLst>
-              <p:ext uri="{D42A27DB-BD31-4B8C-83A1-F6EECF244321}">
-                <p14:modId xmlns:p14="http://schemas.microsoft.com/office/powerpoint/2010/main" val="1359014883"/>
-              </p:ext>
-            </p:extLst>
-          </p:nvPr>
-        </p:nvGraphicFramePr>
-        <p:xfrm>
-          <a:off x="1573182" y="4380696"/>
-          <a:ext cx="3127663" cy="2082800"/>
-        </p:xfrm>
-        <a:graphic>
-          <a:graphicData uri="http://schemas.openxmlformats.org/drawingml/2006/table">
-            <a:tbl>
-              <a:tblPr/>
-              <a:tblGrid>
-                <a:gridCol w="1252461">
-                  <a:extLst>
-                    <a:ext uri="{9D8B030D-6E8A-4147-A177-3AD203B41FA5}">
-                      <a16:colId xmlns:a16="http://schemas.microsoft.com/office/drawing/2014/main" val="20000"/>
-                    </a:ext>
-                  </a:extLst>
-                </a:gridCol>
-                <a:gridCol w="1875202">
-                  <a:extLst>
-                    <a:ext uri="{9D8B030D-6E8A-4147-A177-3AD203B41FA5}">
-                      <a16:colId xmlns:a16="http://schemas.microsoft.com/office/drawing/2014/main" val="20001"/>
-                    </a:ext>
-                  </a:extLst>
-                </a:gridCol>
-              </a:tblGrid>
-              <a:tr h="177800">
-                <a:tc>
-                  <a:txBody>
-                    <a:bodyPr/>
-                    <a:lstStyle/>
-                    <a:p>
-                      <a:pPr algn="l"/>
-                      <a:r>
-                        <a:rPr sz="800" b="1" dirty="0" err="1">
-                          <a:solidFill>
-                            <a:srgbClr val="0A0A0A"/>
-                          </a:solidFill>
-                          <a:latin typeface="微软雅黑"/>
-                          <a:ea typeface="微软雅黑"/>
-                        </a:rPr>
-                        <a:t>指标</a:t>
-                      </a:r>
-                      <a:endParaRPr sz="800" b="1" dirty="0">
-                        <a:solidFill>
-                          <a:srgbClr val="0A0A0A"/>
-                        </a:solidFill>
-                        <a:latin typeface="微软雅黑"/>
-                        <a:ea typeface="微软雅黑"/>
-                      </a:endParaRPr>
-                    </a:p>
-                  </a:txBody>
-                  <a:tcPr marL="27432" marR="27432" marT="9144" marB="9144">
-                    <a:lnL>
-                      <a:noFill/>
-                    </a:lnL>
-                    <a:lnR>
-                      <a:noFill/>
-                    </a:lnR>
-                    <a:lnT>
-                      <a:noFill/>
-                    </a:lnT>
-                    <a:lnB w="19050">
-                      <a:solidFill>
-                        <a:srgbClr val="0A0A0A"/>
-                      </a:solidFill>
-                    </a:lnB>
-                    <a:noFill/>
-                  </a:tcPr>
-                </a:tc>
-                <a:tc>
-                  <a:txBody>
-                    <a:bodyPr/>
-                    <a:lstStyle/>
-                    <a:p>
-                      <a:pPr algn="l"/>
-                      <a:r>
-                        <a:rPr sz="800" b="1" dirty="0" err="1">
-                          <a:solidFill>
-                            <a:srgbClr val="0A0A0A"/>
-                          </a:solidFill>
-                          <a:latin typeface="微软雅黑"/>
-                          <a:ea typeface="微软雅黑"/>
-                        </a:rPr>
-                        <a:t>结果</a:t>
-                      </a:r>
-                      <a:endParaRPr sz="800" b="1" dirty="0">
-                        <a:solidFill>
-                          <a:srgbClr val="0A0A0A"/>
-                        </a:solidFill>
-                        <a:latin typeface="微软雅黑"/>
-                        <a:ea typeface="微软雅黑"/>
-                      </a:endParaRPr>
-                    </a:p>
-                  </a:txBody>
-                  <a:tcPr marL="27432" marR="27432" marT="9144" marB="9144">
-                    <a:lnL>
-                      <a:noFill/>
-                    </a:lnL>
-                    <a:lnR>
-                      <a:noFill/>
-                    </a:lnR>
-                    <a:lnT>
-                      <a:noFill/>
-                    </a:lnT>
-                    <a:lnB w="19050">
-                      <a:solidFill>
-                        <a:srgbClr val="0A0A0A"/>
-                      </a:solidFill>
-                    </a:lnB>
-                    <a:noFill/>
-                  </a:tcPr>
-                </a:tc>
-                <a:extLst>
-                  <a:ext uri="{0D108BD9-81ED-4DB2-BD59-A6C34878D82A}">
-                    <a16:rowId xmlns:a16="http://schemas.microsoft.com/office/drawing/2014/main" val="10000"/>
-                  </a:ext>
-                </a:extLst>
-              </a:tr>
-              <a:tr h="190500">
-                <a:tc>
-                  <a:txBody>
-                    <a:bodyPr/>
-                    <a:lstStyle/>
-                    <a:p>
-                      <a:pPr algn="l"/>
-                      <a:r>
-                        <a:rPr sz="800" b="0" dirty="0" err="1">
-                          <a:solidFill>
-                            <a:srgbClr val="3D3C3A"/>
-                          </a:solidFill>
-                          <a:latin typeface="微软雅黑"/>
-                          <a:ea typeface="微软雅黑"/>
-                        </a:rPr>
-                        <a:t>贷款机构数量</a:t>
-                      </a:r>
-                      <a:endParaRPr sz="800" b="0" dirty="0">
-                        <a:solidFill>
-                          <a:srgbClr val="3D3C3A"/>
-                        </a:solidFill>
-                        <a:latin typeface="微软雅黑"/>
-                        <a:ea typeface="微软雅黑"/>
-                      </a:endParaRPr>
-                    </a:p>
-                  </a:txBody>
-                  <a:tcPr marL="27432" marR="27432" marT="9144" marB="9144">
-                    <a:lnL>
-                      <a:noFill/>
-                    </a:lnL>
-                    <a:lnR>
-                      <a:noFill/>
-                    </a:lnR>
-                    <a:lnT w="19050" cap="flat" cmpd="sng" algn="ctr">
-                      <a:solidFill>
-                        <a:srgbClr val="0A0A0A"/>
-                      </a:solidFill>
-                      <a:prstDash val="solid"/>
-                      <a:round/>
-                      <a:headEnd type="none" w="med" len="med"/>
-                      <a:tailEnd type="none" w="med" len="med"/>
-                    </a:lnT>
-                    <a:lnB w="9525">
-                      <a:solidFill>
-                        <a:srgbClr val="D6D6D6"/>
-                      </a:solidFill>
-                    </a:lnB>
-                    <a:noFill/>
-                  </a:tcPr>
-                </a:tc>
-                <a:tc>
-                  <a:txBody>
-                    <a:bodyPr/>
-                    <a:lstStyle/>
-                    <a:p>
-                      <a:pPr algn="l"/>
-                      <a:r>
-                        <a:rPr sz="800" b="0">
-                          <a:solidFill>
-                            <a:srgbClr val="3D3C3A"/>
-                          </a:solidFill>
-                          <a:latin typeface="微软雅黑"/>
-                          <a:ea typeface="微软雅黑"/>
-                        </a:rPr>
-                        <a:t>2 家</a:t>
-                      </a:r>
-                    </a:p>
-                  </a:txBody>
-                  <a:tcPr marL="27432" marR="27432" marT="9144" marB="9144">
-                    <a:lnL>
-                      <a:noFill/>
-                    </a:lnL>
-                    <a:lnR>
-                      <a:noFill/>
-                    </a:lnR>
-                    <a:lnT w="19050" cap="flat" cmpd="sng" algn="ctr">
-                      <a:solidFill>
-                        <a:srgbClr val="0A0A0A"/>
-                      </a:solidFill>
-                      <a:prstDash val="solid"/>
-                      <a:round/>
-                      <a:headEnd type="none" w="med" len="med"/>
-                      <a:tailEnd type="none" w="med" len="med"/>
-                    </a:lnT>
-                    <a:lnB w="9525">
-                      <a:solidFill>
-                        <a:srgbClr val="D6D6D6"/>
-                      </a:solidFill>
-                    </a:lnB>
-                    <a:noFill/>
-                  </a:tcPr>
-                </a:tc>
-                <a:extLst>
-                  <a:ext uri="{0D108BD9-81ED-4DB2-BD59-A6C34878D82A}">
-                    <a16:rowId xmlns:a16="http://schemas.microsoft.com/office/drawing/2014/main" val="10001"/>
-                  </a:ext>
-                </a:extLst>
-              </a:tr>
-              <a:tr h="190500">
-                <a:tc>
-                  <a:txBody>
-                    <a:bodyPr/>
-                    <a:lstStyle/>
-                    <a:p>
-                      <a:pPr algn="l"/>
-                      <a:r>
-                        <a:rPr sz="800" b="0" dirty="0">
-                          <a:solidFill>
-                            <a:srgbClr val="3D3C3A"/>
-                          </a:solidFill>
-                          <a:latin typeface="微软雅黑"/>
-                          <a:ea typeface="微软雅黑"/>
-                        </a:rPr>
-                        <a:t>90 </a:t>
-                      </a:r>
-                      <a:r>
-                        <a:rPr sz="800" b="0" dirty="0" err="1">
-                          <a:solidFill>
-                            <a:srgbClr val="3D3C3A"/>
-                          </a:solidFill>
-                          <a:latin typeface="微软雅黑"/>
-                          <a:ea typeface="微软雅黑"/>
-                        </a:rPr>
-                        <a:t>天借款金额</a:t>
-                      </a:r>
-                      <a:endParaRPr sz="800" b="0" dirty="0">
-                        <a:solidFill>
-                          <a:srgbClr val="3D3C3A"/>
-                        </a:solidFill>
-                        <a:latin typeface="微软雅黑"/>
-                        <a:ea typeface="微软雅黑"/>
-                      </a:endParaRPr>
-                    </a:p>
-                  </a:txBody>
-                  <a:tcPr marL="27432" marR="27432" marT="9144" marB="9144">
-                    <a:lnL>
-                      <a:noFill/>
-                    </a:lnL>
-                    <a:lnR>
-                      <a:noFill/>
-                    </a:lnR>
-                    <a:lnT w="9525" cap="flat" cmpd="sng" algn="ctr">
-                      <a:solidFill>
-                        <a:srgbClr val="D6D6D6"/>
-                      </a:solidFill>
-                      <a:prstDash val="solid"/>
-                      <a:round/>
-                      <a:headEnd type="none" w="med" len="med"/>
-                      <a:tailEnd type="none" w="med" len="med"/>
-                    </a:lnT>
-                    <a:lnB w="9525">
-                      <a:solidFill>
-                        <a:srgbClr val="D6D6D6"/>
-                      </a:solidFill>
-                    </a:lnB>
-                    <a:noFill/>
-                  </a:tcPr>
-                </a:tc>
-                <a:tc>
-                  <a:txBody>
-                    <a:bodyPr/>
-                    <a:lstStyle/>
-                    <a:p>
-                      <a:pPr algn="l"/>
-                      <a:r>
-                        <a:rPr sz="800" b="0" dirty="0">
-                          <a:solidFill>
-                            <a:srgbClr val="3D3C3A"/>
-                          </a:solidFill>
-                          <a:latin typeface="微软雅黑"/>
-                          <a:ea typeface="微软雅黑"/>
-                        </a:rPr>
-                        <a:t>A$2,300</a:t>
-                      </a:r>
-                    </a:p>
-                  </a:txBody>
-                  <a:tcPr marL="27432" marR="27432" marT="9144" marB="9144">
-                    <a:lnL>
-                      <a:noFill/>
-                    </a:lnL>
-                    <a:lnR>
-                      <a:noFill/>
-                    </a:lnR>
-                    <a:lnT w="9525" cap="flat" cmpd="sng" algn="ctr">
-                      <a:solidFill>
-                        <a:srgbClr val="D6D6D6"/>
-                      </a:solidFill>
-                      <a:prstDash val="solid"/>
-                      <a:round/>
-                      <a:headEnd type="none" w="med" len="med"/>
-                      <a:tailEnd type="none" w="med" len="med"/>
-                    </a:lnT>
-                    <a:lnB w="9525">
-                      <a:solidFill>
-                        <a:srgbClr val="D6D6D6"/>
-                      </a:solidFill>
-                    </a:lnB>
-                    <a:noFill/>
-                  </a:tcPr>
-                </a:tc>
-                <a:extLst>
-                  <a:ext uri="{0D108BD9-81ED-4DB2-BD59-A6C34878D82A}">
-                    <a16:rowId xmlns:a16="http://schemas.microsoft.com/office/drawing/2014/main" val="10002"/>
-                  </a:ext>
-                </a:extLst>
-              </a:tr>
-              <a:tr h="190500">
-                <a:tc>
-                  <a:txBody>
-                    <a:bodyPr/>
-                    <a:lstStyle/>
-                    <a:p>
-                      <a:pPr algn="l"/>
-                      <a:r>
-                        <a:rPr sz="800" b="0">
-                          <a:solidFill>
-                            <a:srgbClr val="3D3C3A"/>
-                          </a:solidFill>
-                          <a:latin typeface="微软雅黑"/>
-                          <a:ea typeface="微软雅黑"/>
-                        </a:rPr>
-                        <a:t>90 天还款金额</a:t>
-                      </a:r>
-                    </a:p>
-                  </a:txBody>
-                  <a:tcPr marL="27432" marR="27432" marT="9144" marB="9144">
-                    <a:lnL>
-                      <a:noFill/>
-                    </a:lnL>
-                    <a:lnR>
-                      <a:noFill/>
-                    </a:lnR>
-                    <a:lnT w="9525" cap="flat" cmpd="sng" algn="ctr">
-                      <a:solidFill>
-                        <a:srgbClr val="D6D6D6"/>
-                      </a:solidFill>
-                      <a:prstDash val="solid"/>
-                      <a:round/>
-                      <a:headEnd type="none" w="med" len="med"/>
-                      <a:tailEnd type="none" w="med" len="med"/>
-                    </a:lnT>
-                    <a:lnB w="9525">
-                      <a:solidFill>
-                        <a:srgbClr val="D6D6D6"/>
-                      </a:solidFill>
-                    </a:lnB>
-                    <a:noFill/>
-                  </a:tcPr>
-                </a:tc>
-                <a:tc>
-                  <a:txBody>
-                    <a:bodyPr/>
-                    <a:lstStyle/>
-                    <a:p>
-                      <a:pPr algn="l"/>
-                      <a:r>
-                        <a:rPr sz="800" b="0" dirty="0">
-                          <a:solidFill>
-                            <a:srgbClr val="3D3C3A"/>
-                          </a:solidFill>
-                          <a:latin typeface="微软雅黑"/>
-                          <a:ea typeface="微软雅黑"/>
-                        </a:rPr>
-                        <a:t>A$1,284</a:t>
-                      </a:r>
-                    </a:p>
-                  </a:txBody>
-                  <a:tcPr marL="27432" marR="27432" marT="9144" marB="9144">
-                    <a:lnL>
-                      <a:noFill/>
-                    </a:lnL>
-                    <a:lnR>
-                      <a:noFill/>
-                    </a:lnR>
-                    <a:lnT w="9525" cap="flat" cmpd="sng" algn="ctr">
-                      <a:solidFill>
-                        <a:srgbClr val="D6D6D6"/>
-                      </a:solidFill>
-                      <a:prstDash val="solid"/>
-                      <a:round/>
-                      <a:headEnd type="none" w="med" len="med"/>
-                      <a:tailEnd type="none" w="med" len="med"/>
-                    </a:lnT>
-                    <a:lnB w="9525">
-                      <a:solidFill>
-                        <a:srgbClr val="D6D6D6"/>
-                      </a:solidFill>
-                    </a:lnB>
-                    <a:noFill/>
-                  </a:tcPr>
-                </a:tc>
-                <a:extLst>
-                  <a:ext uri="{0D108BD9-81ED-4DB2-BD59-A6C34878D82A}">
-                    <a16:rowId xmlns:a16="http://schemas.microsoft.com/office/drawing/2014/main" val="10003"/>
-                  </a:ext>
-                </a:extLst>
-              </a:tr>
-              <a:tr h="190500">
-                <a:tc>
-                  <a:txBody>
-                    <a:bodyPr/>
-                    <a:lstStyle/>
-                    <a:p>
-                      <a:pPr algn="l"/>
-                      <a:r>
-                        <a:rPr sz="800" b="0" dirty="0" err="1">
-                          <a:solidFill>
-                            <a:srgbClr val="3D3C3A"/>
-                          </a:solidFill>
-                          <a:latin typeface="微软雅黑"/>
-                          <a:ea typeface="微软雅黑"/>
-                        </a:rPr>
-                        <a:t>平均月还款金额</a:t>
-                      </a:r>
-                      <a:endParaRPr sz="800" b="0" dirty="0">
-                        <a:solidFill>
-                          <a:srgbClr val="3D3C3A"/>
-                        </a:solidFill>
-                        <a:latin typeface="微软雅黑"/>
-                        <a:ea typeface="微软雅黑"/>
-                      </a:endParaRPr>
-                    </a:p>
-                  </a:txBody>
-                  <a:tcPr marL="27432" marR="27432" marT="9144" marB="9144">
-                    <a:lnL>
-                      <a:noFill/>
-                    </a:lnL>
-                    <a:lnR>
-                      <a:noFill/>
-                    </a:lnR>
-                    <a:lnT w="9525" cap="flat" cmpd="sng" algn="ctr">
-                      <a:solidFill>
-                        <a:srgbClr val="D6D6D6"/>
-                      </a:solidFill>
-                      <a:prstDash val="solid"/>
-                      <a:round/>
-                      <a:headEnd type="none" w="med" len="med"/>
-                      <a:tailEnd type="none" w="med" len="med"/>
-                    </a:lnT>
-                    <a:lnB w="9525" cap="flat" cmpd="sng" algn="ctr">
-                      <a:solidFill>
-                        <a:srgbClr val="D6D6D6"/>
-                      </a:solidFill>
-                      <a:prstDash val="solid"/>
-                      <a:round/>
-                      <a:headEnd type="none" w="med" len="med"/>
-                      <a:tailEnd type="none" w="med" len="med"/>
-                    </a:lnB>
-                    <a:noFill/>
-                  </a:tcPr>
-                </a:tc>
-                <a:tc>
-                  <a:txBody>
-                    <a:bodyPr/>
-                    <a:lstStyle/>
-                    <a:p>
-                      <a:pPr algn="l"/>
-                      <a:r>
-                        <a:rPr sz="800" b="0" dirty="0">
-                          <a:solidFill>
-                            <a:srgbClr val="3D3C3A"/>
-                          </a:solidFill>
-                          <a:latin typeface="微软雅黑"/>
-                          <a:ea typeface="微软雅黑"/>
-                        </a:rPr>
-                        <a:t>A$428</a:t>
-                      </a:r>
-                    </a:p>
-                  </a:txBody>
-                  <a:tcPr marL="27432" marR="27432" marT="9144" marB="9144">
-                    <a:lnL>
-                      <a:noFill/>
-                    </a:lnL>
-                    <a:lnR>
-                      <a:noFill/>
-                    </a:lnR>
-                    <a:lnT w="9525" cap="flat" cmpd="sng" algn="ctr">
-                      <a:solidFill>
-                        <a:srgbClr val="D6D6D6"/>
-                      </a:solidFill>
-                      <a:prstDash val="solid"/>
-                      <a:round/>
-                      <a:headEnd type="none" w="med" len="med"/>
-                      <a:tailEnd type="none" w="med" len="med"/>
-                    </a:lnT>
-                    <a:lnB w="9525" cap="flat" cmpd="sng" algn="ctr">
-                      <a:solidFill>
-                        <a:srgbClr val="D6D6D6"/>
-                      </a:solidFill>
-                      <a:prstDash val="solid"/>
-                      <a:round/>
-                      <a:headEnd type="none" w="med" len="med"/>
-                      <a:tailEnd type="none" w="med" len="med"/>
-                    </a:lnB>
-                    <a:noFill/>
-                  </a:tcPr>
-                </a:tc>
-                <a:extLst>
-                  <a:ext uri="{0D108BD9-81ED-4DB2-BD59-A6C34878D82A}">
-                    <a16:rowId xmlns:a16="http://schemas.microsoft.com/office/drawing/2014/main" val="10004"/>
-                  </a:ext>
-                </a:extLst>
-              </a:tr>
-              <a:tr h="190500">
-                <a:tc>
-                  <a:txBody>
-                    <a:bodyPr/>
-                    <a:lstStyle/>
-                    <a:p>
-                      <a:pPr algn="l"/>
-                      <a:r>
-                        <a:rPr sz="800" b="0">
-                          <a:solidFill>
-                            <a:srgbClr val="3D3C3A"/>
-                          </a:solidFill>
-                          <a:latin typeface="微软雅黑"/>
-                          <a:ea typeface="微软雅黑"/>
-                        </a:rPr>
-                        <a:t>预计待还金额</a:t>
-                      </a:r>
-                    </a:p>
-                  </a:txBody>
-                  <a:tcPr marL="27432" marR="27432" marT="9144" marB="9144">
-                    <a:lnL>
-                      <a:noFill/>
-                    </a:lnL>
-                    <a:lnR>
-                      <a:noFill/>
-                    </a:lnR>
-                    <a:lnT w="9525" cap="flat" cmpd="sng" algn="ctr">
-                      <a:solidFill>
-                        <a:srgbClr val="D6D6D6"/>
-                      </a:solidFill>
-                      <a:prstDash val="solid"/>
-                      <a:round/>
-                      <a:headEnd type="none" w="med" len="med"/>
-                      <a:tailEnd type="none" w="med" len="med"/>
-                    </a:lnT>
-                    <a:lnB w="9525" cap="flat" cmpd="sng" algn="ctr">
-                      <a:solidFill>
-                        <a:srgbClr val="D6D6D6"/>
-                      </a:solidFill>
-                      <a:prstDash val="solid"/>
-                      <a:round/>
-                      <a:headEnd type="none" w="med" len="med"/>
-                      <a:tailEnd type="none" w="med" len="med"/>
-                    </a:lnB>
-                    <a:noFill/>
-                  </a:tcPr>
-                </a:tc>
-                <a:tc>
-                  <a:txBody>
-                    <a:bodyPr/>
-                    <a:lstStyle/>
-                    <a:p>
-                      <a:pPr algn="l"/>
-                      <a:r>
-                        <a:rPr sz="800" b="0">
-                          <a:solidFill>
-                            <a:srgbClr val="3D3C3A"/>
-                          </a:solidFill>
-                          <a:latin typeface="微软雅黑"/>
-                          <a:ea typeface="微软雅黑"/>
-                        </a:rPr>
-                        <a:t>A$1,016</a:t>
-                      </a:r>
-                    </a:p>
-                  </a:txBody>
-                  <a:tcPr marL="27432" marR="27432" marT="9144" marB="9144">
-                    <a:lnL>
-                      <a:noFill/>
-                    </a:lnL>
-                    <a:lnR>
-                      <a:noFill/>
-                    </a:lnR>
-                    <a:lnT w="9525" cap="flat" cmpd="sng" algn="ctr">
-                      <a:solidFill>
-                        <a:srgbClr val="D6D6D6"/>
-                      </a:solidFill>
-                      <a:prstDash val="solid"/>
-                      <a:round/>
-                      <a:headEnd type="none" w="med" len="med"/>
-                      <a:tailEnd type="none" w="med" len="med"/>
-                    </a:lnT>
-                    <a:lnB w="9525" cap="flat" cmpd="sng" algn="ctr">
-                      <a:solidFill>
-                        <a:srgbClr val="D6D6D6"/>
-                      </a:solidFill>
-                      <a:prstDash val="solid"/>
-                      <a:round/>
-                      <a:headEnd type="none" w="med" len="med"/>
-                      <a:tailEnd type="none" w="med" len="med"/>
-                    </a:lnB>
-                    <a:noFill/>
-                  </a:tcPr>
-                </a:tc>
-                <a:extLst>
-                  <a:ext uri="{0D108BD9-81ED-4DB2-BD59-A6C34878D82A}">
-                    <a16:rowId xmlns:a16="http://schemas.microsoft.com/office/drawing/2014/main" val="2025723682"/>
-                  </a:ext>
-                </a:extLst>
-              </a:tr>
-              <a:tr h="190500">
-                <a:tc>
-                  <a:txBody>
-                    <a:bodyPr/>
-                    <a:lstStyle/>
-                    <a:p>
-                      <a:pPr algn="l"/>
-                      <a:r>
-                        <a:rPr sz="800" b="0" dirty="0" err="1">
-                          <a:solidFill>
-                            <a:srgbClr val="3D3C3A"/>
-                          </a:solidFill>
-                          <a:latin typeface="微软雅黑"/>
-                          <a:ea typeface="微软雅黑"/>
-                        </a:rPr>
-                        <a:t>还款次数</a:t>
-                      </a:r>
-                      <a:endParaRPr sz="800" b="0" dirty="0">
-                        <a:solidFill>
-                          <a:srgbClr val="3D3C3A"/>
-                        </a:solidFill>
-                        <a:latin typeface="微软雅黑"/>
-                        <a:ea typeface="微软雅黑"/>
-                      </a:endParaRPr>
-                    </a:p>
-                  </a:txBody>
-                  <a:tcPr marL="27432" marR="27432" marT="9144" marB="9144">
-                    <a:lnL>
-                      <a:noFill/>
-                    </a:lnL>
-                    <a:lnR>
-                      <a:noFill/>
-                    </a:lnR>
-                    <a:lnT w="9525" cap="flat" cmpd="sng" algn="ctr">
-                      <a:solidFill>
-                        <a:srgbClr val="D6D6D6"/>
-                      </a:solidFill>
-                      <a:prstDash val="solid"/>
-                      <a:round/>
-                      <a:headEnd type="none" w="med" len="med"/>
-                      <a:tailEnd type="none" w="med" len="med"/>
-                    </a:lnT>
-                    <a:lnB w="9525" cap="flat" cmpd="sng" algn="ctr">
-                      <a:solidFill>
-                        <a:srgbClr val="D6D6D6"/>
-                      </a:solidFill>
-                      <a:prstDash val="solid"/>
-                      <a:round/>
-                      <a:headEnd type="none" w="med" len="med"/>
-                      <a:tailEnd type="none" w="med" len="med"/>
-                    </a:lnB>
-                    <a:noFill/>
-                  </a:tcPr>
-                </a:tc>
-                <a:tc>
-                  <a:txBody>
-                    <a:bodyPr/>
-                    <a:lstStyle/>
-                    <a:p>
-                      <a:pPr algn="l"/>
-                      <a:r>
-                        <a:rPr sz="800" b="0">
-                          <a:solidFill>
-                            <a:srgbClr val="3D3C3A"/>
-                          </a:solidFill>
-                          <a:latin typeface="微软雅黑"/>
-                          <a:ea typeface="微软雅黑"/>
-                        </a:rPr>
-                        <a:t>9 次</a:t>
-                      </a:r>
-                    </a:p>
-                  </a:txBody>
-                  <a:tcPr marL="27432" marR="27432" marT="9144" marB="9144">
-                    <a:lnL>
-                      <a:noFill/>
-                    </a:lnL>
-                    <a:lnR>
-                      <a:noFill/>
-                    </a:lnR>
-                    <a:lnT w="9525" cap="flat" cmpd="sng" algn="ctr">
-                      <a:solidFill>
-                        <a:srgbClr val="D6D6D6"/>
-                      </a:solidFill>
-                      <a:prstDash val="solid"/>
-                      <a:round/>
-                      <a:headEnd type="none" w="med" len="med"/>
-                      <a:tailEnd type="none" w="med" len="med"/>
-                    </a:lnT>
-                    <a:lnB w="9525" cap="flat" cmpd="sng" algn="ctr">
-                      <a:solidFill>
-                        <a:srgbClr val="D6D6D6"/>
-                      </a:solidFill>
-                      <a:prstDash val="solid"/>
-                      <a:round/>
-                      <a:headEnd type="none" w="med" len="med"/>
-                      <a:tailEnd type="none" w="med" len="med"/>
-                    </a:lnB>
-                    <a:noFill/>
-                  </a:tcPr>
-                </a:tc>
-                <a:extLst>
-                  <a:ext uri="{0D108BD9-81ED-4DB2-BD59-A6C34878D82A}">
-                    <a16:rowId xmlns:a16="http://schemas.microsoft.com/office/drawing/2014/main" val="4019927453"/>
-                  </a:ext>
-                </a:extLst>
-              </a:tr>
-              <a:tr h="190500">
-                <a:tc>
-                  <a:txBody>
-                    <a:bodyPr/>
-                    <a:lstStyle/>
-                    <a:p>
-                      <a:pPr algn="l"/>
-                      <a:r>
-                        <a:rPr sz="800" b="0">
-                          <a:solidFill>
-                            <a:srgbClr val="3D3C3A"/>
-                          </a:solidFill>
-                          <a:latin typeface="微软雅黑"/>
-                          <a:ea typeface="微软雅黑"/>
-                        </a:rPr>
-                        <a:t>是否存在 SACC 贷款</a:t>
-                      </a:r>
-                    </a:p>
-                  </a:txBody>
-                  <a:tcPr marL="27432" marR="27432" marT="9144" marB="9144">
-                    <a:lnL>
-                      <a:noFill/>
-                    </a:lnL>
-                    <a:lnR>
-                      <a:noFill/>
-                    </a:lnR>
-                    <a:lnT w="9525" cap="flat" cmpd="sng" algn="ctr">
-                      <a:solidFill>
-                        <a:srgbClr val="D6D6D6"/>
-                      </a:solidFill>
-                      <a:prstDash val="solid"/>
-                      <a:round/>
-                      <a:headEnd type="none" w="med" len="med"/>
-                      <a:tailEnd type="none" w="med" len="med"/>
-                    </a:lnT>
-                    <a:lnB w="9525" cap="flat" cmpd="sng" algn="ctr">
-                      <a:solidFill>
-                        <a:srgbClr val="D6D6D6"/>
-                      </a:solidFill>
-                      <a:prstDash val="solid"/>
-                      <a:round/>
-                      <a:headEnd type="none" w="med" len="med"/>
-                      <a:tailEnd type="none" w="med" len="med"/>
-                    </a:lnB>
-                    <a:noFill/>
-                  </a:tcPr>
-                </a:tc>
-                <a:tc>
-                  <a:txBody>
-                    <a:bodyPr/>
-                    <a:lstStyle/>
-                    <a:p>
-                      <a:pPr algn="l"/>
-                      <a:r>
-                        <a:rPr sz="800" b="0" dirty="0">
-                          <a:solidFill>
-                            <a:srgbClr val="3D3C3A"/>
-                          </a:solidFill>
-                          <a:latin typeface="微软雅黑"/>
-                          <a:ea typeface="微软雅黑"/>
-                        </a:rPr>
-                        <a:t>是</a:t>
-                      </a:r>
-                    </a:p>
-                  </a:txBody>
-                  <a:tcPr marL="27432" marR="27432" marT="9144" marB="9144">
-                    <a:lnL>
-                      <a:noFill/>
-                    </a:lnL>
-                    <a:lnR>
-                      <a:noFill/>
-                    </a:lnR>
-                    <a:lnT w="9525" cap="flat" cmpd="sng" algn="ctr">
-                      <a:solidFill>
-                        <a:srgbClr val="D6D6D6"/>
-                      </a:solidFill>
-                      <a:prstDash val="solid"/>
-                      <a:round/>
-                      <a:headEnd type="none" w="med" len="med"/>
-                      <a:tailEnd type="none" w="med" len="med"/>
-                    </a:lnT>
-                    <a:lnB w="9525" cap="flat" cmpd="sng" algn="ctr">
-                      <a:solidFill>
-                        <a:srgbClr val="D6D6D6"/>
-                      </a:solidFill>
-                      <a:prstDash val="solid"/>
-                      <a:round/>
-                      <a:headEnd type="none" w="med" len="med"/>
-                      <a:tailEnd type="none" w="med" len="med"/>
-                    </a:lnB>
-                    <a:noFill/>
-                  </a:tcPr>
-                </a:tc>
-                <a:extLst>
-                  <a:ext uri="{0D108BD9-81ED-4DB2-BD59-A6C34878D82A}">
-                    <a16:rowId xmlns:a16="http://schemas.microsoft.com/office/drawing/2014/main" val="4266330826"/>
-                  </a:ext>
-                </a:extLst>
-              </a:tr>
-              <a:tr h="190500">
-                <a:tc>
-                  <a:txBody>
-                    <a:bodyPr/>
-                    <a:lstStyle/>
-                    <a:p>
-                      <a:pPr algn="l"/>
-                      <a:r>
-                        <a:rPr sz="800" b="0">
-                          <a:solidFill>
-                            <a:srgbClr val="3D3C3A"/>
-                          </a:solidFill>
-                          <a:latin typeface="微软雅黑"/>
-                          <a:ea typeface="微软雅黑"/>
-                        </a:rPr>
-                        <a:t>是否存在多头借贷</a:t>
-                      </a:r>
-                    </a:p>
-                  </a:txBody>
-                  <a:tcPr marL="27432" marR="27432" marT="9144" marB="9144">
-                    <a:lnL>
-                      <a:noFill/>
-                    </a:lnL>
-                    <a:lnR>
-                      <a:noFill/>
-                    </a:lnR>
-                    <a:lnT w="9525" cap="flat" cmpd="sng" algn="ctr">
-                      <a:solidFill>
-                        <a:srgbClr val="D6D6D6"/>
-                      </a:solidFill>
-                      <a:prstDash val="solid"/>
-                      <a:round/>
-                      <a:headEnd type="none" w="med" len="med"/>
-                      <a:tailEnd type="none" w="med" len="med"/>
-                    </a:lnT>
-                    <a:lnB w="9525" cap="flat" cmpd="sng" algn="ctr">
-                      <a:solidFill>
-                        <a:srgbClr val="D6D6D6"/>
-                      </a:solidFill>
-                      <a:prstDash val="solid"/>
-                      <a:round/>
-                      <a:headEnd type="none" w="med" len="med"/>
-                      <a:tailEnd type="none" w="med" len="med"/>
-                    </a:lnB>
-                    <a:noFill/>
-                  </a:tcPr>
-                </a:tc>
-                <a:tc>
-                  <a:txBody>
-                    <a:bodyPr/>
-                    <a:lstStyle/>
-                    <a:p>
-                      <a:pPr algn="l"/>
-                      <a:r>
-                        <a:rPr sz="800" b="0">
-                          <a:solidFill>
-                            <a:srgbClr val="3D3C3A"/>
-                          </a:solidFill>
-                          <a:latin typeface="微软雅黑"/>
-                          <a:ea typeface="微软雅黑"/>
-                        </a:rPr>
-                        <a:t>是</a:t>
-                      </a:r>
-                    </a:p>
-                  </a:txBody>
-                  <a:tcPr marL="27432" marR="27432" marT="9144" marB="9144">
-                    <a:lnL>
-                      <a:noFill/>
-                    </a:lnL>
-                    <a:lnR>
-                      <a:noFill/>
-                    </a:lnR>
-                    <a:lnT w="9525" cap="flat" cmpd="sng" algn="ctr">
-                      <a:solidFill>
-                        <a:srgbClr val="D6D6D6"/>
-                      </a:solidFill>
-                      <a:prstDash val="solid"/>
-                      <a:round/>
-                      <a:headEnd type="none" w="med" len="med"/>
-                      <a:tailEnd type="none" w="med" len="med"/>
-                    </a:lnT>
-                    <a:lnB w="9525" cap="flat" cmpd="sng" algn="ctr">
-                      <a:solidFill>
-                        <a:srgbClr val="D6D6D6"/>
-                      </a:solidFill>
-                      <a:prstDash val="solid"/>
-                      <a:round/>
-                      <a:headEnd type="none" w="med" len="med"/>
-                      <a:tailEnd type="none" w="med" len="med"/>
-                    </a:lnB>
-                    <a:noFill/>
-                  </a:tcPr>
-                </a:tc>
-                <a:extLst>
-                  <a:ext uri="{0D108BD9-81ED-4DB2-BD59-A6C34878D82A}">
-                    <a16:rowId xmlns:a16="http://schemas.microsoft.com/office/drawing/2014/main" val="4265397341"/>
-                  </a:ext>
-                </a:extLst>
-              </a:tr>
-              <a:tr h="190500">
-                <a:tc>
-                  <a:txBody>
-                    <a:bodyPr/>
-                    <a:lstStyle/>
-                    <a:p>
-                      <a:pPr algn="l"/>
-                      <a:r>
-                        <a:rPr sz="800" b="0">
-                          <a:solidFill>
-                            <a:srgbClr val="3D3C3A"/>
-                          </a:solidFill>
-                          <a:latin typeface="微软雅黑"/>
-                          <a:ea typeface="微软雅黑"/>
-                        </a:rPr>
-                        <a:t>是否持续还款</a:t>
-                      </a:r>
-                    </a:p>
-                  </a:txBody>
-                  <a:tcPr marL="27432" marR="27432" marT="9144" marB="9144">
-                    <a:lnL>
-                      <a:noFill/>
-                    </a:lnL>
-                    <a:lnR>
-                      <a:noFill/>
-                    </a:lnR>
-                    <a:lnT w="9525" cap="flat" cmpd="sng" algn="ctr">
-                      <a:solidFill>
-                        <a:srgbClr val="D6D6D6"/>
-                      </a:solidFill>
-                      <a:prstDash val="solid"/>
-                      <a:round/>
-                      <a:headEnd type="none" w="med" len="med"/>
-                      <a:tailEnd type="none" w="med" len="med"/>
-                    </a:lnT>
-                    <a:lnB w="9525" cap="flat" cmpd="sng" algn="ctr">
-                      <a:solidFill>
-                        <a:srgbClr val="D6D6D6"/>
-                      </a:solidFill>
-                      <a:prstDash val="solid"/>
-                      <a:round/>
-                      <a:headEnd type="none" w="med" len="med"/>
-                      <a:tailEnd type="none" w="med" len="med"/>
-                    </a:lnB>
-                    <a:noFill/>
-                  </a:tcPr>
-                </a:tc>
-                <a:tc>
-                  <a:txBody>
-                    <a:bodyPr/>
-                    <a:lstStyle/>
-                    <a:p>
-                      <a:pPr algn="l"/>
-                      <a:r>
-                        <a:rPr sz="800" b="0" dirty="0">
-                          <a:solidFill>
-                            <a:srgbClr val="3D3C3A"/>
-                          </a:solidFill>
-                          <a:latin typeface="微软雅黑"/>
-                          <a:ea typeface="微软雅黑"/>
-                        </a:rPr>
-                        <a:t>是</a:t>
-                      </a:r>
-                    </a:p>
-                  </a:txBody>
-                  <a:tcPr marL="27432" marR="27432" marT="9144" marB="9144">
-                    <a:lnL>
-                      <a:noFill/>
-                    </a:lnL>
-                    <a:lnR>
-                      <a:noFill/>
-                    </a:lnR>
-                    <a:lnT w="9525" cap="flat" cmpd="sng" algn="ctr">
-                      <a:solidFill>
-                        <a:srgbClr val="D6D6D6"/>
-                      </a:solidFill>
-                      <a:prstDash val="solid"/>
-                      <a:round/>
-                      <a:headEnd type="none" w="med" len="med"/>
-                      <a:tailEnd type="none" w="med" len="med"/>
-                    </a:lnT>
-                    <a:lnB w="9525" cap="flat" cmpd="sng" algn="ctr">
-                      <a:solidFill>
-                        <a:srgbClr val="D6D6D6"/>
-                      </a:solidFill>
-                      <a:prstDash val="solid"/>
-                      <a:round/>
-                      <a:headEnd type="none" w="med" len="med"/>
-                      <a:tailEnd type="none" w="med" len="med"/>
-                    </a:lnB>
-                    <a:noFill/>
-                  </a:tcPr>
-                </a:tc>
-                <a:extLst>
-                  <a:ext uri="{0D108BD9-81ED-4DB2-BD59-A6C34878D82A}">
-                    <a16:rowId xmlns:a16="http://schemas.microsoft.com/office/drawing/2014/main" val="904985901"/>
-                  </a:ext>
-                </a:extLst>
-              </a:tr>
-              <a:tr h="190500">
-                <a:tc>
-                  <a:txBody>
-                    <a:bodyPr/>
-                    <a:lstStyle/>
-                    <a:p>
-                      <a:pPr algn="l"/>
-                      <a:r>
-                        <a:rPr sz="800" b="0" dirty="0" err="1">
-                          <a:solidFill>
-                            <a:srgbClr val="3D3C3A"/>
-                          </a:solidFill>
-                          <a:latin typeface="微软雅黑"/>
-                          <a:ea typeface="微软雅黑"/>
-                        </a:rPr>
-                        <a:t>是否出现还款中断</a:t>
-                      </a:r>
-                      <a:endParaRPr sz="800" b="0" dirty="0">
-                        <a:solidFill>
-                          <a:srgbClr val="3D3C3A"/>
-                        </a:solidFill>
-                        <a:latin typeface="微软雅黑"/>
-                        <a:ea typeface="微软雅黑"/>
-                      </a:endParaRPr>
-                    </a:p>
-                  </a:txBody>
-                  <a:tcPr marL="27432" marR="27432" marT="9144" marB="9144">
-                    <a:lnL>
-                      <a:noFill/>
-                    </a:lnL>
-                    <a:lnR>
-                      <a:noFill/>
-                    </a:lnR>
-                    <a:lnT w="9525" cap="flat" cmpd="sng" algn="ctr">
-                      <a:solidFill>
-                        <a:srgbClr val="D6D6D6"/>
-                      </a:solidFill>
-                      <a:prstDash val="solid"/>
-                      <a:round/>
-                      <a:headEnd type="none" w="med" len="med"/>
-                      <a:tailEnd type="none" w="med" len="med"/>
-                    </a:lnT>
-                    <a:lnB w="9525" cap="flat" cmpd="sng" algn="ctr">
-                      <a:solidFill>
-                        <a:srgbClr val="D6D6D6"/>
-                      </a:solidFill>
-                      <a:prstDash val="solid"/>
-                      <a:round/>
-                      <a:headEnd type="none" w="med" len="med"/>
-                      <a:tailEnd type="none" w="med" len="med"/>
-                    </a:lnB>
-                    <a:noFill/>
-                  </a:tcPr>
-                </a:tc>
-                <a:tc>
-                  <a:txBody>
-                    <a:bodyPr/>
-                    <a:lstStyle/>
-                    <a:p>
-                      <a:pPr algn="l"/>
-                      <a:r>
-                        <a:rPr sz="800" b="0" dirty="0">
-                          <a:solidFill>
-                            <a:srgbClr val="3D3C3A"/>
-                          </a:solidFill>
-                          <a:latin typeface="微软雅黑"/>
-                          <a:ea typeface="微软雅黑"/>
-                        </a:rPr>
-                        <a:t>否</a:t>
-                      </a:r>
-                    </a:p>
-                  </a:txBody>
-                  <a:tcPr marL="27432" marR="27432" marT="9144" marB="9144">
-                    <a:lnL>
-                      <a:noFill/>
-                    </a:lnL>
-                    <a:lnR>
-                      <a:noFill/>
-                    </a:lnR>
-                    <a:lnT w="9525" cap="flat" cmpd="sng" algn="ctr">
-                      <a:solidFill>
-                        <a:srgbClr val="D6D6D6"/>
-                      </a:solidFill>
-                      <a:prstDash val="solid"/>
-                      <a:round/>
-                      <a:headEnd type="none" w="med" len="med"/>
-                      <a:tailEnd type="none" w="med" len="med"/>
-                    </a:lnT>
-                    <a:lnB w="9525" cap="flat" cmpd="sng" algn="ctr">
-                      <a:solidFill>
-                        <a:srgbClr val="D6D6D6"/>
-                      </a:solidFill>
-                      <a:prstDash val="solid"/>
-                      <a:round/>
-                      <a:headEnd type="none" w="med" len="med"/>
-                      <a:tailEnd type="none" w="med" len="med"/>
-                    </a:lnB>
-                    <a:noFill/>
-                  </a:tcPr>
-                </a:tc>
-                <a:extLst>
-                  <a:ext uri="{0D108BD9-81ED-4DB2-BD59-A6C34878D82A}">
-                    <a16:rowId xmlns:a16="http://schemas.microsoft.com/office/drawing/2014/main" val="2642863822"/>
-                  </a:ext>
-                </a:extLst>
-              </a:tr>
-            </a:tbl>
-          </a:graphicData>
-        </a:graphic>
-      </p:graphicFrame>
-      <p:graphicFrame>
-        <p:nvGraphicFramePr>
-          <p:cNvPr id="18" name="income-table">
-            <a:extLst>
-              <a:ext uri="{FF2B5EF4-FFF2-40B4-BE49-F238E27FC236}">
-                <a16:creationId xmlns:a16="http://schemas.microsoft.com/office/drawing/2014/main" id="{0131C662-720B-4BDB-BAEC-1EB37B53731C}"/>
-              </a:ext>
-            </a:extLst>
-          </p:cNvPr>
-          <p:cNvGraphicFramePr>
-            <a:graphicFrameLocks noGrp="1"/>
-          </p:cNvGraphicFramePr>
-          <p:nvPr>
-            <p:extLst>
-              <p:ext uri="{D42A27DB-BD31-4B8C-83A1-F6EECF244321}">
-                <p14:modId xmlns:p14="http://schemas.microsoft.com/office/powerpoint/2010/main" val="2975090616"/>
-              </p:ext>
-            </p:extLst>
-          </p:nvPr>
-        </p:nvGraphicFramePr>
-        <p:xfrm>
-          <a:off x="7374542" y="4380696"/>
-          <a:ext cx="3127663" cy="2082800"/>
-        </p:xfrm>
-        <a:graphic>
-          <a:graphicData uri="http://schemas.openxmlformats.org/drawingml/2006/table">
-            <a:tbl>
-              <a:tblPr/>
-              <a:tblGrid>
-                <a:gridCol w="1252461">
-                  <a:extLst>
-                    <a:ext uri="{9D8B030D-6E8A-4147-A177-3AD203B41FA5}">
-                      <a16:colId xmlns:a16="http://schemas.microsoft.com/office/drawing/2014/main" val="20000"/>
-                    </a:ext>
-                  </a:extLst>
-                </a:gridCol>
-                <a:gridCol w="1875202">
-                  <a:extLst>
-                    <a:ext uri="{9D8B030D-6E8A-4147-A177-3AD203B41FA5}">
-                      <a16:colId xmlns:a16="http://schemas.microsoft.com/office/drawing/2014/main" val="20001"/>
-                    </a:ext>
-                  </a:extLst>
-                </a:gridCol>
-              </a:tblGrid>
-              <a:tr h="177800">
-                <a:tc>
-                  <a:txBody>
-                    <a:bodyPr/>
-                    <a:lstStyle/>
-                    <a:p>
-                      <a:pPr algn="l"/>
-                      <a:r>
-                        <a:rPr sz="800" b="1" dirty="0" err="1">
-                          <a:solidFill>
-                            <a:srgbClr val="0A0A0A"/>
-                          </a:solidFill>
-                          <a:latin typeface="微软雅黑"/>
-                          <a:ea typeface="微软雅黑"/>
-                        </a:rPr>
-                        <a:t>指标</a:t>
-                      </a:r>
-                      <a:endParaRPr sz="800" b="1" dirty="0">
-                        <a:solidFill>
-                          <a:srgbClr val="0A0A0A"/>
-                        </a:solidFill>
-                        <a:latin typeface="微软雅黑"/>
-                        <a:ea typeface="微软雅黑"/>
-                      </a:endParaRPr>
-                    </a:p>
-                  </a:txBody>
-                  <a:tcPr marL="27432" marR="27432" marT="9144" marB="9144">
-                    <a:lnL>
-                      <a:noFill/>
-                    </a:lnL>
-                    <a:lnR>
-                      <a:noFill/>
-                    </a:lnR>
-                    <a:lnT>
-                      <a:noFill/>
-                    </a:lnT>
-                    <a:lnB w="19050">
-                      <a:solidFill>
-                        <a:srgbClr val="0A0A0A"/>
-                      </a:solidFill>
-                    </a:lnB>
-                    <a:noFill/>
-                  </a:tcPr>
-                </a:tc>
-                <a:tc>
-                  <a:txBody>
-                    <a:bodyPr/>
-                    <a:lstStyle/>
-                    <a:p>
-                      <a:pPr algn="l"/>
-                      <a:r>
-                        <a:rPr sz="800" b="1" dirty="0">
-                          <a:solidFill>
-                            <a:srgbClr val="0A0A0A"/>
-                          </a:solidFill>
-                          <a:latin typeface="微软雅黑"/>
-                          <a:ea typeface="微软雅黑"/>
-                        </a:rPr>
-                        <a:t>Fair Go Finance</a:t>
-                      </a:r>
-                    </a:p>
-                  </a:txBody>
-                  <a:tcPr marL="27432" marR="27432" marT="9144" marB="9144">
-                    <a:lnL>
-                      <a:noFill/>
-                    </a:lnL>
-                    <a:lnR>
-                      <a:noFill/>
-                    </a:lnR>
-                    <a:lnT>
-                      <a:noFill/>
-                    </a:lnT>
-                    <a:lnB w="19050">
-                      <a:solidFill>
-                        <a:srgbClr val="0A0A0A"/>
-                      </a:solidFill>
-                    </a:lnB>
-                    <a:noFill/>
-                  </a:tcPr>
-                </a:tc>
-                <a:extLst>
-                  <a:ext uri="{0D108BD9-81ED-4DB2-BD59-A6C34878D82A}">
-                    <a16:rowId xmlns:a16="http://schemas.microsoft.com/office/drawing/2014/main" val="10000"/>
-                  </a:ext>
-                </a:extLst>
-              </a:tr>
-              <a:tr h="190500">
-                <a:tc>
-                  <a:txBody>
-                    <a:bodyPr/>
-                    <a:lstStyle/>
-                    <a:p>
-                      <a:pPr algn="l"/>
-                      <a:r>
-                        <a:rPr sz="800" b="0">
-                          <a:solidFill>
-                            <a:srgbClr val="3D3C3A"/>
-                          </a:solidFill>
-                          <a:latin typeface="微软雅黑"/>
-                          <a:ea typeface="微软雅黑"/>
-                        </a:rPr>
-                        <a:t>贷款类型</a:t>
-                      </a:r>
-                    </a:p>
-                  </a:txBody>
-                  <a:tcPr marL="27432" marR="27432" marT="9144" marB="9144">
-                    <a:lnL>
-                      <a:noFill/>
-                    </a:lnL>
-                    <a:lnR>
-                      <a:noFill/>
-                    </a:lnR>
-                    <a:lnT w="19050" cap="flat" cmpd="sng" algn="ctr">
-                      <a:solidFill>
-                        <a:srgbClr val="0A0A0A"/>
-                      </a:solidFill>
-                      <a:prstDash val="solid"/>
-                      <a:round/>
-                      <a:headEnd type="none" w="med" len="med"/>
-                      <a:tailEnd type="none" w="med" len="med"/>
-                    </a:lnT>
-                    <a:lnB w="9525">
-                      <a:solidFill>
-                        <a:srgbClr val="D6D6D6"/>
-                      </a:solidFill>
-                    </a:lnB>
-                    <a:noFill/>
-                  </a:tcPr>
-                </a:tc>
-                <a:tc>
-                  <a:txBody>
-                    <a:bodyPr/>
-                    <a:lstStyle/>
-                    <a:p>
-                      <a:pPr algn="l"/>
-                      <a:r>
-                        <a:rPr sz="800" b="0">
-                          <a:solidFill>
-                            <a:srgbClr val="3D3C3A"/>
-                          </a:solidFill>
-                          <a:latin typeface="微软雅黑"/>
-                          <a:ea typeface="微软雅黑"/>
-                        </a:rPr>
-                        <a:t>SACC</a:t>
-                      </a:r>
-                    </a:p>
-                  </a:txBody>
-                  <a:tcPr marL="27432" marR="27432" marT="9144" marB="9144">
-                    <a:lnL>
-                      <a:noFill/>
-                    </a:lnL>
-                    <a:lnR>
-                      <a:noFill/>
-                    </a:lnR>
-                    <a:lnT w="19050" cap="flat" cmpd="sng" algn="ctr">
-                      <a:solidFill>
-                        <a:srgbClr val="0A0A0A"/>
-                      </a:solidFill>
-                      <a:prstDash val="solid"/>
-                      <a:round/>
-                      <a:headEnd type="none" w="med" len="med"/>
-                      <a:tailEnd type="none" w="med" len="med"/>
-                    </a:lnT>
-                    <a:lnB w="9525">
-                      <a:solidFill>
-                        <a:srgbClr val="D6D6D6"/>
-                      </a:solidFill>
-                    </a:lnB>
-                    <a:noFill/>
-                  </a:tcPr>
-                </a:tc>
-                <a:extLst>
-                  <a:ext uri="{0D108BD9-81ED-4DB2-BD59-A6C34878D82A}">
-                    <a16:rowId xmlns:a16="http://schemas.microsoft.com/office/drawing/2014/main" val="10001"/>
-                  </a:ext>
-                </a:extLst>
-              </a:tr>
-              <a:tr h="190500">
-                <a:tc>
-                  <a:txBody>
-                    <a:bodyPr/>
-                    <a:lstStyle/>
-                    <a:p>
-                      <a:pPr algn="l"/>
-                      <a:r>
-                        <a:rPr sz="800" b="0" dirty="0" err="1">
-                          <a:solidFill>
-                            <a:srgbClr val="3D3C3A"/>
-                          </a:solidFill>
-                          <a:latin typeface="微软雅黑"/>
-                          <a:ea typeface="微软雅黑"/>
-                        </a:rPr>
-                        <a:t>借款金额</a:t>
-                      </a:r>
-                      <a:endParaRPr sz="800" b="0" dirty="0">
-                        <a:solidFill>
-                          <a:srgbClr val="3D3C3A"/>
-                        </a:solidFill>
-                        <a:latin typeface="微软雅黑"/>
-                        <a:ea typeface="微软雅黑"/>
-                      </a:endParaRPr>
-                    </a:p>
-                  </a:txBody>
-                  <a:tcPr marL="27432" marR="27432" marT="9144" marB="9144">
-                    <a:lnL>
-                      <a:noFill/>
-                    </a:lnL>
-                    <a:lnR>
-                      <a:noFill/>
-                    </a:lnR>
-                    <a:lnT w="9525" cap="flat" cmpd="sng" algn="ctr">
-                      <a:solidFill>
-                        <a:srgbClr val="D6D6D6"/>
-                      </a:solidFill>
-                      <a:prstDash val="solid"/>
-                      <a:round/>
-                      <a:headEnd type="none" w="med" len="med"/>
-                      <a:tailEnd type="none" w="med" len="med"/>
-                    </a:lnT>
-                    <a:lnB w="9525">
-                      <a:solidFill>
-                        <a:srgbClr val="D6D6D6"/>
-                      </a:solidFill>
-                    </a:lnB>
-                    <a:noFill/>
-                  </a:tcPr>
-                </a:tc>
-                <a:tc>
-                  <a:txBody>
-                    <a:bodyPr/>
-                    <a:lstStyle/>
-                    <a:p>
-                      <a:pPr algn="l"/>
-                      <a:r>
-                        <a:rPr sz="800" b="0">
-                          <a:solidFill>
-                            <a:srgbClr val="3D3C3A"/>
-                          </a:solidFill>
-                          <a:latin typeface="微软雅黑"/>
-                          <a:ea typeface="微软雅黑"/>
-                        </a:rPr>
-                        <a:t>A$1,500</a:t>
-                      </a:r>
-                    </a:p>
-                  </a:txBody>
-                  <a:tcPr marL="27432" marR="27432" marT="9144" marB="9144">
-                    <a:lnL>
-                      <a:noFill/>
-                    </a:lnL>
-                    <a:lnR>
-                      <a:noFill/>
-                    </a:lnR>
-                    <a:lnT w="9525" cap="flat" cmpd="sng" algn="ctr">
-                      <a:solidFill>
-                        <a:srgbClr val="D6D6D6"/>
-                      </a:solidFill>
-                      <a:prstDash val="solid"/>
-                      <a:round/>
-                      <a:headEnd type="none" w="med" len="med"/>
-                      <a:tailEnd type="none" w="med" len="med"/>
-                    </a:lnT>
-                    <a:lnB w="9525">
-                      <a:solidFill>
-                        <a:srgbClr val="D6D6D6"/>
-                      </a:solidFill>
-                    </a:lnB>
-                    <a:noFill/>
-                  </a:tcPr>
-                </a:tc>
-                <a:extLst>
-                  <a:ext uri="{0D108BD9-81ED-4DB2-BD59-A6C34878D82A}">
-                    <a16:rowId xmlns:a16="http://schemas.microsoft.com/office/drawing/2014/main" val="10002"/>
-                  </a:ext>
-                </a:extLst>
-              </a:tr>
-              <a:tr h="190500">
-                <a:tc>
-                  <a:txBody>
-                    <a:bodyPr/>
-                    <a:lstStyle/>
-                    <a:p>
-                      <a:pPr algn="l"/>
-                      <a:r>
-                        <a:rPr sz="800" b="0" dirty="0">
-                          <a:solidFill>
-                            <a:srgbClr val="3D3C3A"/>
-                          </a:solidFill>
-                          <a:latin typeface="微软雅黑"/>
-                          <a:ea typeface="微软雅黑"/>
-                        </a:rPr>
-                        <a:t>90 </a:t>
-                      </a:r>
-                      <a:r>
-                        <a:rPr sz="800" b="0" dirty="0" err="1">
-                          <a:solidFill>
-                            <a:srgbClr val="3D3C3A"/>
-                          </a:solidFill>
-                          <a:latin typeface="微软雅黑"/>
-                          <a:ea typeface="微软雅黑"/>
-                        </a:rPr>
-                        <a:t>天已还金额</a:t>
-                      </a:r>
-                      <a:endParaRPr sz="800" b="0" dirty="0">
-                        <a:solidFill>
-                          <a:srgbClr val="3D3C3A"/>
-                        </a:solidFill>
-                        <a:latin typeface="微软雅黑"/>
-                        <a:ea typeface="微软雅黑"/>
-                      </a:endParaRPr>
-                    </a:p>
-                  </a:txBody>
-                  <a:tcPr marL="27432" marR="27432" marT="9144" marB="9144">
-                    <a:lnL>
-                      <a:noFill/>
-                    </a:lnL>
-                    <a:lnR>
-                      <a:noFill/>
-                    </a:lnR>
-                    <a:lnT w="9525" cap="flat" cmpd="sng" algn="ctr">
-                      <a:solidFill>
-                        <a:srgbClr val="D6D6D6"/>
-                      </a:solidFill>
-                      <a:prstDash val="solid"/>
-                      <a:round/>
-                      <a:headEnd type="none" w="med" len="med"/>
-                      <a:tailEnd type="none" w="med" len="med"/>
-                    </a:lnT>
-                    <a:lnB w="9525">
-                      <a:solidFill>
-                        <a:srgbClr val="D6D6D6"/>
-                      </a:solidFill>
-                    </a:lnB>
-                    <a:noFill/>
-                  </a:tcPr>
-                </a:tc>
-                <a:tc>
-                  <a:txBody>
-                    <a:bodyPr/>
-                    <a:lstStyle/>
-                    <a:p>
-                      <a:pPr algn="l"/>
-                      <a:r>
-                        <a:rPr sz="800" b="0">
-                          <a:solidFill>
-                            <a:srgbClr val="3D3C3A"/>
-                          </a:solidFill>
-                          <a:latin typeface="微软雅黑"/>
-                          <a:ea typeface="微软雅黑"/>
-                        </a:rPr>
-                        <a:t>A$936</a:t>
-                      </a:r>
-                    </a:p>
-                  </a:txBody>
-                  <a:tcPr marL="27432" marR="27432" marT="9144" marB="9144">
-                    <a:lnL>
-                      <a:noFill/>
-                    </a:lnL>
-                    <a:lnR>
-                      <a:noFill/>
-                    </a:lnR>
-                    <a:lnT w="9525" cap="flat" cmpd="sng" algn="ctr">
-                      <a:solidFill>
-                        <a:srgbClr val="D6D6D6"/>
-                      </a:solidFill>
-                      <a:prstDash val="solid"/>
-                      <a:round/>
-                      <a:headEnd type="none" w="med" len="med"/>
-                      <a:tailEnd type="none" w="med" len="med"/>
-                    </a:lnT>
-                    <a:lnB w="9525">
-                      <a:solidFill>
-                        <a:srgbClr val="D6D6D6"/>
-                      </a:solidFill>
-                    </a:lnB>
-                    <a:noFill/>
-                  </a:tcPr>
-                </a:tc>
-                <a:extLst>
-                  <a:ext uri="{0D108BD9-81ED-4DB2-BD59-A6C34878D82A}">
-                    <a16:rowId xmlns:a16="http://schemas.microsoft.com/office/drawing/2014/main" val="10003"/>
-                  </a:ext>
-                </a:extLst>
-              </a:tr>
-              <a:tr h="190500">
-                <a:tc>
-                  <a:txBody>
-                    <a:bodyPr/>
-                    <a:lstStyle/>
-                    <a:p>
-                      <a:pPr algn="l"/>
-                      <a:r>
-                        <a:rPr sz="800" b="0">
-                          <a:solidFill>
-                            <a:srgbClr val="3D3C3A"/>
-                          </a:solidFill>
-                          <a:latin typeface="微软雅黑"/>
-                          <a:ea typeface="微软雅黑"/>
-                        </a:rPr>
-                        <a:t>预计待还金额</a:t>
-                      </a:r>
-                    </a:p>
-                  </a:txBody>
-                  <a:tcPr marL="27432" marR="27432" marT="9144" marB="9144">
-                    <a:lnL>
-                      <a:noFill/>
-                    </a:lnL>
-                    <a:lnR>
-                      <a:noFill/>
-                    </a:lnR>
-                    <a:lnT w="9525" cap="flat" cmpd="sng" algn="ctr">
-                      <a:solidFill>
-                        <a:srgbClr val="D6D6D6"/>
-                      </a:solidFill>
-                      <a:prstDash val="solid"/>
-                      <a:round/>
-                      <a:headEnd type="none" w="med" len="med"/>
-                      <a:tailEnd type="none" w="med" len="med"/>
-                    </a:lnT>
-                    <a:lnB w="9525" cap="flat" cmpd="sng" algn="ctr">
-                      <a:solidFill>
-                        <a:srgbClr val="D6D6D6"/>
-                      </a:solidFill>
-                      <a:prstDash val="solid"/>
-                      <a:round/>
-                      <a:headEnd type="none" w="med" len="med"/>
-                      <a:tailEnd type="none" w="med" len="med"/>
-                    </a:lnB>
-                    <a:noFill/>
-                  </a:tcPr>
-                </a:tc>
-                <a:tc>
-                  <a:txBody>
-                    <a:bodyPr/>
-                    <a:lstStyle/>
-                    <a:p>
-                      <a:pPr algn="l"/>
-                      <a:r>
-                        <a:rPr sz="800" b="0">
-                          <a:solidFill>
-                            <a:srgbClr val="3D3C3A"/>
-                          </a:solidFill>
-                          <a:latin typeface="微软雅黑"/>
-                          <a:ea typeface="微软雅黑"/>
-                        </a:rPr>
-                        <a:t>A$564</a:t>
-                      </a:r>
-                    </a:p>
-                  </a:txBody>
-                  <a:tcPr marL="27432" marR="27432" marT="9144" marB="9144">
-                    <a:lnL>
-                      <a:noFill/>
-                    </a:lnL>
-                    <a:lnR>
-                      <a:noFill/>
-                    </a:lnR>
-                    <a:lnT w="9525" cap="flat" cmpd="sng" algn="ctr">
-                      <a:solidFill>
-                        <a:srgbClr val="D6D6D6"/>
-                      </a:solidFill>
-                      <a:prstDash val="solid"/>
-                      <a:round/>
-                      <a:headEnd type="none" w="med" len="med"/>
-                      <a:tailEnd type="none" w="med" len="med"/>
-                    </a:lnT>
-                    <a:lnB w="9525" cap="flat" cmpd="sng" algn="ctr">
-                      <a:solidFill>
-                        <a:srgbClr val="D6D6D6"/>
-                      </a:solidFill>
-                      <a:prstDash val="solid"/>
-                      <a:round/>
-                      <a:headEnd type="none" w="med" len="med"/>
-                      <a:tailEnd type="none" w="med" len="med"/>
-                    </a:lnB>
-                    <a:noFill/>
-                  </a:tcPr>
-                </a:tc>
-                <a:extLst>
-                  <a:ext uri="{0D108BD9-81ED-4DB2-BD59-A6C34878D82A}">
-                    <a16:rowId xmlns:a16="http://schemas.microsoft.com/office/drawing/2014/main" val="10004"/>
-                  </a:ext>
-                </a:extLst>
-              </a:tr>
-              <a:tr h="190500">
-                <a:tc>
-                  <a:txBody>
-                    <a:bodyPr/>
-                    <a:lstStyle/>
-                    <a:p>
-                      <a:pPr algn="l"/>
-                      <a:r>
-                        <a:rPr sz="800" b="0">
-                          <a:solidFill>
-                            <a:srgbClr val="3D3C3A"/>
-                          </a:solidFill>
-                          <a:latin typeface="微软雅黑"/>
-                          <a:ea typeface="微软雅黑"/>
-                        </a:rPr>
-                        <a:t>还款频率</a:t>
-                      </a:r>
-                    </a:p>
-                  </a:txBody>
-                  <a:tcPr marL="27432" marR="27432" marT="9144" marB="9144">
-                    <a:lnL>
-                      <a:noFill/>
-                    </a:lnL>
-                    <a:lnR>
-                      <a:noFill/>
-                    </a:lnR>
-                    <a:lnT w="9525" cap="flat" cmpd="sng" algn="ctr">
-                      <a:solidFill>
-                        <a:srgbClr val="D6D6D6"/>
-                      </a:solidFill>
-                      <a:prstDash val="solid"/>
-                      <a:round/>
-                      <a:headEnd type="none" w="med" len="med"/>
-                      <a:tailEnd type="none" w="med" len="med"/>
-                    </a:lnT>
-                    <a:lnB w="9525" cap="flat" cmpd="sng" algn="ctr">
-                      <a:solidFill>
-                        <a:srgbClr val="D6D6D6"/>
-                      </a:solidFill>
-                      <a:prstDash val="solid"/>
-                      <a:round/>
-                      <a:headEnd type="none" w="med" len="med"/>
-                      <a:tailEnd type="none" w="med" len="med"/>
-                    </a:lnB>
-                    <a:noFill/>
-                  </a:tcPr>
-                </a:tc>
-                <a:tc>
-                  <a:txBody>
-                    <a:bodyPr/>
-                    <a:lstStyle/>
-                    <a:p>
-                      <a:pPr algn="l"/>
-                      <a:r>
-                        <a:rPr sz="800" b="0">
-                          <a:solidFill>
-                            <a:srgbClr val="3D3C3A"/>
-                          </a:solidFill>
-                          <a:latin typeface="微软雅黑"/>
-                          <a:ea typeface="微软雅黑"/>
-                        </a:rPr>
-                        <a:t>每两周 A$156</a:t>
-                      </a:r>
-                    </a:p>
-                  </a:txBody>
-                  <a:tcPr marL="27432" marR="27432" marT="9144" marB="9144">
-                    <a:lnL>
-                      <a:noFill/>
-                    </a:lnL>
-                    <a:lnR>
-                      <a:noFill/>
-                    </a:lnR>
-                    <a:lnT w="9525" cap="flat" cmpd="sng" algn="ctr">
-                      <a:solidFill>
-                        <a:srgbClr val="D6D6D6"/>
-                      </a:solidFill>
-                      <a:prstDash val="solid"/>
-                      <a:round/>
-                      <a:headEnd type="none" w="med" len="med"/>
-                      <a:tailEnd type="none" w="med" len="med"/>
-                    </a:lnT>
-                    <a:lnB w="9525" cap="flat" cmpd="sng" algn="ctr">
-                      <a:solidFill>
-                        <a:srgbClr val="D6D6D6"/>
-                      </a:solidFill>
-                      <a:prstDash val="solid"/>
-                      <a:round/>
-                      <a:headEnd type="none" w="med" len="med"/>
-                      <a:tailEnd type="none" w="med" len="med"/>
-                    </a:lnB>
-                    <a:noFill/>
-                  </a:tcPr>
-                </a:tc>
-                <a:extLst>
-                  <a:ext uri="{0D108BD9-81ED-4DB2-BD59-A6C34878D82A}">
-                    <a16:rowId xmlns:a16="http://schemas.microsoft.com/office/drawing/2014/main" val="2025723682"/>
-                  </a:ext>
-                </a:extLst>
-              </a:tr>
-              <a:tr h="190500">
-                <a:tc>
-                  <a:txBody>
-                    <a:bodyPr/>
-                    <a:lstStyle/>
-                    <a:p>
-                      <a:pPr algn="l"/>
-                      <a:r>
-                        <a:rPr sz="800" b="0" dirty="0" err="1">
-                          <a:solidFill>
-                            <a:srgbClr val="3D3C3A"/>
-                          </a:solidFill>
-                          <a:latin typeface="微软雅黑"/>
-                          <a:ea typeface="微软雅黑"/>
-                        </a:rPr>
-                        <a:t>月还款金额</a:t>
-                      </a:r>
-                      <a:endParaRPr sz="800" b="0" dirty="0">
-                        <a:solidFill>
-                          <a:srgbClr val="3D3C3A"/>
-                        </a:solidFill>
-                        <a:latin typeface="微软雅黑"/>
-                        <a:ea typeface="微软雅黑"/>
-                      </a:endParaRPr>
-                    </a:p>
-                  </a:txBody>
-                  <a:tcPr marL="27432" marR="27432" marT="9144" marB="9144">
-                    <a:lnL>
-                      <a:noFill/>
-                    </a:lnL>
-                    <a:lnR>
-                      <a:noFill/>
-                    </a:lnR>
-                    <a:lnT w="9525" cap="flat" cmpd="sng" algn="ctr">
-                      <a:solidFill>
-                        <a:srgbClr val="D6D6D6"/>
-                      </a:solidFill>
-                      <a:prstDash val="solid"/>
-                      <a:round/>
-                      <a:headEnd type="none" w="med" len="med"/>
-                      <a:tailEnd type="none" w="med" len="med"/>
-                    </a:lnT>
-                    <a:lnB w="9525" cap="flat" cmpd="sng" algn="ctr">
-                      <a:solidFill>
-                        <a:srgbClr val="D6D6D6"/>
-                      </a:solidFill>
-                      <a:prstDash val="solid"/>
-                      <a:round/>
-                      <a:headEnd type="none" w="med" len="med"/>
-                      <a:tailEnd type="none" w="med" len="med"/>
-                    </a:lnB>
-                    <a:noFill/>
-                  </a:tcPr>
-                </a:tc>
-                <a:tc>
-                  <a:txBody>
-                    <a:bodyPr/>
-                    <a:lstStyle/>
-                    <a:p>
-                      <a:pPr algn="l"/>
-                      <a:r>
-                        <a:rPr sz="800" b="0">
-                          <a:solidFill>
-                            <a:srgbClr val="3D3C3A"/>
-                          </a:solidFill>
-                          <a:latin typeface="微软雅黑"/>
-                          <a:ea typeface="微软雅黑"/>
-                        </a:rPr>
-                        <a:t>约 A$338（A$156 × 26/12）</a:t>
-                      </a:r>
-                    </a:p>
-                  </a:txBody>
-                  <a:tcPr marL="27432" marR="27432" marT="9144" marB="9144">
-                    <a:lnL>
-                      <a:noFill/>
-                    </a:lnL>
-                    <a:lnR>
-                      <a:noFill/>
-                    </a:lnR>
-                    <a:lnT w="9525" cap="flat" cmpd="sng" algn="ctr">
-                      <a:solidFill>
-                        <a:srgbClr val="D6D6D6"/>
-                      </a:solidFill>
-                      <a:prstDash val="solid"/>
-                      <a:round/>
-                      <a:headEnd type="none" w="med" len="med"/>
-                      <a:tailEnd type="none" w="med" len="med"/>
-                    </a:lnT>
-                    <a:lnB w="9525" cap="flat" cmpd="sng" algn="ctr">
-                      <a:solidFill>
-                        <a:srgbClr val="D6D6D6"/>
-                      </a:solidFill>
-                      <a:prstDash val="solid"/>
-                      <a:round/>
-                      <a:headEnd type="none" w="med" len="med"/>
-                      <a:tailEnd type="none" w="med" len="med"/>
-                    </a:lnB>
-                    <a:noFill/>
-                  </a:tcPr>
-                </a:tc>
-                <a:extLst>
-                  <a:ext uri="{0D108BD9-81ED-4DB2-BD59-A6C34878D82A}">
-                    <a16:rowId xmlns:a16="http://schemas.microsoft.com/office/drawing/2014/main" val="4019927453"/>
-                  </a:ext>
-                </a:extLst>
-              </a:tr>
-              <a:tr h="190500">
-                <a:tc>
-                  <a:txBody>
-                    <a:bodyPr/>
-                    <a:lstStyle/>
-                    <a:p>
-                      <a:pPr algn="l"/>
-                      <a:r>
-                        <a:rPr sz="800" b="0" dirty="0">
-                          <a:solidFill>
-                            <a:srgbClr val="3D3C3A"/>
-                          </a:solidFill>
-                          <a:latin typeface="微软雅黑"/>
-                          <a:ea typeface="微软雅黑"/>
-                        </a:rPr>
-                        <a:t>90 </a:t>
-                      </a:r>
-                      <a:r>
-                        <a:rPr sz="800" b="0" dirty="0" err="1">
-                          <a:solidFill>
-                            <a:srgbClr val="3D3C3A"/>
-                          </a:solidFill>
-                          <a:latin typeface="微软雅黑"/>
-                          <a:ea typeface="微软雅黑"/>
-                        </a:rPr>
-                        <a:t>天还款次数</a:t>
-                      </a:r>
-                      <a:endParaRPr sz="800" b="0" dirty="0">
-                        <a:solidFill>
-                          <a:srgbClr val="3D3C3A"/>
-                        </a:solidFill>
-                        <a:latin typeface="微软雅黑"/>
-                        <a:ea typeface="微软雅黑"/>
-                      </a:endParaRPr>
-                    </a:p>
-                  </a:txBody>
-                  <a:tcPr marL="27432" marR="27432" marT="9144" marB="9144">
-                    <a:lnL>
-                      <a:noFill/>
-                    </a:lnL>
-                    <a:lnR>
-                      <a:noFill/>
-                    </a:lnR>
-                    <a:lnT w="9525" cap="flat" cmpd="sng" algn="ctr">
-                      <a:solidFill>
-                        <a:srgbClr val="D6D6D6"/>
-                      </a:solidFill>
-                      <a:prstDash val="solid"/>
-                      <a:round/>
-                      <a:headEnd type="none" w="med" len="med"/>
-                      <a:tailEnd type="none" w="med" len="med"/>
-                    </a:lnT>
-                    <a:lnB w="9525" cap="flat" cmpd="sng" algn="ctr">
-                      <a:solidFill>
-                        <a:srgbClr val="D6D6D6"/>
-                      </a:solidFill>
-                      <a:prstDash val="solid"/>
-                      <a:round/>
-                      <a:headEnd type="none" w="med" len="med"/>
-                      <a:tailEnd type="none" w="med" len="med"/>
-                    </a:lnB>
-                    <a:noFill/>
-                  </a:tcPr>
-                </a:tc>
-                <a:tc>
-                  <a:txBody>
-                    <a:bodyPr/>
-                    <a:lstStyle/>
-                    <a:p>
-                      <a:pPr algn="l"/>
-                      <a:r>
-                        <a:rPr sz="800" b="0" dirty="0">
-                          <a:solidFill>
-                            <a:srgbClr val="3D3C3A"/>
-                          </a:solidFill>
-                          <a:latin typeface="微软雅黑"/>
-                          <a:ea typeface="微软雅黑"/>
-                        </a:rPr>
-                        <a:t>6 次</a:t>
-                      </a:r>
-                    </a:p>
-                  </a:txBody>
-                  <a:tcPr marL="27432" marR="27432" marT="9144" marB="9144">
-                    <a:lnL>
-                      <a:noFill/>
-                    </a:lnL>
-                    <a:lnR>
-                      <a:noFill/>
-                    </a:lnR>
-                    <a:lnT w="9525" cap="flat" cmpd="sng" algn="ctr">
-                      <a:solidFill>
-                        <a:srgbClr val="D6D6D6"/>
-                      </a:solidFill>
-                      <a:prstDash val="solid"/>
-                      <a:round/>
-                      <a:headEnd type="none" w="med" len="med"/>
-                      <a:tailEnd type="none" w="med" len="med"/>
-                    </a:lnT>
-                    <a:lnB w="9525" cap="flat" cmpd="sng" algn="ctr">
-                      <a:solidFill>
-                        <a:srgbClr val="D6D6D6"/>
-                      </a:solidFill>
-                      <a:prstDash val="solid"/>
-                      <a:round/>
-                      <a:headEnd type="none" w="med" len="med"/>
-                      <a:tailEnd type="none" w="med" len="med"/>
-                    </a:lnB>
-                    <a:noFill/>
-                  </a:tcPr>
-                </a:tc>
-                <a:extLst>
-                  <a:ext uri="{0D108BD9-81ED-4DB2-BD59-A6C34878D82A}">
-                    <a16:rowId xmlns:a16="http://schemas.microsoft.com/office/drawing/2014/main" val="4265397341"/>
-                  </a:ext>
-                </a:extLst>
-              </a:tr>
-              <a:tr h="190500">
-                <a:tc>
-                  <a:txBody>
-                    <a:bodyPr/>
-                    <a:lstStyle/>
-                    <a:p>
-                      <a:pPr algn="l"/>
-                      <a:r>
-                        <a:rPr sz="800" b="0" dirty="0" err="1">
-                          <a:solidFill>
-                            <a:srgbClr val="3D3C3A"/>
-                          </a:solidFill>
-                          <a:latin typeface="微软雅黑"/>
-                          <a:ea typeface="微软雅黑"/>
-                        </a:rPr>
-                        <a:t>当前状态</a:t>
-                      </a:r>
-                      <a:endParaRPr sz="800" b="0" dirty="0">
-                        <a:solidFill>
-                          <a:srgbClr val="3D3C3A"/>
-                        </a:solidFill>
-                        <a:latin typeface="微软雅黑"/>
-                        <a:ea typeface="微软雅黑"/>
-                      </a:endParaRPr>
-                    </a:p>
-                  </a:txBody>
-                  <a:tcPr marL="27432" marR="27432" marT="9144" marB="9144">
-                    <a:lnL>
-                      <a:noFill/>
-                    </a:lnL>
-                    <a:lnR>
-                      <a:noFill/>
-                    </a:lnR>
-                    <a:lnT w="9525" cap="flat" cmpd="sng" algn="ctr">
-                      <a:solidFill>
-                        <a:srgbClr val="D6D6D6"/>
-                      </a:solidFill>
-                      <a:prstDash val="solid"/>
-                      <a:round/>
-                      <a:headEnd type="none" w="med" len="med"/>
-                      <a:tailEnd type="none" w="med" len="med"/>
-                    </a:lnT>
-                    <a:lnB w="9525" cap="flat" cmpd="sng" algn="ctr">
-                      <a:solidFill>
-                        <a:srgbClr val="D6D6D6"/>
-                      </a:solidFill>
-                      <a:prstDash val="solid"/>
-                      <a:round/>
-                      <a:headEnd type="none" w="med" len="med"/>
-                      <a:tailEnd type="none" w="med" len="med"/>
-                    </a:lnB>
-                    <a:noFill/>
-                  </a:tcPr>
-                </a:tc>
-                <a:tc>
-                  <a:txBody>
-                    <a:bodyPr/>
-                    <a:lstStyle/>
-                    <a:p>
-                      <a:pPr algn="l"/>
-                      <a:r>
-                        <a:rPr sz="800" b="0">
-                          <a:solidFill>
-                            <a:srgbClr val="3D3C3A"/>
-                          </a:solidFill>
-                          <a:latin typeface="微软雅黑"/>
-                          <a:ea typeface="微软雅黑"/>
-                        </a:rPr>
-                        <a:t>在贷</a:t>
-                      </a:r>
-                    </a:p>
-                  </a:txBody>
-                  <a:tcPr marL="27432" marR="27432" marT="9144" marB="9144">
-                    <a:lnL>
-                      <a:noFill/>
-                    </a:lnL>
-                    <a:lnR>
-                      <a:noFill/>
-                    </a:lnR>
-                    <a:lnT w="9525" cap="flat" cmpd="sng" algn="ctr">
-                      <a:solidFill>
-                        <a:srgbClr val="D6D6D6"/>
-                      </a:solidFill>
-                      <a:prstDash val="solid"/>
-                      <a:round/>
-                      <a:headEnd type="none" w="med" len="med"/>
-                      <a:tailEnd type="none" w="med" len="med"/>
-                    </a:lnT>
-                    <a:lnB w="9525" cap="flat" cmpd="sng" algn="ctr">
-                      <a:solidFill>
-                        <a:srgbClr val="D6D6D6"/>
-                      </a:solidFill>
-                      <a:prstDash val="solid"/>
-                      <a:round/>
-                      <a:headEnd type="none" w="med" len="med"/>
-                      <a:tailEnd type="none" w="med" len="med"/>
-                    </a:lnB>
-                    <a:noFill/>
-                  </a:tcPr>
-                </a:tc>
-                <a:extLst>
-                  <a:ext uri="{0D108BD9-81ED-4DB2-BD59-A6C34878D82A}">
-                    <a16:rowId xmlns:a16="http://schemas.microsoft.com/office/drawing/2014/main" val="904985901"/>
-                  </a:ext>
-                </a:extLst>
-              </a:tr>
-              <a:tr h="190500">
-                <a:tc>
-                  <a:txBody>
-                    <a:bodyPr/>
-                    <a:lstStyle/>
-                    <a:p>
-                      <a:pPr algn="l"/>
-                      <a:r>
-                        <a:rPr sz="800" b="0" dirty="0" err="1">
-                          <a:solidFill>
-                            <a:srgbClr val="3D3C3A"/>
-                          </a:solidFill>
-                          <a:latin typeface="微软雅黑"/>
-                          <a:ea typeface="微软雅黑"/>
-                        </a:rPr>
-                        <a:t>扣款失败</a:t>
-                      </a:r>
-                      <a:endParaRPr sz="800" b="0" dirty="0">
-                        <a:solidFill>
-                          <a:srgbClr val="3D3C3A"/>
-                        </a:solidFill>
-                        <a:latin typeface="微软雅黑"/>
-                        <a:ea typeface="微软雅黑"/>
-                      </a:endParaRPr>
-                    </a:p>
-                  </a:txBody>
-                  <a:tcPr marL="27432" marR="27432" marT="9144" marB="9144">
-                    <a:lnL>
-                      <a:noFill/>
-                    </a:lnL>
-                    <a:lnR>
-                      <a:noFill/>
-                    </a:lnR>
-                    <a:lnT w="9525" cap="flat" cmpd="sng" algn="ctr">
-                      <a:solidFill>
-                        <a:srgbClr val="D6D6D6"/>
-                      </a:solidFill>
-                      <a:prstDash val="solid"/>
-                      <a:round/>
-                      <a:headEnd type="none" w="med" len="med"/>
-                      <a:tailEnd type="none" w="med" len="med"/>
-                    </a:lnT>
-                    <a:lnB w="9525" cap="flat" cmpd="sng" algn="ctr">
-                      <a:solidFill>
-                        <a:srgbClr val="D6D6D6"/>
-                      </a:solidFill>
-                      <a:prstDash val="solid"/>
-                      <a:round/>
-                      <a:headEnd type="none" w="med" len="med"/>
-                      <a:tailEnd type="none" w="med" len="med"/>
-                    </a:lnB>
-                    <a:noFill/>
-                  </a:tcPr>
-                </a:tc>
-                <a:tc>
-                  <a:txBody>
-                    <a:bodyPr/>
-                    <a:lstStyle/>
-                    <a:p>
-                      <a:pPr algn="l"/>
-                      <a:r>
-                        <a:rPr sz="800" b="0">
-                          <a:solidFill>
-                            <a:srgbClr val="3D3C3A"/>
-                          </a:solidFill>
-                          <a:latin typeface="微软雅黑"/>
-                          <a:ea typeface="微软雅黑"/>
-                        </a:rPr>
-                        <a:t>否</a:t>
-                      </a:r>
-                    </a:p>
-                  </a:txBody>
-                  <a:tcPr marL="27432" marR="27432" marT="9144" marB="9144">
-                    <a:lnL>
-                      <a:noFill/>
-                    </a:lnL>
-                    <a:lnR>
-                      <a:noFill/>
-                    </a:lnR>
-                    <a:lnT w="9525" cap="flat" cmpd="sng" algn="ctr">
-                      <a:solidFill>
-                        <a:srgbClr val="D6D6D6"/>
-                      </a:solidFill>
-                      <a:prstDash val="solid"/>
-                      <a:round/>
-                      <a:headEnd type="none" w="med" len="med"/>
-                      <a:tailEnd type="none" w="med" len="med"/>
-                    </a:lnT>
-                    <a:lnB w="9525" cap="flat" cmpd="sng" algn="ctr">
-                      <a:solidFill>
-                        <a:srgbClr val="D6D6D6"/>
-                      </a:solidFill>
-                      <a:prstDash val="solid"/>
-                      <a:round/>
-                      <a:headEnd type="none" w="med" len="med"/>
-                      <a:tailEnd type="none" w="med" len="med"/>
-                    </a:lnB>
-                    <a:noFill/>
-                  </a:tcPr>
-                </a:tc>
-                <a:extLst>
-                  <a:ext uri="{0D108BD9-81ED-4DB2-BD59-A6C34878D82A}">
-                    <a16:rowId xmlns:a16="http://schemas.microsoft.com/office/drawing/2014/main" val="2642863822"/>
-                  </a:ext>
-                </a:extLst>
-              </a:tr>
-              <a:tr h="190500">
-                <a:tc>
-                  <a:txBody>
-                    <a:bodyPr/>
-                    <a:lstStyle/>
-                    <a:p>
-                      <a:pPr algn="l"/>
-                      <a:r>
-                        <a:rPr sz="800" b="0">
-                          <a:solidFill>
-                            <a:srgbClr val="3D3C3A"/>
-                          </a:solidFill>
-                          <a:latin typeface="微软雅黑"/>
-                          <a:ea typeface="微软雅黑"/>
-                        </a:rPr>
-                        <a:t>年化利率（APR）</a:t>
-                      </a:r>
-                    </a:p>
-                  </a:txBody>
-                  <a:tcPr marL="27432" marR="27432" marT="9144" marB="9144">
-                    <a:lnL>
-                      <a:noFill/>
-                    </a:lnL>
-                    <a:lnR>
-                      <a:noFill/>
-                    </a:lnR>
-                    <a:lnT w="9525" cap="flat" cmpd="sng" algn="ctr">
-                      <a:solidFill>
-                        <a:srgbClr val="D6D6D6"/>
-                      </a:solidFill>
-                      <a:prstDash val="solid"/>
-                      <a:round/>
-                      <a:headEnd type="none" w="med" len="med"/>
-                      <a:tailEnd type="none" w="med" len="med"/>
-                    </a:lnT>
-                    <a:lnB w="9525" cap="flat" cmpd="sng" algn="ctr">
-                      <a:solidFill>
-                        <a:srgbClr val="D6D6D6"/>
-                      </a:solidFill>
-                      <a:prstDash val="solid"/>
-                      <a:round/>
-                      <a:headEnd type="none" w="med" len="med"/>
-                      <a:tailEnd type="none" w="med" len="med"/>
-                    </a:lnB>
-                    <a:noFill/>
-                  </a:tcPr>
-                </a:tc>
-                <a:tc>
-                  <a:txBody>
-                    <a:bodyPr/>
-                    <a:lstStyle/>
-                    <a:p>
-                      <a:pPr algn="l"/>
-                      <a:r>
-                        <a:rPr sz="800" b="0" dirty="0">
-                          <a:solidFill>
-                            <a:srgbClr val="3D3C3A"/>
-                          </a:solidFill>
-                          <a:latin typeface="微软雅黑"/>
-                          <a:ea typeface="微软雅黑"/>
-                        </a:rPr>
-                        <a:t>【</a:t>
-                      </a:r>
-                      <a:r>
-                        <a:rPr sz="800" b="0" dirty="0" err="1">
-                          <a:solidFill>
-                            <a:srgbClr val="3D3C3A"/>
-                          </a:solidFill>
-                          <a:latin typeface="微软雅黑"/>
-                          <a:ea typeface="微软雅黑"/>
-                        </a:rPr>
-                        <a:t>待补充</a:t>
-                      </a:r>
-                      <a:r>
-                        <a:rPr sz="800" b="0" dirty="0">
-                          <a:solidFill>
-                            <a:srgbClr val="3D3C3A"/>
-                          </a:solidFill>
-                          <a:latin typeface="微软雅黑"/>
-                          <a:ea typeface="微软雅黑"/>
-                        </a:rPr>
-                        <a:t>】</a:t>
-                      </a:r>
-                    </a:p>
-                  </a:txBody>
-                  <a:tcPr marL="27432" marR="27432" marT="9144" marB="9144">
-                    <a:lnL>
-                      <a:noFill/>
-                    </a:lnL>
-                    <a:lnR>
-                      <a:noFill/>
-                    </a:lnR>
-                    <a:lnT w="9525" cap="flat" cmpd="sng" algn="ctr">
-                      <a:solidFill>
-                        <a:srgbClr val="D6D6D6"/>
-                      </a:solidFill>
-                      <a:prstDash val="solid"/>
-                      <a:round/>
-                      <a:headEnd type="none" w="med" len="med"/>
-                      <a:tailEnd type="none" w="med" len="med"/>
-                    </a:lnT>
-                    <a:lnB w="9525" cap="flat" cmpd="sng" algn="ctr">
-                      <a:solidFill>
-                        <a:srgbClr val="D6D6D6"/>
-                      </a:solidFill>
-                      <a:prstDash val="solid"/>
-                      <a:round/>
-                      <a:headEnd type="none" w="med" len="med"/>
-                      <a:tailEnd type="none" w="med" len="med"/>
-                    </a:lnB>
-                    <a:noFill/>
-                  </a:tcPr>
-                </a:tc>
-                <a:extLst>
-                  <a:ext uri="{0D108BD9-81ED-4DB2-BD59-A6C34878D82A}">
-                    <a16:rowId xmlns:a16="http://schemas.microsoft.com/office/drawing/2014/main" val="2976096946"/>
-                  </a:ext>
-                </a:extLst>
-              </a:tr>
-            </a:tbl>
-          </a:graphicData>
-        </a:graphic>
-      </p:graphicFrame>
-      <p:sp>
-        <p:nvSpPr>
-          <p:cNvPr id="7" name="矩形 6">
-            <a:extLst>
-              <a:ext uri="{FF2B5EF4-FFF2-40B4-BE49-F238E27FC236}">
-                <a16:creationId xmlns:a16="http://schemas.microsoft.com/office/drawing/2014/main" id="{1B718013-4527-4C93-A16A-71AD3CA129A4}"/>
-              </a:ext>
-            </a:extLst>
-          </p:cNvPr>
-          <p:cNvSpPr/>
-          <p:nvPr/>
-        </p:nvSpPr>
-        <p:spPr>
-          <a:xfrm>
-            <a:off x="1003046" y="4888696"/>
-            <a:ext cx="384048" cy="1097280"/>
-          </a:xfrm>
-          <a:prstGeom prst="rect">
-            <a:avLst/>
-          </a:prstGeom>
-          <a:solidFill>
-            <a:srgbClr val="E3EBF4"/>
-          </a:solidFill>
-          <a:ln>
-            <a:noFill/>
-          </a:ln>
-        </p:spPr>
-        <p:style>
-          <a:lnRef idx="2">
-            <a:schemeClr val="accent1">
-              <a:shade val="50000"/>
-            </a:schemeClr>
-          </a:lnRef>
-          <a:fillRef idx="1">
-            <a:schemeClr val="accent1"/>
-          </a:fillRef>
-          <a:effectRef idx="0">
-            <a:schemeClr val="accent1"/>
-          </a:effectRef>
-          <a:fontRef idx="minor">
-            <a:schemeClr val="lt1"/>
-          </a:fontRef>
-        </p:style>
-        <p:txBody>
-          <a:bodyPr vert="eaVert" wrap="none" lIns="0" tIns="0" rIns="0" bIns="0" rtlCol="0" anchor="ctr"/>
-          <a:lstStyle/>
-          <a:p>
-            <a:pPr marL="0" marR="0" lvl="0" indent="0" algn="ctr" defTabSz="914400" rtl="0" eaLnBrk="1" fontAlgn="auto" latinLnBrk="0" hangingPunct="1">
-              <a:lnSpc>
-                <a:spcPct val="100000"/>
-              </a:lnSpc>
-              <a:spcBef>
-                <a:spcPts val="0"/>
-              </a:spcBef>
-              <a:spcAft>
-                <a:spcPts val="0"/>
-              </a:spcAft>
-              <a:buClrTx/>
-              <a:buSzTx/>
-              <a:buFontTx/>
-              <a:buNone/>
-              <a:tabLst/>
-              <a:defRPr>
-                <a:latin typeface="微软雅黑"/>
-                <a:ea typeface="微软雅黑"/>
-              </a:defRPr>
-            </a:pPr>
-            <a:r>
-              <a:rPr kumimoji="0" lang="zh-CN" altLang="en-US" sz="1300" b="1" i="0" u="none" strike="noStrike" kern="1200" cap="none" spc="0" normalizeH="0" baseline="0" noProof="0">
-                <a:ln>
-                  <a:noFill/>
-                </a:ln>
-                <a:solidFill>
-                  <a:srgbClr val="0A0A0A"/>
-                </a:solidFill>
-                <a:effectLst/>
-                <a:uLnTx/>
-                <a:uFillTx/>
-                <a:latin typeface="微软雅黑"/>
-                <a:ea typeface="微软雅黑"/>
-                <a:cs typeface="+mn-cs"/>
-              </a:rPr>
-              <a:t>用户维度</a:t>
-            </a:r>
-            <a:endParaRPr kumimoji="0" lang="zh-CN" altLang="en-US" sz="1300" b="1" i="0" u="none" strike="noStrike" kern="1200" cap="none" spc="0" normalizeH="0" baseline="0" noProof="0" dirty="0">
-              <a:ln>
-                <a:noFill/>
-              </a:ln>
-              <a:solidFill>
-                <a:srgbClr val="0A0A0A"/>
-              </a:solidFill>
-              <a:effectLst/>
-              <a:uLnTx/>
-              <a:uFillTx/>
-              <a:latin typeface="微软雅黑"/>
-              <a:ea typeface="等线" panose="02010600030101010101" pitchFamily="2" charset="-122"/>
-              <a:cs typeface="+mn-cs"/>
-            </a:endParaRPr>
-          </a:p>
-        </p:txBody>
-      </p:sp>
-      <p:sp>
-        <p:nvSpPr>
-          <p:cNvPr id="20" name="矩形 19">
-            <a:extLst>
-              <a:ext uri="{FF2B5EF4-FFF2-40B4-BE49-F238E27FC236}">
-                <a16:creationId xmlns:a16="http://schemas.microsoft.com/office/drawing/2014/main" id="{3FCD25F0-EBC1-4E3E-A4AA-77C198517982}"/>
-              </a:ext>
-            </a:extLst>
-          </p:cNvPr>
-          <p:cNvSpPr/>
-          <p:nvPr/>
-        </p:nvSpPr>
-        <p:spPr>
-          <a:xfrm>
-            <a:off x="6803390" y="4888696"/>
-            <a:ext cx="384048" cy="1097280"/>
-          </a:xfrm>
-          <a:prstGeom prst="rect">
-            <a:avLst/>
-          </a:prstGeom>
-          <a:solidFill>
-            <a:srgbClr val="E3EBF4"/>
-          </a:solidFill>
-          <a:ln>
-            <a:noFill/>
-          </a:ln>
-        </p:spPr>
-        <p:style>
-          <a:lnRef idx="2">
-            <a:schemeClr val="accent1">
-              <a:shade val="50000"/>
-            </a:schemeClr>
-          </a:lnRef>
-          <a:fillRef idx="1">
-            <a:schemeClr val="accent1"/>
-          </a:fillRef>
-          <a:effectRef idx="0">
-            <a:schemeClr val="accent1"/>
-          </a:effectRef>
-          <a:fontRef idx="minor">
-            <a:schemeClr val="lt1"/>
-          </a:fontRef>
-        </p:style>
-        <p:txBody>
-          <a:bodyPr vert="eaVert" wrap="none" lIns="0" tIns="0" rIns="0" bIns="0" rtlCol="0" anchor="ctr"/>
-          <a:lstStyle/>
-          <a:p>
-            <a:pPr marL="0" marR="0" lvl="0" indent="0" algn="ctr" defTabSz="914400" rtl="0" eaLnBrk="1" fontAlgn="auto" latinLnBrk="0" hangingPunct="1">
-              <a:lnSpc>
-                <a:spcPct val="100000"/>
-              </a:lnSpc>
-              <a:spcBef>
-                <a:spcPts val="0"/>
-              </a:spcBef>
-              <a:spcAft>
-                <a:spcPts val="0"/>
-              </a:spcAft>
-              <a:buClrTx/>
-              <a:buSzTx/>
-              <a:buFontTx/>
-              <a:buNone/>
-              <a:tabLst/>
-              <a:defRPr>
-                <a:latin typeface="微软雅黑"/>
-                <a:ea typeface="微软雅黑"/>
-              </a:defRPr>
-            </a:pPr>
-            <a:r>
-              <a:rPr kumimoji="0" lang="zh-CN" altLang="en-US" sz="1300" b="1" i="0" u="none" strike="noStrike" kern="1200" cap="none" spc="0" normalizeH="0" baseline="0" noProof="0">
-                <a:ln>
-                  <a:noFill/>
-                </a:ln>
-                <a:solidFill>
-                  <a:srgbClr val="0A0A0A"/>
-                </a:solidFill>
-                <a:effectLst/>
-                <a:uLnTx/>
-                <a:uFillTx/>
-                <a:latin typeface="微软雅黑"/>
-                <a:ea typeface="微软雅黑"/>
-                <a:cs typeface="+mn-cs"/>
-              </a:rPr>
-              <a:t>单笔借款维度</a:t>
-            </a:r>
-            <a:endParaRPr kumimoji="0" lang="zh-CN" altLang="en-US" sz="1300" b="1" i="0" u="none" strike="noStrike" kern="1200" cap="none" spc="0" normalizeH="0" baseline="0" noProof="0" dirty="0">
-              <a:ln>
-                <a:noFill/>
-              </a:ln>
-              <a:solidFill>
-                <a:srgbClr val="0A0A0A"/>
-              </a:solidFill>
-              <a:effectLst/>
-              <a:uLnTx/>
-              <a:uFillTx/>
-              <a:latin typeface="微软雅黑"/>
-              <a:ea typeface="等线" panose="02010600030101010101" pitchFamily="2" charset="-122"/>
-              <a:cs typeface="+mn-cs"/>
-            </a:endParaRPr>
-          </a:p>
-        </p:txBody>
-      </p:sp>
-      <p:sp>
-        <p:nvSpPr>
-          <p:cNvPr id="21" name="Rectangle 20"/>
-          <p:cNvSpPr/>
-          <p:nvPr/>
-        </p:nvSpPr>
-        <p:spPr>
-          <a:xfrm>
-            <a:off x="948182" y="4888696"/>
-            <a:ext cx="54864" cy="1097280"/>
-          </a:xfrm>
-          <a:prstGeom prst="rect">
-            <a:avLst/>
-          </a:prstGeom>
-          <a:solidFill>
-            <a:srgbClr val="1F4E79"/>
-          </a:solidFill>
-          <a:ln>
-            <a:noFill/>
-          </a:ln>
-          <a:effectLst/>
-        </p:spPr>
-        <p:style>
-          <a:lnRef idx="1">
-            <a:schemeClr val="accent1"/>
-          </a:lnRef>
-          <a:fillRef idx="3">
-            <a:schemeClr val="accent1"/>
-          </a:fillRef>
-          <a:effectRef idx="2">
-            <a:schemeClr val="accent1"/>
-          </a:effectRef>
-          <a:fontRef idx="minor">
-            <a:schemeClr val="lt1"/>
-          </a:fontRef>
-        </p:style>
-        <p:txBody>
-          <a:bodyPr rtlCol="0" anchor="ctr"/>
-          <a:lstStyle/>
-          <a:p>
-            <a:pPr algn="ctr"/>
-            <a:endParaRPr/>
-          </a:p>
-        </p:txBody>
-      </p:sp>
-      <p:sp>
-        <p:nvSpPr>
-          <p:cNvPr id="22" name="Rectangle 21"/>
-          <p:cNvSpPr/>
-          <p:nvPr/>
-        </p:nvSpPr>
-        <p:spPr>
-          <a:xfrm>
-            <a:off x="6748526" y="4888696"/>
-            <a:ext cx="54864" cy="1097280"/>
-          </a:xfrm>
-          <a:prstGeom prst="rect">
-            <a:avLst/>
-          </a:prstGeom>
-          <a:solidFill>
-            <a:srgbClr val="1F4E79"/>
-          </a:solidFill>
-          <a:ln>
-            <a:noFill/>
-          </a:ln>
-          <a:effectLst/>
-        </p:spPr>
-        <p:style>
-          <a:lnRef idx="1">
-            <a:schemeClr val="accent1"/>
-          </a:lnRef>
-          <a:fillRef idx="3">
-            <a:schemeClr val="accent1"/>
-          </a:fillRef>
-          <a:effectRef idx="2">
-            <a:schemeClr val="accent1"/>
-          </a:effectRef>
-          <a:fontRef idx="minor">
-            <a:schemeClr val="lt1"/>
-          </a:fontRef>
-        </p:style>
-        <p:txBody>
-          <a:bodyPr rtlCol="0" anchor="ctr"/>
-          <a:lstStyle/>
-          <a:p>
-            <a:pPr algn="ctr"/>
-            <a:endParaRPr/>
-          </a:p>
-        </p:txBody>
-      </p:sp>
-    </p:spTree>
-    <p:extLst>
-      <p:ext uri="{BB962C8B-B14F-4D97-AF65-F5344CB8AC3E}">
-        <p14:creationId xmlns:p14="http://schemas.microsoft.com/office/powerpoint/2010/main" val="932786264"/>
-      </p:ext>
-    </p:extLst>
-  </p:cSld>
-  <p:clrMapOvr>
-    <a:masterClrMapping/>
-  </p:clrMapOvr>
-</p:sld>
-</file>
-
 <file path=ppt/slides/slide4.xml><?xml version="1.0" encoding="utf-8"?>
 <p:sld xmlns:a="http://schemas.openxmlformats.org/drawingml/2006/main" xmlns:r="http://schemas.openxmlformats.org/officeDocument/2006/relationships" xmlns:p="http://schemas.openxmlformats.org/presentationml/2006/main">
   <p:cSld>

--- a/银行流水分享_V1.8.pptx
+++ b/银行流水分享_V1.8.pptx
@@ -10633,7 +10633,7 @@
         <p:spPr>
           <a:xfrm>
             <a:off x="749808" y="5248656"/>
-            <a:ext cx="1600200" cy="475488"/>
+            <a:ext cx="1600200" cy="603504"/>
           </a:xfrm>
           <a:prstGeom prst="rect">
             <a:avLst/>
@@ -10646,11 +10646,15 @@
           </a:bodyPr>
           <a:lstStyle/>
           <a:p>
-            <a:pPr algn="l"/>
+            <a:pPr algn="l">
+              <a:lnSpc>
+                <a:spcPct val="100000"/>
+              </a:lnSpc>
+            </a:pPr>
             <a:r>
-              <a:rPr sz="800" b="0" lang="zh-CN">
+              <a:rPr sz="1000" b="1" lang="zh-CN">
                 <a:solidFill>
-                  <a:srgbClr val="606060"/>
+                  <a:srgbClr val="1F4E79"/>
                 </a:solidFill>
                 <a:latin typeface="微软雅黑"/>
                 <a:ea typeface="微软雅黑"/>
@@ -10659,11 +10663,15 @@
             </a:r>
           </a:p>
           <a:p>
-            <a:pPr algn="l"/>
+            <a:pPr algn="l">
+              <a:lnSpc>
+                <a:spcPct val="100000"/>
+              </a:lnSpc>
+            </a:pPr>
             <a:r>
-              <a:rPr sz="1400" b="1" lang="zh-CN">
+              <a:rPr sz="800" b="0" lang="zh-CN">
                 <a:solidFill>
-                  <a:srgbClr val="1F4E79"/>
+                  <a:srgbClr val="606060"/>
                 </a:solidFill>
                 <a:latin typeface="微软雅黑"/>
                 <a:ea typeface="微软雅黑"/>
@@ -10682,7 +10690,7 @@
         <p:spPr>
           <a:xfrm>
             <a:off x="2450592" y="5248656"/>
-            <a:ext cx="1600200" cy="475488"/>
+            <a:ext cx="1600200" cy="603504"/>
           </a:xfrm>
           <a:prstGeom prst="rect">
             <a:avLst/>
@@ -10695,11 +10703,15 @@
           </a:bodyPr>
           <a:lstStyle/>
           <a:p>
-            <a:pPr algn="l"/>
+            <a:pPr algn="l">
+              <a:lnSpc>
+                <a:spcPct val="100000"/>
+              </a:lnSpc>
+            </a:pPr>
             <a:r>
-              <a:rPr sz="800" b="0" lang="zh-CN">
+              <a:rPr sz="1000" b="1" lang="zh-CN">
                 <a:solidFill>
-                  <a:srgbClr val="606060"/>
+                  <a:srgbClr val="1F4E79"/>
                 </a:solidFill>
                 <a:latin typeface="微软雅黑"/>
                 <a:ea typeface="微软雅黑"/>
@@ -10708,11 +10720,15 @@
             </a:r>
           </a:p>
           <a:p>
-            <a:pPr algn="l"/>
+            <a:pPr algn="l">
+              <a:lnSpc>
+                <a:spcPct val="100000"/>
+              </a:lnSpc>
+            </a:pPr>
             <a:r>
-              <a:rPr sz="1400" b="1" lang="zh-CN">
+              <a:rPr sz="800" b="0" lang="zh-CN">
                 <a:solidFill>
-                  <a:srgbClr val="1F4E79"/>
+                  <a:srgbClr val="606060"/>
                 </a:solidFill>
                 <a:latin typeface="微软雅黑"/>
                 <a:ea typeface="微软雅黑"/>
@@ -10731,7 +10747,7 @@
         <p:spPr>
           <a:xfrm>
             <a:off x="4151376" y="5248656"/>
-            <a:ext cx="1600200" cy="475488"/>
+            <a:ext cx="1600200" cy="603504"/>
           </a:xfrm>
           <a:prstGeom prst="rect">
             <a:avLst/>
@@ -10744,11 +10760,15 @@
           </a:bodyPr>
           <a:lstStyle/>
           <a:p>
-            <a:pPr algn="l"/>
+            <a:pPr algn="l">
+              <a:lnSpc>
+                <a:spcPct val="100000"/>
+              </a:lnSpc>
+            </a:pPr>
             <a:r>
-              <a:rPr sz="800" b="0" lang="zh-CN">
+              <a:rPr sz="1000" b="1" lang="zh-CN">
                 <a:solidFill>
-                  <a:srgbClr val="606060"/>
+                  <a:srgbClr val="1F4E79"/>
                 </a:solidFill>
                 <a:latin typeface="微软雅黑"/>
                 <a:ea typeface="微软雅黑"/>
@@ -10757,11 +10777,15 @@
             </a:r>
           </a:p>
           <a:p>
-            <a:pPr algn="l"/>
+            <a:pPr algn="l">
+              <a:lnSpc>
+                <a:spcPct val="100000"/>
+              </a:lnSpc>
+            </a:pPr>
             <a:r>
-              <a:rPr sz="1400" b="1" lang="zh-CN">
+              <a:rPr sz="800" b="0" lang="zh-CN">
                 <a:solidFill>
-                  <a:srgbClr val="1F4E79"/>
+                  <a:srgbClr val="606060"/>
                 </a:solidFill>
                 <a:latin typeface="微软雅黑"/>
                 <a:ea typeface="微软雅黑"/>
@@ -10780,7 +10804,7 @@
         <p:spPr>
           <a:xfrm>
             <a:off x="749808" y="5779008"/>
-            <a:ext cx="1170432" cy="475488"/>
+            <a:ext cx="1170432" cy="603504"/>
           </a:xfrm>
           <a:prstGeom prst="rect">
             <a:avLst/>
@@ -10793,11 +10817,15 @@
           </a:bodyPr>
           <a:lstStyle/>
           <a:p>
-            <a:pPr algn="l"/>
+            <a:pPr algn="l">
+              <a:lnSpc>
+                <a:spcPct val="100000"/>
+              </a:lnSpc>
+            </a:pPr>
             <a:r>
-              <a:rPr sz="800" b="0" lang="zh-CN">
+              <a:rPr sz="1000" b="1" lang="zh-CN">
                 <a:solidFill>
-                  <a:srgbClr val="606060"/>
+                  <a:srgbClr val="1F4E79"/>
                 </a:solidFill>
                 <a:latin typeface="微软雅黑"/>
                 <a:ea typeface="微软雅黑"/>
@@ -10806,11 +10834,15 @@
             </a:r>
           </a:p>
           <a:p>
-            <a:pPr algn="l"/>
+            <a:pPr algn="l">
+              <a:lnSpc>
+                <a:spcPct val="100000"/>
+              </a:lnSpc>
+            </a:pPr>
             <a:r>
-              <a:rPr sz="1400" b="1" lang="zh-CN">
+              <a:rPr sz="800" b="0" lang="zh-CN">
                 <a:solidFill>
-                  <a:srgbClr val="1F4E79"/>
+                  <a:srgbClr val="606060"/>
                 </a:solidFill>
                 <a:latin typeface="微软雅黑"/>
                 <a:ea typeface="微软雅黑"/>
@@ -10829,7 +10861,7 @@
         <p:spPr>
           <a:xfrm>
             <a:off x="2020824" y="5779008"/>
-            <a:ext cx="1170432" cy="475488"/>
+            <a:ext cx="1170432" cy="603504"/>
           </a:xfrm>
           <a:prstGeom prst="rect">
             <a:avLst/>
@@ -10842,11 +10874,15 @@
           </a:bodyPr>
           <a:lstStyle/>
           <a:p>
-            <a:pPr algn="l"/>
+            <a:pPr algn="l">
+              <a:lnSpc>
+                <a:spcPct val="100000"/>
+              </a:lnSpc>
+            </a:pPr>
             <a:r>
-              <a:rPr sz="800" b="0" lang="zh-CN">
+              <a:rPr sz="1000" b="1" lang="zh-CN">
                 <a:solidFill>
-                  <a:srgbClr val="606060"/>
+                  <a:srgbClr val="1F4E79"/>
                 </a:solidFill>
                 <a:latin typeface="微软雅黑"/>
                 <a:ea typeface="微软雅黑"/>
@@ -10855,11 +10891,15 @@
             </a:r>
           </a:p>
           <a:p>
-            <a:pPr algn="l"/>
+            <a:pPr algn="l">
+              <a:lnSpc>
+                <a:spcPct val="100000"/>
+              </a:lnSpc>
+            </a:pPr>
             <a:r>
-              <a:rPr sz="1400" b="1" lang="zh-CN">
+              <a:rPr sz="800" b="0" lang="zh-CN">
                 <a:solidFill>
-                  <a:srgbClr val="1F4E79"/>
+                  <a:srgbClr val="606060"/>
                 </a:solidFill>
                 <a:latin typeface="微软雅黑"/>
                 <a:ea typeface="微软雅黑"/>
@@ -10878,7 +10918,7 @@
         <p:spPr>
           <a:xfrm>
             <a:off x="3291839" y="5779008"/>
-            <a:ext cx="1170432" cy="475488"/>
+            <a:ext cx="1170432" cy="603504"/>
           </a:xfrm>
           <a:prstGeom prst="rect">
             <a:avLst/>
@@ -10891,11 +10931,15 @@
           </a:bodyPr>
           <a:lstStyle/>
           <a:p>
-            <a:pPr algn="l"/>
+            <a:pPr algn="l">
+              <a:lnSpc>
+                <a:spcPct val="100000"/>
+              </a:lnSpc>
+            </a:pPr>
             <a:r>
-              <a:rPr sz="800" b="0" lang="zh-CN">
+              <a:rPr sz="1000" b="1" lang="zh-CN">
                 <a:solidFill>
-                  <a:srgbClr val="606060"/>
+                  <a:srgbClr val="1F4E79"/>
                 </a:solidFill>
                 <a:latin typeface="微软雅黑"/>
                 <a:ea typeface="微软雅黑"/>
@@ -10904,11 +10948,15 @@
             </a:r>
           </a:p>
           <a:p>
-            <a:pPr algn="l"/>
+            <a:pPr algn="l">
+              <a:lnSpc>
+                <a:spcPct val="100000"/>
+              </a:lnSpc>
+            </a:pPr>
             <a:r>
-              <a:rPr sz="1400" b="1" lang="zh-CN">
+              <a:rPr sz="800" b="0" lang="zh-CN">
                 <a:solidFill>
-                  <a:srgbClr val="1F4E79"/>
+                  <a:srgbClr val="606060"/>
                 </a:solidFill>
                 <a:latin typeface="微软雅黑"/>
                 <a:ea typeface="微软雅黑"/>
@@ -10927,7 +10975,7 @@
         <p:spPr>
           <a:xfrm>
             <a:off x="4562856" y="5779008"/>
-            <a:ext cx="1170432" cy="475488"/>
+            <a:ext cx="1170432" cy="603504"/>
           </a:xfrm>
           <a:prstGeom prst="rect">
             <a:avLst/>
@@ -10940,11 +10988,15 @@
           </a:bodyPr>
           <a:lstStyle/>
           <a:p>
-            <a:pPr algn="l"/>
+            <a:pPr algn="l">
+              <a:lnSpc>
+                <a:spcPct val="100000"/>
+              </a:lnSpc>
+            </a:pPr>
             <a:r>
-              <a:rPr sz="800" b="0" lang="zh-CN">
+              <a:rPr sz="1000" b="1" lang="zh-CN">
                 <a:solidFill>
-                  <a:srgbClr val="606060"/>
+                  <a:srgbClr val="1F4E79"/>
                 </a:solidFill>
                 <a:latin typeface="微软雅黑"/>
                 <a:ea typeface="微软雅黑"/>
@@ -10953,11 +11005,15 @@
             </a:r>
           </a:p>
           <a:p>
-            <a:pPr algn="l"/>
+            <a:pPr algn="l">
+              <a:lnSpc>
+                <a:spcPct val="100000"/>
+              </a:lnSpc>
+            </a:pPr>
             <a:r>
-              <a:rPr sz="1400" b="1" lang="zh-CN">
+              <a:rPr sz="800" b="0" lang="zh-CN">
                 <a:solidFill>
-                  <a:srgbClr val="1F4E79"/>
+                  <a:srgbClr val="606060"/>
                 </a:solidFill>
                 <a:latin typeface="微软雅黑"/>
                 <a:ea typeface="微软雅黑"/>
@@ -10976,7 +11032,7 @@
         <p:spPr>
           <a:xfrm>
             <a:off x="6400800" y="5248656"/>
-            <a:ext cx="1600200" cy="475488"/>
+            <a:ext cx="1600200" cy="603504"/>
           </a:xfrm>
           <a:prstGeom prst="rect">
             <a:avLst/>
@@ -10989,11 +11045,15 @@
           </a:bodyPr>
           <a:lstStyle/>
           <a:p>
-            <a:pPr algn="l"/>
+            <a:pPr algn="l">
+              <a:lnSpc>
+                <a:spcPct val="100000"/>
+              </a:lnSpc>
+            </a:pPr>
             <a:r>
-              <a:rPr sz="800" b="0" lang="zh-CN">
+              <a:rPr sz="1000" b="1" lang="zh-CN">
                 <a:solidFill>
-                  <a:srgbClr val="606060"/>
+                  <a:srgbClr val="1F4E79"/>
                 </a:solidFill>
                 <a:latin typeface="微软雅黑"/>
                 <a:ea typeface="微软雅黑"/>
@@ -11002,11 +11062,15 @@
             </a:r>
           </a:p>
           <a:p>
-            <a:pPr algn="l"/>
+            <a:pPr algn="l">
+              <a:lnSpc>
+                <a:spcPct val="100000"/>
+              </a:lnSpc>
+            </a:pPr>
             <a:r>
-              <a:rPr sz="1400" b="1" lang="zh-CN">
+              <a:rPr sz="800" b="0" lang="zh-CN">
                 <a:solidFill>
-                  <a:srgbClr val="1F4E79"/>
+                  <a:srgbClr val="606060"/>
                 </a:solidFill>
                 <a:latin typeface="微软雅黑"/>
                 <a:ea typeface="微软雅黑"/>
@@ -11025,7 +11089,7 @@
         <p:spPr>
           <a:xfrm>
             <a:off x="8101583" y="5248656"/>
-            <a:ext cx="1600200" cy="475488"/>
+            <a:ext cx="1600200" cy="603504"/>
           </a:xfrm>
           <a:prstGeom prst="rect">
             <a:avLst/>
@@ -11038,11 +11102,15 @@
           </a:bodyPr>
           <a:lstStyle/>
           <a:p>
-            <a:pPr algn="l"/>
+            <a:pPr algn="l">
+              <a:lnSpc>
+                <a:spcPct val="100000"/>
+              </a:lnSpc>
+            </a:pPr>
             <a:r>
-              <a:rPr sz="800" b="0" lang="zh-CN">
+              <a:rPr sz="1000" b="1" lang="zh-CN">
                 <a:solidFill>
-                  <a:srgbClr val="606060"/>
+                  <a:srgbClr val="1F4E79"/>
                 </a:solidFill>
                 <a:latin typeface="微软雅黑"/>
                 <a:ea typeface="微软雅黑"/>
@@ -11051,11 +11119,15 @@
             </a:r>
           </a:p>
           <a:p>
-            <a:pPr algn="l"/>
+            <a:pPr algn="l">
+              <a:lnSpc>
+                <a:spcPct val="100000"/>
+              </a:lnSpc>
+            </a:pPr>
             <a:r>
-              <a:rPr sz="1400" b="1" lang="zh-CN">
+              <a:rPr sz="800" b="0" lang="zh-CN">
                 <a:solidFill>
-                  <a:srgbClr val="1F4E79"/>
+                  <a:srgbClr val="606060"/>
                 </a:solidFill>
                 <a:latin typeface="微软雅黑"/>
                 <a:ea typeface="微软雅黑"/>
@@ -11074,7 +11146,7 @@
         <p:spPr>
           <a:xfrm>
             <a:off x="9802368" y="5248656"/>
-            <a:ext cx="1600200" cy="475488"/>
+            <a:ext cx="1600200" cy="603504"/>
           </a:xfrm>
           <a:prstGeom prst="rect">
             <a:avLst/>
@@ -11087,11 +11159,15 @@
           </a:bodyPr>
           <a:lstStyle/>
           <a:p>
-            <a:pPr algn="l"/>
+            <a:pPr algn="l">
+              <a:lnSpc>
+                <a:spcPct val="100000"/>
+              </a:lnSpc>
+            </a:pPr>
             <a:r>
-              <a:rPr sz="800" b="0" lang="zh-CN">
+              <a:rPr sz="1000" b="1" lang="zh-CN">
                 <a:solidFill>
-                  <a:srgbClr val="606060"/>
+                  <a:srgbClr val="1F4E79"/>
                 </a:solidFill>
                 <a:latin typeface="微软雅黑"/>
                 <a:ea typeface="微软雅黑"/>
@@ -11100,11 +11176,15 @@
             </a:r>
           </a:p>
           <a:p>
-            <a:pPr algn="l"/>
+            <a:pPr algn="l">
+              <a:lnSpc>
+                <a:spcPct val="100000"/>
+              </a:lnSpc>
+            </a:pPr>
             <a:r>
-              <a:rPr sz="1400" b="1" lang="zh-CN">
+              <a:rPr sz="800" b="0" lang="zh-CN">
                 <a:solidFill>
-                  <a:srgbClr val="1F4E79"/>
+                  <a:srgbClr val="606060"/>
                 </a:solidFill>
                 <a:latin typeface="微软雅黑"/>
                 <a:ea typeface="微软雅黑"/>
@@ -11123,7 +11203,7 @@
         <p:spPr>
           <a:xfrm>
             <a:off x="6400800" y="5779008"/>
-            <a:ext cx="1170432" cy="475488"/>
+            <a:ext cx="1170432" cy="603504"/>
           </a:xfrm>
           <a:prstGeom prst="rect">
             <a:avLst/>
@@ -11136,11 +11216,15 @@
           </a:bodyPr>
           <a:lstStyle/>
           <a:p>
-            <a:pPr algn="l"/>
+            <a:pPr algn="l">
+              <a:lnSpc>
+                <a:spcPct val="100000"/>
+              </a:lnSpc>
+            </a:pPr>
             <a:r>
-              <a:rPr sz="800" b="0" lang="zh-CN">
+              <a:rPr sz="1000" b="1" lang="zh-CN">
                 <a:solidFill>
-                  <a:srgbClr val="606060"/>
+                  <a:srgbClr val="1F4E79"/>
                 </a:solidFill>
                 <a:latin typeface="微软雅黑"/>
                 <a:ea typeface="微软雅黑"/>
@@ -11149,11 +11233,15 @@
             </a:r>
           </a:p>
           <a:p>
-            <a:pPr algn="l"/>
+            <a:pPr algn="l">
+              <a:lnSpc>
+                <a:spcPct val="100000"/>
+              </a:lnSpc>
+            </a:pPr>
             <a:r>
-              <a:rPr sz="1400" b="1" lang="zh-CN">
+              <a:rPr sz="800" b="0" lang="zh-CN">
                 <a:solidFill>
-                  <a:srgbClr val="1F4E79"/>
+                  <a:srgbClr val="606060"/>
                 </a:solidFill>
                 <a:latin typeface="微软雅黑"/>
                 <a:ea typeface="微软雅黑"/>
@@ -11172,7 +11260,7 @@
         <p:spPr>
           <a:xfrm>
             <a:off x="7671816" y="5779008"/>
-            <a:ext cx="1170432" cy="475488"/>
+            <a:ext cx="1170432" cy="603504"/>
           </a:xfrm>
           <a:prstGeom prst="rect">
             <a:avLst/>
@@ -11185,11 +11273,15 @@
           </a:bodyPr>
           <a:lstStyle/>
           <a:p>
-            <a:pPr algn="l"/>
+            <a:pPr algn="l">
+              <a:lnSpc>
+                <a:spcPct val="100000"/>
+              </a:lnSpc>
+            </a:pPr>
             <a:r>
-              <a:rPr sz="800" b="0" lang="zh-CN">
+              <a:rPr sz="1000" b="1" lang="zh-CN">
                 <a:solidFill>
-                  <a:srgbClr val="606060"/>
+                  <a:srgbClr val="1F4E79"/>
                 </a:solidFill>
                 <a:latin typeface="微软雅黑"/>
                 <a:ea typeface="微软雅黑"/>
@@ -11198,11 +11290,15 @@
             </a:r>
           </a:p>
           <a:p>
-            <a:pPr algn="l"/>
+            <a:pPr algn="l">
+              <a:lnSpc>
+                <a:spcPct val="100000"/>
+              </a:lnSpc>
+            </a:pPr>
             <a:r>
-              <a:rPr sz="1400" b="1" lang="zh-CN">
+              <a:rPr sz="800" b="0" lang="zh-CN">
                 <a:solidFill>
-                  <a:srgbClr val="1F4E79"/>
+                  <a:srgbClr val="606060"/>
                 </a:solidFill>
                 <a:latin typeface="微软雅黑"/>
                 <a:ea typeface="微软雅黑"/>
@@ -11221,7 +11317,7 @@
         <p:spPr>
           <a:xfrm>
             <a:off x="8942832" y="5779008"/>
-            <a:ext cx="1170432" cy="475488"/>
+            <a:ext cx="1170432" cy="603504"/>
           </a:xfrm>
           <a:prstGeom prst="rect">
             <a:avLst/>
@@ -11234,11 +11330,15 @@
           </a:bodyPr>
           <a:lstStyle/>
           <a:p>
-            <a:pPr algn="l"/>
+            <a:pPr algn="l">
+              <a:lnSpc>
+                <a:spcPct val="100000"/>
+              </a:lnSpc>
+            </a:pPr>
             <a:r>
-              <a:rPr sz="800" b="0" lang="zh-CN">
+              <a:rPr sz="1000" b="1" lang="zh-CN">
                 <a:solidFill>
-                  <a:srgbClr val="606060"/>
+                  <a:srgbClr val="1F4E79"/>
                 </a:solidFill>
                 <a:latin typeface="微软雅黑"/>
                 <a:ea typeface="微软雅黑"/>
@@ -11247,11 +11347,15 @@
             </a:r>
           </a:p>
           <a:p>
-            <a:pPr algn="l"/>
+            <a:pPr algn="l">
+              <a:lnSpc>
+                <a:spcPct val="100000"/>
+              </a:lnSpc>
+            </a:pPr>
             <a:r>
-              <a:rPr sz="1400" b="1" lang="zh-CN">
+              <a:rPr sz="800" b="0" lang="zh-CN">
                 <a:solidFill>
-                  <a:srgbClr val="1F4E79"/>
+                  <a:srgbClr val="606060"/>
                 </a:solidFill>
                 <a:latin typeface="微软雅黑"/>
                 <a:ea typeface="微软雅黑"/>
@@ -11270,7 +11374,7 @@
         <p:spPr>
           <a:xfrm>
             <a:off x="10213848" y="5779008"/>
-            <a:ext cx="1170432" cy="475488"/>
+            <a:ext cx="1170432" cy="603504"/>
           </a:xfrm>
           <a:prstGeom prst="rect">
             <a:avLst/>
@@ -11283,11 +11387,15 @@
           </a:bodyPr>
           <a:lstStyle/>
           <a:p>
-            <a:pPr algn="l"/>
+            <a:pPr algn="l">
+              <a:lnSpc>
+                <a:spcPct val="100000"/>
+              </a:lnSpc>
+            </a:pPr>
             <a:r>
-              <a:rPr sz="800" b="0" lang="zh-CN">
+              <a:rPr sz="1000" b="1" lang="zh-CN">
                 <a:solidFill>
-                  <a:srgbClr val="606060"/>
+                  <a:srgbClr val="1F4E79"/>
                 </a:solidFill>
                 <a:latin typeface="微软雅黑"/>
                 <a:ea typeface="微软雅黑"/>
@@ -11296,11 +11404,15 @@
             </a:r>
           </a:p>
           <a:p>
-            <a:pPr algn="l"/>
+            <a:pPr algn="l">
+              <a:lnSpc>
+                <a:spcPct val="100000"/>
+              </a:lnSpc>
+            </a:pPr>
             <a:r>
-              <a:rPr sz="1400" b="1" lang="zh-CN">
+              <a:rPr sz="800" b="0" lang="zh-CN">
                 <a:solidFill>
-                  <a:srgbClr val="1F4E79"/>
+                  <a:srgbClr val="606060"/>
                 </a:solidFill>
                 <a:latin typeface="微软雅黑"/>
                 <a:ea typeface="微软雅黑"/>
@@ -11323,7 +11435,7 @@
 </p:sld>
 </file>
 
-<file path=ppt/slides/slide4.xml><?xml version="1.0" encoding="utf-8"?>
+<file path=ppt/slides/slide3.xml><?xml version="1.0" encoding="utf-8"?>
 <p:sld xmlns:a="http://schemas.openxmlformats.org/drawingml/2006/main" xmlns:r="http://schemas.openxmlformats.org/officeDocument/2006/relationships" xmlns:p="http://schemas.openxmlformats.org/presentationml/2006/main">
   <p:cSld>
     <p:spTree>
@@ -16368,7 +16480,7 @@
 </p:sld>
 </file>
 
-<file path=ppt/slides/slide5.xml><?xml version="1.0" encoding="utf-8"?>
+<file path=ppt/slides/slide4.xml><?xml version="1.0" encoding="utf-8"?>
 <p:sld xmlns:a="http://schemas.openxmlformats.org/drawingml/2006/main" xmlns:r="http://schemas.openxmlformats.org/officeDocument/2006/relationships" xmlns:p="http://schemas.openxmlformats.org/presentationml/2006/main">
   <p:cSld>
     <p:spTree>

--- a/银行流水分享_V1.8.pptx
+++ b/银行流水分享_V1.8.pptx
@@ -2034,8 +2034,8 @@
         </p:nvSpPr>
         <p:spPr>
           <a:xfrm>
-            <a:off x="600015" y="214702"/>
-            <a:ext cx="8890000" cy="355600"/>
+            <a:off x="603504" y="210312"/>
+            <a:ext cx="8887968" cy="356616"/>
           </a:xfrm>
           <a:prstGeom prst="rect">
             <a:avLst/>
@@ -2065,7 +2065,7 @@
               <a:t>银行流水</a:t>
             </a:r>
             <a:r>
-              <a:rPr lang="en-US" sz="2000" b="1" noProof="1">
+              <a:rPr lang="zh-CN" sz="2000" b="1" noProof="1">
                 <a:solidFill>
                   <a:srgbClr val="0A0A0A"/>
                 </a:solidFill>
@@ -2095,8 +2095,8 @@
         </p:nvSpPr>
         <p:spPr>
           <a:xfrm>
-            <a:off x="511115" y="562682"/>
-            <a:ext cx="10901632" cy="438133"/>
+            <a:off x="512064" y="585216"/>
+            <a:ext cx="10899648" cy="438912"/>
           </a:xfrm>
           <a:prstGeom prst="rect">
             <a:avLst/>
@@ -2115,7 +2115,7 @@
               </a:lnSpc>
             </a:pPr>
             <a:r>
-              <a:rPr lang="en-US" altLang="zh-CN" sz="1800" noProof="1">
+              <a:rPr lang="zh-CN" altLang="zh-CN" sz="1800" noProof="1">
                 <a:solidFill>
                   <a:srgbClr val="606060"/>
                 </a:solidFill>
@@ -2432,7 +2432,7 @@
           <p:nvPr>
             <p:extLst>
               <p:ext uri="{F5677B7D-0D2A-4D9B-9A5C-6D8D7D0E5A5D}">
-                <pptd:line xmlns="" xmlns:a14="http://schemas.microsoft.com/office/drawing/2010/main" xmlns:c="http://schemas.openxmlformats.org/drawingml/2006/chart" xmlns:cx="http://schemas.microsoft.com/office/drawing/2014/chartex" xmlns:m="http://schemas.openxmlformats.org/officeDocument/2006/math" xmlns:mc="http://schemas.openxmlformats.org/markup-compatibility/2006" xmlns:pptd="https://kimi-design.msh.team/pptd/2026" encoding="base64url">eyJ2aWV3Qm94IjpbMSwzNDBdLCJwb2ludHMiOiIwLDAgMCwzNDAifQ</pptd:line>
+                <pptd:line xmlns:pptd="https://kimi-design.msh.team/pptd/2026" xmlns:mc="http://schemas.openxmlformats.org/markup-compatibility/2006" xmlns:m="http://schemas.openxmlformats.org/officeDocument/2006/math" xmlns:cx="http://schemas.microsoft.com/office/drawing/2014/chartex" xmlns:c="http://schemas.openxmlformats.org/drawingml/2006/chart" xmlns:a14="http://schemas.microsoft.com/office/drawing/2010/main" xmlns="" encoding="base64url">eyJ2aWV3Qm94IjpbMSwzNDBdLCJwb2ludHMiOiIwLDAgMCwzNDAifQ</pptd:line>
               </p:ext>
             </p:extLst>
           </p:nvPr>
@@ -2603,7 +2603,7 @@
           <p:nvPr>
             <p:extLst>
               <p:ext uri="{F5677B7D-0D2A-4D9B-9A5C-6D8D7D0E5A5D}">
-                <pptd:line xmlns="" xmlns:a14="http://schemas.microsoft.com/office/drawing/2010/main" xmlns:c="http://schemas.openxmlformats.org/drawingml/2006/chart" xmlns:cx="http://schemas.microsoft.com/office/drawing/2014/chartex" xmlns:m="http://schemas.openxmlformats.org/officeDocument/2006/math" xmlns:mc="http://schemas.openxmlformats.org/markup-compatibility/2006" xmlns:pptd="https://kimi-design.msh.team/pptd/2026" encoding="base64url">eyJ2aWV3Qm94IjpbMzc2LDFdLCJwb2ludHMiOiIwLDAgMzc2LDAifQ</pptd:line>
+                <pptd:line xmlns:pptd="https://kimi-design.msh.team/pptd/2026" xmlns:mc="http://schemas.openxmlformats.org/markup-compatibility/2006" xmlns:m="http://schemas.openxmlformats.org/officeDocument/2006/math" xmlns:cx="http://schemas.microsoft.com/office/drawing/2014/chartex" xmlns:c="http://schemas.openxmlformats.org/drawingml/2006/chart" xmlns:a14="http://schemas.microsoft.com/office/drawing/2010/main" xmlns="" encoding="base64url">eyJ2aWV3Qm94IjpbMzc2LDFdLCJwb2ludHMiOiIwLDAgMzc2LDAifQ</pptd:line>
               </p:ext>
             </p:extLst>
           </p:nvPr>
@@ -2727,7 +2727,7 @@
           <p:nvPr>
             <p:extLst>
               <p:ext uri="{F5677B7D-0D2A-4D9B-9A5C-6D8D7D0E5A5D}">
-                <pptd:line xmlns="" xmlns:a14="http://schemas.microsoft.com/office/drawing/2010/main" xmlns:c="http://schemas.openxmlformats.org/drawingml/2006/chart" xmlns:cx="http://schemas.microsoft.com/office/drawing/2014/chartex" xmlns:m="http://schemas.openxmlformats.org/officeDocument/2006/math" xmlns:mc="http://schemas.openxmlformats.org/markup-compatibility/2006" xmlns:pptd="https://kimi-design.msh.team/pptd/2026" encoding="base64url">eyJ2aWV3Qm94IjpbMzc2LDFdLCJwb2ludHMiOiIwLDAgMzc2LDAifQ</pptd:line>
+                <pptd:line xmlns:pptd="https://kimi-design.msh.team/pptd/2026" xmlns:mc="http://schemas.openxmlformats.org/markup-compatibility/2006" xmlns:m="http://schemas.openxmlformats.org/officeDocument/2006/math" xmlns:cx="http://schemas.microsoft.com/office/drawing/2014/chartex" xmlns:c="http://schemas.openxmlformats.org/drawingml/2006/chart" xmlns:a14="http://schemas.microsoft.com/office/drawing/2010/main" xmlns="" encoding="base64url">eyJ2aWV3Qm94IjpbMzc2LDFdLCJwb2ludHMiOiIwLDAgMzc2LDAifQ</pptd:line>
               </p:ext>
             </p:extLst>
           </p:nvPr>
@@ -2871,7 +2871,7 @@
           <p:nvPr>
             <p:extLst>
               <p:ext uri="{F5677B7D-0D2A-4D9B-9A5C-6D8D7D0E5A5D}">
-                <pptd:line xmlns="" xmlns:a14="http://schemas.microsoft.com/office/drawing/2010/main" xmlns:c="http://schemas.openxmlformats.org/drawingml/2006/chart" xmlns:cx="http://schemas.microsoft.com/office/drawing/2014/chartex" xmlns:m="http://schemas.openxmlformats.org/officeDocument/2006/math" xmlns:mc="http://schemas.openxmlformats.org/markup-compatibility/2006" xmlns:pptd="https://kimi-design.msh.team/pptd/2026" encoding="base64url">eyJ2aWV3Qm94IjpbMzc2LDFdLCJwb2ludHMiOiIwLDAgMzc2LDAifQ</pptd:line>
+                <pptd:line xmlns:pptd="https://kimi-design.msh.team/pptd/2026" xmlns:mc="http://schemas.openxmlformats.org/markup-compatibility/2006" xmlns:m="http://schemas.openxmlformats.org/officeDocument/2006/math" xmlns:cx="http://schemas.microsoft.com/office/drawing/2014/chartex" xmlns:c="http://schemas.openxmlformats.org/drawingml/2006/chart" xmlns:a14="http://schemas.microsoft.com/office/drawing/2010/main" xmlns="" encoding="base64url">eyJ2aWV3Qm94IjpbMzc2LDFdLCJwb2ludHMiOiIwLDAgMzc2LDAifQ</pptd:line>
               </p:ext>
             </p:extLst>
           </p:nvPr>
@@ -3035,7 +3035,7 @@
             <p:nvPr>
               <p:extLst>
                 <p:ext uri="{F5677B7D-0D2A-4D9B-9A5C-6D8D7D0E5A5D}">
-                  <pptd:line xmlns:pptd="https://kimi-design.msh.team/pptd/2026" xmlns:mc="http://schemas.openxmlformats.org/markup-compatibility/2006" xmlns:m="http://schemas.openxmlformats.org/officeDocument/2006/math" xmlns:cx="http://schemas.microsoft.com/office/drawing/2014/chartex" xmlns:c="http://schemas.openxmlformats.org/drawingml/2006/chart" xmlns:a14="http://schemas.microsoft.com/office/drawing/2010/main" xmlns="" encoding="base64url">eyJ2aWV3Qm94IjpbODU2LDFdLCJwb2ludHMiOiIwLDAgODU2LDAifQ</pptd:line>
+                  <pptd:line xmlns="" xmlns:a14="http://schemas.microsoft.com/office/drawing/2010/main" xmlns:c="http://schemas.openxmlformats.org/drawingml/2006/chart" xmlns:cx="http://schemas.microsoft.com/office/drawing/2014/chartex" xmlns:m="http://schemas.openxmlformats.org/officeDocument/2006/math" xmlns:mc="http://schemas.openxmlformats.org/markup-compatibility/2006" xmlns:pptd="https://kimi-design.msh.team/pptd/2026" encoding="base64url">eyJ2aWV3Qm94IjpbODU2LDFdLCJwb2ludHMiOiIwLDAgODU2LDAifQ</pptd:line>
                 </p:ext>
               </p:extLst>
             </p:nvPr>
@@ -6285,8 +6285,8 @@
         </p:nvSpPr>
         <p:spPr>
           <a:xfrm>
-            <a:off x="603504" y="65149"/>
-            <a:ext cx="10972800" cy="621792"/>
+            <a:off x="603504" y="210312"/>
+            <a:ext cx="8887968" cy="356616"/>
           </a:xfrm>
           <a:prstGeom prst="rect">
             <a:avLst/>
@@ -6297,7 +6297,7 @@
           </a:ln>
         </p:spPr>
         <p:txBody>
-          <a:bodyPr wrap="square" lIns="0" tIns="0" rIns="0" bIns="0" rtlCol="0" anchor="ctr"/>
+          <a:bodyPr wrap="none" lIns="0" tIns="0" rIns="0" bIns="0" rtlCol="0" anchor="ctr"/>
           <a:lstStyle/>
           <a:p>
             <a:pPr marL="0" marR="0" lvl="0" indent="0" algn="l" defTabSz="914400" rtl="0" eaLnBrk="1" fontAlgn="auto" latinLnBrk="1" hangingPunct="1">
@@ -6347,8 +6347,8 @@
         </p:nvSpPr>
         <p:spPr>
           <a:xfrm>
-            <a:off x="511115" y="566724"/>
-            <a:ext cx="10901632" cy="443391"/>
+            <a:off x="512064" y="585216"/>
+            <a:ext cx="10899648" cy="438912"/>
           </a:xfrm>
           <a:prstGeom prst="rect">
             <a:avLst/>
@@ -6382,21 +6382,30 @@
               </a:defRPr>
             </a:pPr>
             <a:r>
-              <a:rPr lang="zh-CN" altLang="en-US" dirty="0">
+              <a:rPr lang="zh-CN" altLang="en-US" dirty="0" sz="1800">
+                <a:solidFill>
+                  <a:srgbClr val="606060"/>
+                </a:solidFill>
                 <a:latin typeface="微软雅黑"/>
                 <a:ea typeface="微软雅黑"/>
               </a:rPr>
               <a:t>原始流水 → 单笔交易识别 → 用户</a:t>
             </a:r>
             <a:r>
-              <a:rPr lang="en-US" altLang="zh-CN" dirty="0">
+              <a:rPr lang="zh-CN" altLang="zh-CN" dirty="0" sz="1800">
+                <a:solidFill>
+                  <a:srgbClr val="606060"/>
+                </a:solidFill>
                 <a:latin typeface="微软雅黑"/>
                 <a:ea typeface="微软雅黑"/>
               </a:rPr>
               <a:t>/</a:t>
             </a:r>
             <a:r>
-              <a:rPr lang="zh-CN" altLang="en-US" dirty="0">
+              <a:rPr lang="zh-CN" altLang="en-US" dirty="0" sz="1800">
+                <a:solidFill>
+                  <a:srgbClr val="606060"/>
+                </a:solidFill>
                 <a:latin typeface="微软雅黑"/>
                 <a:ea typeface="微软雅黑"/>
               </a:rPr>
@@ -9984,6 +9993,7 @@
           <a:lstStyle/>
           <a:p>
             <a:pPr algn="ctr"/>
+            <a:endParaRPr/>
           </a:p>
         </p:txBody>
       </p:sp>
@@ -10028,6 +10038,7 @@
           <a:lstStyle/>
           <a:p>
             <a:pPr algn="ctr"/>
+            <a:endParaRPr/>
           </a:p>
         </p:txBody>
       </p:sp>
@@ -10048,14 +10059,14 @@
           <a:noFill/>
         </p:spPr>
         <p:txBody>
-          <a:bodyPr wrap="square" lIns="0" rIns="0" tIns="0" bIns="0">
+          <a:bodyPr wrap="square" lIns="0" tIns="0" rIns="0" bIns="0">
             <a:spAutoFit/>
           </a:bodyPr>
           <a:lstStyle/>
           <a:p>
             <a:pPr algn="l"/>
             <a:r>
-              <a:rPr sz="1050" b="1" lang="zh-CN">
+              <a:rPr lang="zh-CN" sz="1050" b="1">
                 <a:solidFill>
                   <a:srgbClr val="0A0A0A"/>
                 </a:solidFill>
@@ -10084,14 +10095,14 @@
           <a:noFill/>
         </p:spPr>
         <p:txBody>
-          <a:bodyPr wrap="square" lIns="0" rIns="0" tIns="0" bIns="0">
+          <a:bodyPr wrap="square" lIns="0" tIns="0" rIns="0" bIns="0">
             <a:spAutoFit/>
           </a:bodyPr>
           <a:lstStyle/>
           <a:p>
             <a:pPr algn="l"/>
             <a:r>
-              <a:rPr sz="800" b="0" lang="zh-CN">
+              <a:rPr lang="zh-CN" sz="800" b="0">
                 <a:solidFill>
                   <a:srgbClr val="606060"/>
                 </a:solidFill>
@@ -10104,7 +10115,7 @@
           <a:p>
             <a:pPr algn="l"/>
             <a:r>
-              <a:rPr sz="1500" b="1" lang="zh-CN">
+              <a:rPr lang="zh-CN" sz="1500" b="1">
                 <a:solidFill>
                   <a:srgbClr val="1F4E79"/>
                 </a:solidFill>
@@ -10133,14 +10144,14 @@
           <a:noFill/>
         </p:spPr>
         <p:txBody>
-          <a:bodyPr wrap="square" lIns="0" rIns="0" tIns="0" bIns="0">
+          <a:bodyPr wrap="square" lIns="0" tIns="0" rIns="0" bIns="0">
             <a:spAutoFit/>
           </a:bodyPr>
           <a:lstStyle/>
           <a:p>
             <a:pPr algn="l"/>
             <a:r>
-              <a:rPr sz="800" b="0" lang="zh-CN">
+              <a:rPr lang="zh-CN" sz="800" b="0">
                 <a:solidFill>
                   <a:srgbClr val="606060"/>
                 </a:solidFill>
@@ -10153,7 +10164,7 @@
           <a:p>
             <a:pPr algn="l"/>
             <a:r>
-              <a:rPr sz="1500" b="1" lang="zh-CN">
+              <a:rPr lang="zh-CN" sz="1500" b="1">
                 <a:solidFill>
                   <a:srgbClr val="1F4E79"/>
                 </a:solidFill>
@@ -10182,14 +10193,14 @@
           <a:noFill/>
         </p:spPr>
         <p:txBody>
-          <a:bodyPr wrap="square" lIns="0" rIns="0" tIns="0" bIns="0">
+          <a:bodyPr wrap="square" lIns="0" tIns="0" rIns="0" bIns="0">
             <a:spAutoFit/>
           </a:bodyPr>
           <a:lstStyle/>
           <a:p>
             <a:pPr algn="l"/>
             <a:r>
-              <a:rPr sz="800" b="0" lang="zh-CN">
+              <a:rPr lang="zh-CN" sz="800" b="0">
                 <a:solidFill>
                   <a:srgbClr val="606060"/>
                 </a:solidFill>
@@ -10202,7 +10213,7 @@
           <a:p>
             <a:pPr algn="l"/>
             <a:r>
-              <a:rPr sz="1500" b="1" lang="zh-CN">
+              <a:rPr lang="zh-CN" sz="1500" b="1">
                 <a:solidFill>
                   <a:srgbClr val="1F4E79"/>
                 </a:solidFill>
@@ -10257,6 +10268,7 @@
           <a:lstStyle/>
           <a:p>
             <a:pPr algn="ctr"/>
+            <a:endParaRPr/>
           </a:p>
         </p:txBody>
       </p:sp>
@@ -10301,6 +10313,7 @@
           <a:lstStyle/>
           <a:p>
             <a:pPr algn="ctr"/>
+            <a:endParaRPr/>
           </a:p>
         </p:txBody>
       </p:sp>
@@ -10321,14 +10334,14 @@
           <a:noFill/>
         </p:spPr>
         <p:txBody>
-          <a:bodyPr wrap="square" lIns="0" rIns="0" tIns="0" bIns="0">
+          <a:bodyPr wrap="square" lIns="0" tIns="0" rIns="0" bIns="0">
             <a:spAutoFit/>
           </a:bodyPr>
           <a:lstStyle/>
           <a:p>
             <a:pPr algn="l"/>
             <a:r>
-              <a:rPr sz="1050" b="1" lang="zh-CN">
+              <a:rPr lang="zh-CN" sz="1050" b="1">
                 <a:solidFill>
                   <a:srgbClr val="0A0A0A"/>
                 </a:solidFill>
@@ -10357,14 +10370,14 @@
           <a:noFill/>
         </p:spPr>
         <p:txBody>
-          <a:bodyPr wrap="square" lIns="0" rIns="0" tIns="0" bIns="0">
+          <a:bodyPr wrap="square" lIns="0" tIns="0" rIns="0" bIns="0">
             <a:spAutoFit/>
           </a:bodyPr>
           <a:lstStyle/>
           <a:p>
             <a:pPr algn="l"/>
             <a:r>
-              <a:rPr sz="800" b="0" lang="zh-CN">
+              <a:rPr lang="zh-CN" sz="800" b="0">
                 <a:solidFill>
                   <a:srgbClr val="606060"/>
                 </a:solidFill>
@@ -10377,7 +10390,7 @@
           <a:p>
             <a:pPr algn="l"/>
             <a:r>
-              <a:rPr sz="1500" b="1" lang="zh-CN">
+              <a:rPr lang="zh-CN" sz="1500" b="1">
                 <a:solidFill>
                   <a:srgbClr val="1F4E79"/>
                 </a:solidFill>
@@ -10406,14 +10419,14 @@
           <a:noFill/>
         </p:spPr>
         <p:txBody>
-          <a:bodyPr wrap="square" lIns="0" rIns="0" tIns="0" bIns="0">
+          <a:bodyPr wrap="square" lIns="0" tIns="0" rIns="0" bIns="0">
             <a:spAutoFit/>
           </a:bodyPr>
           <a:lstStyle/>
           <a:p>
             <a:pPr algn="l"/>
             <a:r>
-              <a:rPr sz="800" b="0" lang="zh-CN">
+              <a:rPr lang="zh-CN" sz="800" b="0">
                 <a:solidFill>
                   <a:srgbClr val="606060"/>
                 </a:solidFill>
@@ -10426,7 +10439,7 @@
           <a:p>
             <a:pPr algn="l"/>
             <a:r>
-              <a:rPr sz="1500" b="1" lang="zh-CN">
+              <a:rPr lang="zh-CN" sz="1500" b="1">
                 <a:solidFill>
                   <a:srgbClr val="1F4E79"/>
                 </a:solidFill>
@@ -10439,7 +10452,7 @@
           <a:p>
             <a:pPr algn="l"/>
             <a:r>
-              <a:rPr sz="750" b="0" lang="zh-CN">
+              <a:rPr lang="zh-CN" sz="750" b="0">
                 <a:solidFill>
                   <a:srgbClr val="606060"/>
                 </a:solidFill>
@@ -10468,14 +10481,14 @@
           <a:noFill/>
         </p:spPr>
         <p:txBody>
-          <a:bodyPr wrap="square" lIns="0" rIns="0" tIns="0" bIns="0">
+          <a:bodyPr wrap="square" lIns="0" tIns="0" rIns="0" bIns="0">
             <a:spAutoFit/>
           </a:bodyPr>
           <a:lstStyle/>
           <a:p>
             <a:pPr algn="l"/>
             <a:r>
-              <a:rPr sz="800" b="0" lang="zh-CN">
+              <a:rPr lang="zh-CN" sz="800" b="0">
                 <a:solidFill>
                   <a:srgbClr val="606060"/>
                 </a:solidFill>
@@ -10488,7 +10501,7 @@
           <a:p>
             <a:pPr algn="l"/>
             <a:r>
-              <a:rPr sz="1500" b="1" lang="zh-CN">
+              <a:rPr lang="zh-CN" sz="1500" b="1">
                 <a:solidFill>
                   <a:srgbClr val="1F4E79"/>
                 </a:solidFill>
@@ -10541,6 +10554,7 @@
           <a:lstStyle/>
           <a:p>
             <a:pPr algn="ctr"/>
+            <a:endParaRPr/>
           </a:p>
         </p:txBody>
       </p:sp>
@@ -10585,6 +10599,7 @@
           <a:lstStyle/>
           <a:p>
             <a:pPr algn="ctr"/>
+            <a:endParaRPr/>
           </a:p>
         </p:txBody>
       </p:sp>
@@ -10605,14 +10620,14 @@
           <a:noFill/>
         </p:spPr>
         <p:txBody>
-          <a:bodyPr wrap="square" lIns="0" rIns="0" tIns="0" bIns="0">
+          <a:bodyPr wrap="square" lIns="0" tIns="0" rIns="0" bIns="0">
             <a:spAutoFit/>
           </a:bodyPr>
           <a:lstStyle/>
           <a:p>
             <a:pPr algn="l"/>
             <a:r>
-              <a:rPr sz="900" b="1" lang="zh-CN">
+              <a:rPr lang="zh-CN" sz="900" b="1">
                 <a:solidFill>
                   <a:srgbClr val="0A0A0A"/>
                 </a:solidFill>
@@ -10641,7 +10656,7 @@
           <a:noFill/>
         </p:spPr>
         <p:txBody>
-          <a:bodyPr wrap="square" lIns="0" rIns="0" tIns="0" bIns="0">
+          <a:bodyPr wrap="square" lIns="0" tIns="0" rIns="0" bIns="0">
             <a:noAutofit/>
           </a:bodyPr>
           <a:lstStyle/>
@@ -10652,7 +10667,7 @@
               </a:lnSpc>
             </a:pPr>
             <a:r>
-              <a:rPr sz="1000" b="1" lang="zh-CN">
+              <a:rPr lang="zh-CN" sz="1000" b="1">
                 <a:solidFill>
                   <a:srgbClr val="1F4E79"/>
                 </a:solidFill>
@@ -10669,7 +10684,7 @@
               </a:lnSpc>
             </a:pPr>
             <a:r>
-              <a:rPr sz="800" b="0" lang="zh-CN">
+              <a:rPr lang="zh-CN" sz="800" b="0">
                 <a:solidFill>
                   <a:srgbClr val="606060"/>
                 </a:solidFill>
@@ -10698,7 +10713,7 @@
           <a:noFill/>
         </p:spPr>
         <p:txBody>
-          <a:bodyPr wrap="square" lIns="0" rIns="0" tIns="0" bIns="0">
+          <a:bodyPr wrap="square" lIns="0" tIns="0" rIns="0" bIns="0">
             <a:noAutofit/>
           </a:bodyPr>
           <a:lstStyle/>
@@ -10709,7 +10724,7 @@
               </a:lnSpc>
             </a:pPr>
             <a:r>
-              <a:rPr sz="1000" b="1" lang="zh-CN">
+              <a:rPr lang="zh-CN" sz="1000" b="1">
                 <a:solidFill>
                   <a:srgbClr val="1F4E79"/>
                 </a:solidFill>
@@ -10726,7 +10741,7 @@
               </a:lnSpc>
             </a:pPr>
             <a:r>
-              <a:rPr sz="800" b="0" lang="zh-CN">
+              <a:rPr lang="zh-CN" sz="800" b="0">
                 <a:solidFill>
                   <a:srgbClr val="606060"/>
                 </a:solidFill>
@@ -10755,7 +10770,7 @@
           <a:noFill/>
         </p:spPr>
         <p:txBody>
-          <a:bodyPr wrap="square" lIns="0" rIns="0" tIns="0" bIns="0">
+          <a:bodyPr wrap="square" lIns="0" tIns="0" rIns="0" bIns="0">
             <a:noAutofit/>
           </a:bodyPr>
           <a:lstStyle/>
@@ -10766,7 +10781,7 @@
               </a:lnSpc>
             </a:pPr>
             <a:r>
-              <a:rPr sz="1000" b="1" lang="zh-CN">
+              <a:rPr lang="zh-CN" sz="1000" b="1">
                 <a:solidFill>
                   <a:srgbClr val="1F4E79"/>
                 </a:solidFill>
@@ -10783,7 +10798,7 @@
               </a:lnSpc>
             </a:pPr>
             <a:r>
-              <a:rPr sz="800" b="0" lang="zh-CN">
+              <a:rPr lang="zh-CN" sz="800" b="0">
                 <a:solidFill>
                   <a:srgbClr val="606060"/>
                 </a:solidFill>
@@ -10812,7 +10827,7 @@
           <a:noFill/>
         </p:spPr>
         <p:txBody>
-          <a:bodyPr wrap="square" lIns="0" rIns="0" tIns="0" bIns="0">
+          <a:bodyPr wrap="square" lIns="0" tIns="0" rIns="0" bIns="0">
             <a:noAutofit/>
           </a:bodyPr>
           <a:lstStyle/>
@@ -10823,7 +10838,7 @@
               </a:lnSpc>
             </a:pPr>
             <a:r>
-              <a:rPr sz="1000" b="1" lang="zh-CN">
+              <a:rPr lang="zh-CN" sz="1000" b="1">
                 <a:solidFill>
                   <a:srgbClr val="1F4E79"/>
                 </a:solidFill>
@@ -10840,7 +10855,7 @@
               </a:lnSpc>
             </a:pPr>
             <a:r>
-              <a:rPr sz="800" b="0" lang="zh-CN">
+              <a:rPr lang="zh-CN" sz="800" b="0">
                 <a:solidFill>
                   <a:srgbClr val="606060"/>
                 </a:solidFill>
@@ -10869,7 +10884,7 @@
           <a:noFill/>
         </p:spPr>
         <p:txBody>
-          <a:bodyPr wrap="square" lIns="0" rIns="0" tIns="0" bIns="0">
+          <a:bodyPr wrap="square" lIns="0" tIns="0" rIns="0" bIns="0">
             <a:noAutofit/>
           </a:bodyPr>
           <a:lstStyle/>
@@ -10880,7 +10895,7 @@
               </a:lnSpc>
             </a:pPr>
             <a:r>
-              <a:rPr sz="1000" b="1" lang="zh-CN">
+              <a:rPr lang="zh-CN" sz="1000" b="1">
                 <a:solidFill>
                   <a:srgbClr val="1F4E79"/>
                 </a:solidFill>
@@ -10897,7 +10912,7 @@
               </a:lnSpc>
             </a:pPr>
             <a:r>
-              <a:rPr sz="800" b="0" lang="zh-CN">
+              <a:rPr lang="zh-CN" sz="800" b="0">
                 <a:solidFill>
                   <a:srgbClr val="606060"/>
                 </a:solidFill>
@@ -10926,7 +10941,7 @@
           <a:noFill/>
         </p:spPr>
         <p:txBody>
-          <a:bodyPr wrap="square" lIns="0" rIns="0" tIns="0" bIns="0">
+          <a:bodyPr wrap="square" lIns="0" tIns="0" rIns="0" bIns="0">
             <a:noAutofit/>
           </a:bodyPr>
           <a:lstStyle/>
@@ -10937,7 +10952,7 @@
               </a:lnSpc>
             </a:pPr>
             <a:r>
-              <a:rPr sz="1000" b="1" lang="zh-CN">
+              <a:rPr lang="zh-CN" sz="1000" b="1">
                 <a:solidFill>
                   <a:srgbClr val="1F4E79"/>
                 </a:solidFill>
@@ -10954,7 +10969,7 @@
               </a:lnSpc>
             </a:pPr>
             <a:r>
-              <a:rPr sz="800" b="0" lang="zh-CN">
+              <a:rPr lang="zh-CN" sz="800" b="0">
                 <a:solidFill>
                   <a:srgbClr val="606060"/>
                 </a:solidFill>
@@ -10983,7 +10998,7 @@
           <a:noFill/>
         </p:spPr>
         <p:txBody>
-          <a:bodyPr wrap="square" lIns="0" rIns="0" tIns="0" bIns="0">
+          <a:bodyPr wrap="square" lIns="0" tIns="0" rIns="0" bIns="0">
             <a:noAutofit/>
           </a:bodyPr>
           <a:lstStyle/>
@@ -10994,7 +11009,7 @@
               </a:lnSpc>
             </a:pPr>
             <a:r>
-              <a:rPr sz="1000" b="1" lang="zh-CN">
+              <a:rPr lang="zh-CN" sz="1000" b="1">
                 <a:solidFill>
                   <a:srgbClr val="1F4E79"/>
                 </a:solidFill>
@@ -11011,7 +11026,7 @@
               </a:lnSpc>
             </a:pPr>
             <a:r>
-              <a:rPr sz="800" b="0" lang="zh-CN">
+              <a:rPr lang="zh-CN" sz="800" b="0">
                 <a:solidFill>
                   <a:srgbClr val="606060"/>
                 </a:solidFill>
@@ -11040,7 +11055,7 @@
           <a:noFill/>
         </p:spPr>
         <p:txBody>
-          <a:bodyPr wrap="square" lIns="0" rIns="0" tIns="0" bIns="0">
+          <a:bodyPr wrap="square" lIns="0" tIns="0" rIns="0" bIns="0">
             <a:noAutofit/>
           </a:bodyPr>
           <a:lstStyle/>
@@ -11051,7 +11066,7 @@
               </a:lnSpc>
             </a:pPr>
             <a:r>
-              <a:rPr sz="1000" b="1" lang="zh-CN">
+              <a:rPr lang="zh-CN" sz="1000" b="1">
                 <a:solidFill>
                   <a:srgbClr val="1F4E79"/>
                 </a:solidFill>
@@ -11068,7 +11083,7 @@
               </a:lnSpc>
             </a:pPr>
             <a:r>
-              <a:rPr sz="800" b="0" lang="zh-CN">
+              <a:rPr lang="zh-CN" sz="800" b="0">
                 <a:solidFill>
                   <a:srgbClr val="606060"/>
                 </a:solidFill>
@@ -11097,7 +11112,7 @@
           <a:noFill/>
         </p:spPr>
         <p:txBody>
-          <a:bodyPr wrap="square" lIns="0" rIns="0" tIns="0" bIns="0">
+          <a:bodyPr wrap="square" lIns="0" tIns="0" rIns="0" bIns="0">
             <a:noAutofit/>
           </a:bodyPr>
           <a:lstStyle/>
@@ -11108,7 +11123,7 @@
               </a:lnSpc>
             </a:pPr>
             <a:r>
-              <a:rPr sz="1000" b="1" lang="zh-CN">
+              <a:rPr lang="zh-CN" sz="1000" b="1">
                 <a:solidFill>
                   <a:srgbClr val="1F4E79"/>
                 </a:solidFill>
@@ -11125,7 +11140,7 @@
               </a:lnSpc>
             </a:pPr>
             <a:r>
-              <a:rPr sz="800" b="0" lang="zh-CN">
+              <a:rPr lang="zh-CN" sz="800" b="0">
                 <a:solidFill>
                   <a:srgbClr val="606060"/>
                 </a:solidFill>
@@ -11154,7 +11169,7 @@
           <a:noFill/>
         </p:spPr>
         <p:txBody>
-          <a:bodyPr wrap="square" lIns="0" rIns="0" tIns="0" bIns="0">
+          <a:bodyPr wrap="square" lIns="0" tIns="0" rIns="0" bIns="0">
             <a:noAutofit/>
           </a:bodyPr>
           <a:lstStyle/>
@@ -11165,7 +11180,7 @@
               </a:lnSpc>
             </a:pPr>
             <a:r>
-              <a:rPr sz="1000" b="1" lang="zh-CN">
+              <a:rPr lang="zh-CN" sz="1000" b="1">
                 <a:solidFill>
                   <a:srgbClr val="1F4E79"/>
                 </a:solidFill>
@@ -11182,7 +11197,7 @@
               </a:lnSpc>
             </a:pPr>
             <a:r>
-              <a:rPr sz="800" b="0" lang="zh-CN">
+              <a:rPr lang="zh-CN" sz="800" b="0">
                 <a:solidFill>
                   <a:srgbClr val="606060"/>
                 </a:solidFill>
@@ -11211,7 +11226,7 @@
           <a:noFill/>
         </p:spPr>
         <p:txBody>
-          <a:bodyPr wrap="square" lIns="0" rIns="0" tIns="0" bIns="0">
+          <a:bodyPr wrap="square" lIns="0" tIns="0" rIns="0" bIns="0">
             <a:noAutofit/>
           </a:bodyPr>
           <a:lstStyle/>
@@ -11222,7 +11237,7 @@
               </a:lnSpc>
             </a:pPr>
             <a:r>
-              <a:rPr sz="1000" b="1" lang="zh-CN">
+              <a:rPr lang="zh-CN" sz="1000" b="1">
                 <a:solidFill>
                   <a:srgbClr val="1F4E79"/>
                 </a:solidFill>
@@ -11239,7 +11254,7 @@
               </a:lnSpc>
             </a:pPr>
             <a:r>
-              <a:rPr sz="800" b="0" lang="zh-CN">
+              <a:rPr lang="zh-CN" sz="800" b="0">
                 <a:solidFill>
                   <a:srgbClr val="606060"/>
                 </a:solidFill>
@@ -11268,7 +11283,7 @@
           <a:noFill/>
         </p:spPr>
         <p:txBody>
-          <a:bodyPr wrap="square" lIns="0" rIns="0" tIns="0" bIns="0">
+          <a:bodyPr wrap="square" lIns="0" tIns="0" rIns="0" bIns="0">
             <a:noAutofit/>
           </a:bodyPr>
           <a:lstStyle/>
@@ -11279,7 +11294,7 @@
               </a:lnSpc>
             </a:pPr>
             <a:r>
-              <a:rPr sz="1000" b="1" lang="zh-CN">
+              <a:rPr lang="zh-CN" sz="1000" b="1">
                 <a:solidFill>
                   <a:srgbClr val="1F4E79"/>
                 </a:solidFill>
@@ -11296,7 +11311,7 @@
               </a:lnSpc>
             </a:pPr>
             <a:r>
-              <a:rPr sz="800" b="0" lang="zh-CN">
+              <a:rPr lang="zh-CN" sz="800" b="0">
                 <a:solidFill>
                   <a:srgbClr val="606060"/>
                 </a:solidFill>
@@ -11325,7 +11340,7 @@
           <a:noFill/>
         </p:spPr>
         <p:txBody>
-          <a:bodyPr wrap="square" lIns="0" rIns="0" tIns="0" bIns="0">
+          <a:bodyPr wrap="square" lIns="0" tIns="0" rIns="0" bIns="0">
             <a:noAutofit/>
           </a:bodyPr>
           <a:lstStyle/>
@@ -11336,7 +11351,7 @@
               </a:lnSpc>
             </a:pPr>
             <a:r>
-              <a:rPr sz="1000" b="1" lang="zh-CN">
+              <a:rPr lang="zh-CN" sz="1000" b="1">
                 <a:solidFill>
                   <a:srgbClr val="1F4E79"/>
                 </a:solidFill>
@@ -11353,7 +11368,7 @@
               </a:lnSpc>
             </a:pPr>
             <a:r>
-              <a:rPr sz="800" b="0" lang="zh-CN">
+              <a:rPr lang="zh-CN" sz="800" b="0">
                 <a:solidFill>
                   <a:srgbClr val="606060"/>
                 </a:solidFill>
@@ -11382,7 +11397,7 @@
           <a:noFill/>
         </p:spPr>
         <p:txBody>
-          <a:bodyPr wrap="square" lIns="0" rIns="0" tIns="0" bIns="0">
+          <a:bodyPr wrap="square" lIns="0" tIns="0" rIns="0" bIns="0">
             <a:noAutofit/>
           </a:bodyPr>
           <a:lstStyle/>
@@ -11393,7 +11408,7 @@
               </a:lnSpc>
             </a:pPr>
             <a:r>
-              <a:rPr sz="1000" b="1" lang="zh-CN">
+              <a:rPr lang="zh-CN" sz="1000" b="1">
                 <a:solidFill>
                   <a:srgbClr val="1F4E79"/>
                 </a:solidFill>
@@ -11410,7 +11425,7 @@
               </a:lnSpc>
             </a:pPr>
             <a:r>
-              <a:rPr sz="800" b="0" lang="zh-CN">
+              <a:rPr lang="zh-CN" sz="800" b="0">
                 <a:solidFill>
                   <a:srgbClr val="606060"/>
                 </a:solidFill>
@@ -11501,8 +11516,8 @@
         </p:nvSpPr>
         <p:spPr>
           <a:xfrm>
-            <a:off x="600015" y="214702"/>
-            <a:ext cx="8890000" cy="355600"/>
+            <a:off x="603504" y="210312"/>
+            <a:ext cx="8887968" cy="356616"/>
           </a:xfrm>
           <a:prstGeom prst="rect">
             <a:avLst/>
@@ -11522,7 +11537,7 @@
               </a:lnSpc>
             </a:pPr>
             <a:r>
-              <a:rPr lang="en-US" altLang="zh-CN" sz="2000" b="1" noProof="1">
+              <a:rPr lang="zh-CN" altLang="zh-CN" sz="2000" b="1" noProof="1">
                 <a:solidFill>
                   <a:srgbClr val="0A0A0A"/>
                 </a:solidFill>
@@ -11552,8 +11567,8 @@
         </p:nvSpPr>
         <p:spPr>
           <a:xfrm>
-            <a:off x="511115" y="570302"/>
-            <a:ext cx="10901632" cy="438133"/>
+            <a:off x="512064" y="585216"/>
+            <a:ext cx="10899648" cy="438912"/>
           </a:xfrm>
           <a:prstGeom prst="rect">
             <a:avLst/>
@@ -11572,7 +11587,7 @@
               </a:lnSpc>
             </a:pPr>
             <a:r>
-              <a:rPr lang="en-US" altLang="zh-CN" sz="1800" noProof="1">
+              <a:rPr lang="zh-CN" altLang="zh-CN" sz="1800" noProof="1">
                 <a:solidFill>
                   <a:srgbClr val="606060"/>
                 </a:solidFill>
@@ -16511,8 +16526,8 @@
         </p:nvSpPr>
         <p:spPr>
           <a:xfrm>
-            <a:off x="600015" y="214702"/>
-            <a:ext cx="8890000" cy="355600"/>
+            <a:off x="603504" y="210312"/>
+            <a:ext cx="8887968" cy="356616"/>
           </a:xfrm>
           <a:prstGeom prst="rect">
             <a:avLst/>
@@ -16528,7 +16543,7 @@
           <a:p>
             <a:pPr marL="0" marR="0" lvl="0" indent="0" algn="l" defTabSz="914400" rtl="0" eaLnBrk="1" fontAlgn="auto" latinLnBrk="0" hangingPunct="1">
               <a:lnSpc>
-                <a:spcPct val="100000"/>
+                <a:spcPct val="130000"/>
               </a:lnSpc>
               <a:spcBef>
                 <a:spcPts val="0"/>
@@ -16547,7 +16562,7 @@
               </a:defRPr>
             </a:pPr>
             <a:r>
-              <a:rPr kumimoji="0" lang="en-US" altLang="zh-CN" sz="2000" b="1" i="0" u="none" strike="noStrike" kern="1200" cap="none" spc="0" normalizeH="0" baseline="0" noProof="1">
+              <a:rPr kumimoji="0" lang="zh-CN" altLang="zh-CN" sz="2000" b="1" i="0" u="none" strike="noStrike" kern="1200" cap="none" spc="0" normalizeH="0" baseline="0" noProof="1">
                 <a:ln>
                   <a:noFill/>
                 </a:ln>
@@ -19924,8 +19939,8 @@
         </p:nvSpPr>
         <p:spPr>
           <a:xfrm>
-            <a:off x="512064" y="566928"/>
-            <a:ext cx="11155680" cy="274320"/>
+            <a:off x="512064" y="585216"/>
+            <a:ext cx="10899648" cy="438912"/>
           </a:xfrm>
           <a:prstGeom prst="rect">
             <a:avLst/>
@@ -19940,7 +19955,7 @@
           <a:p>
             <a:pPr marL="0" marR="0" lvl="0" indent="0" algn="l" defTabSz="914400" rtl="0" eaLnBrk="1" fontAlgn="auto" latinLnBrk="0" hangingPunct="1">
               <a:lnSpc>
-                <a:spcPct val="100000"/>
+                <a:spcPct val="140000"/>
               </a:lnSpc>
               <a:spcBef>
                 <a:spcPts val="0"/>
@@ -19959,89 +19974,14 @@
               </a:defRPr>
             </a:pPr>
             <a:r>
-              <a:rPr kumimoji="0" sz="1100" b="0" i="0" u="none" strike="noStrike" kern="1200" cap="none" spc="0" normalizeH="0" baseline="0" noProof="0" dirty="0">
-                <a:ln>
-                  <a:noFill/>
-                </a:ln>
+              <a:rPr sz="1800" lang="zh-CN">
                 <a:solidFill>
                   <a:srgbClr val="606060"/>
                 </a:solidFill>
-                <a:effectLst/>
-                <a:uLnTx/>
-                <a:uFillTx/>
                 <a:latin typeface="微软雅黑"/>
                 <a:ea typeface="微软雅黑"/>
-                <a:cs typeface="+mn-cs"/>
               </a:rPr>
-              <a:t>OOT 样本对比：1,519 </a:t>
-            </a:r>
-            <a:r>
-              <a:rPr kumimoji="0" sz="1100" b="0" i="0" u="none" strike="noStrike" kern="1200" cap="none" spc="0" normalizeH="0" baseline="0" noProof="0" dirty="0" err="1">
-                <a:ln>
-                  <a:noFill/>
-                </a:ln>
-                <a:solidFill>
-                  <a:srgbClr val="606060"/>
-                </a:solidFill>
-                <a:effectLst/>
-                <a:uLnTx/>
-                <a:uFillTx/>
-                <a:latin typeface="微软雅黑"/>
-                <a:ea typeface="微软雅黑"/>
-                <a:cs typeface="+mn-cs"/>
-              </a:rPr>
-              <a:t>个申请</a:t>
-            </a:r>
-            <a:r>
-              <a:rPr kumimoji="0" sz="1100" b="0" i="0" u="none" strike="noStrike" kern="1200" cap="none" spc="0" normalizeH="0" baseline="0" noProof="0" dirty="0">
-                <a:ln>
-                  <a:noFill/>
-                </a:ln>
-                <a:solidFill>
-                  <a:srgbClr val="606060"/>
-                </a:solidFill>
-                <a:effectLst/>
-                <a:uLnTx/>
-                <a:uFillTx/>
-                <a:latin typeface="微软雅黑"/>
-                <a:ea typeface="微软雅黑"/>
-                <a:cs typeface="+mn-cs"/>
-              </a:rPr>
-              <a:t> case ｜ 1,958,480 </a:t>
-            </a:r>
-            <a:r>
-              <a:rPr kumimoji="0" sz="1100" b="0" i="0" u="none" strike="noStrike" kern="1200" cap="none" spc="0" normalizeH="0" baseline="0" noProof="0" dirty="0" err="1">
-                <a:ln>
-                  <a:noFill/>
-                </a:ln>
-                <a:solidFill>
-                  <a:srgbClr val="606060"/>
-                </a:solidFill>
-                <a:effectLst/>
-                <a:uLnTx/>
-                <a:uFillTx/>
-                <a:latin typeface="微软雅黑"/>
-                <a:ea typeface="微软雅黑"/>
-                <a:cs typeface="+mn-cs"/>
-              </a:rPr>
-              <a:t>条交易</a:t>
-            </a:r>
-            <a:r>
-              <a:rPr kumimoji="0" sz="1100" b="0" i="0" u="none" strike="noStrike" kern="1200" cap="none" spc="0" normalizeH="0" baseline="0" noProof="0" dirty="0">
-                <a:ln>
-                  <a:noFill/>
-                </a:ln>
-                <a:solidFill>
-                  <a:srgbClr val="606060"/>
-                </a:solidFill>
-                <a:effectLst/>
-                <a:uLnTx/>
-                <a:uFillTx/>
-                <a:latin typeface="微软雅黑"/>
-                <a:ea typeface="微软雅黑"/>
-                <a:cs typeface="+mn-cs"/>
-              </a:rPr>
-              <a:t> ｜ 2026/07/27–2026/07/31</a:t>
+              <a:t>OOT 样本对比：1,519 申请 ｜ 1,958,480 交易</a:t>
             </a:r>
           </a:p>
         </p:txBody>
@@ -22903,6 +22843,7 @@
           <a:lstStyle/>
           <a:p>
             <a:pPr algn="ctr"/>
+            <a:endParaRPr/>
           </a:p>
         </p:txBody>
       </p:sp>
@@ -22951,6 +22892,7 @@
           <a:lstStyle/>
           <a:p>
             <a:pPr algn="ctr"/>
+            <a:endParaRPr/>
           </a:p>
         </p:txBody>
       </p:sp>
@@ -22971,14 +22913,14 @@
           <a:noFill/>
         </p:spPr>
         <p:txBody>
-          <a:bodyPr wrap="none" lIns="0" rIns="0" tIns="0" bIns="0">
+          <a:bodyPr wrap="none" lIns="0" tIns="0" rIns="0" bIns="0">
             <a:noAutofit/>
           </a:bodyPr>
           <a:lstStyle/>
           <a:p>
             <a:pPr algn="l"/>
             <a:r>
-              <a:rPr sz="900" b="1" lang="zh-CN">
+              <a:rPr lang="zh-CN" sz="900" b="1">
                 <a:solidFill>
                   <a:srgbClr val="1F4E79"/>
                 </a:solidFill>
@@ -22991,7 +22933,7 @@
           <a:p>
             <a:pPr algn="l"/>
             <a:r>
-              <a:rPr sz="800" b="0" lang="zh-CN">
+              <a:rPr lang="zh-CN" sz="800" b="0">
                 <a:solidFill>
                   <a:srgbClr val="606060"/>
                 </a:solidFill>
@@ -23020,14 +22962,14 @@
           <a:noFill/>
         </p:spPr>
         <p:txBody>
-          <a:bodyPr wrap="none" lIns="0" rIns="0" tIns="0" bIns="0">
+          <a:bodyPr wrap="none" lIns="0" tIns="0" rIns="0" bIns="0">
             <a:noAutofit/>
           </a:bodyPr>
           <a:lstStyle/>
           <a:p>
             <a:pPr algn="r"/>
             <a:r>
-              <a:rPr sz="900" b="1" lang="zh-CN">
+              <a:rPr lang="zh-CN" sz="900" b="1">
                 <a:solidFill>
                   <a:srgbClr val="D6A000"/>
                 </a:solidFill>
@@ -23040,7 +22982,7 @@
           <a:p>
             <a:pPr algn="r"/>
             <a:r>
-              <a:rPr sz="800" b="0" lang="zh-CN">
+              <a:rPr lang="zh-CN" sz="800" b="0">
                 <a:solidFill>
                   <a:srgbClr val="606060"/>
                 </a:solidFill>
@@ -23069,14 +23011,14 @@
           <a:noFill/>
         </p:spPr>
         <p:txBody>
-          <a:bodyPr wrap="none" lIns="0" rIns="0" tIns="0" bIns="0">
+          <a:bodyPr wrap="none" lIns="0" tIns="0" rIns="0" bIns="0">
             <a:spAutoFit/>
           </a:bodyPr>
           <a:lstStyle/>
           <a:p>
             <a:pPr algn="ctr"/>
             <a:r>
-              <a:rPr sz="1100" b="1" lang="zh-CN">
+              <a:rPr lang="zh-CN" sz="1100" b="1">
                 <a:solidFill>
                   <a:srgbClr val="0A0A0A"/>
                 </a:solidFill>
@@ -23105,14 +23047,14 @@
           <a:noFill/>
         </p:spPr>
         <p:txBody>
-          <a:bodyPr wrap="none" lIns="0" rIns="0" tIns="0" bIns="0">
+          <a:bodyPr wrap="none" lIns="0" tIns="0" rIns="0" bIns="0">
             <a:spAutoFit/>
           </a:bodyPr>
           <a:lstStyle/>
           <a:p>
             <a:pPr algn="ctr"/>
             <a:r>
-              <a:rPr sz="1100" b="1" lang="zh-CN">
+              <a:rPr lang="zh-CN" sz="1100" b="1">
                 <a:solidFill>
                   <a:srgbClr val="0A0A0A"/>
                 </a:solidFill>
@@ -23141,14 +23083,14 @@
           <a:noFill/>
         </p:spPr>
         <p:txBody>
-          <a:bodyPr wrap="none" lIns="0" rIns="0" tIns="0" bIns="0">
+          <a:bodyPr wrap="none" lIns="0" tIns="0" rIns="0" bIns="0">
             <a:spAutoFit/>
           </a:bodyPr>
           <a:lstStyle/>
           <a:p>
             <a:pPr algn="ctr"/>
             <a:r>
-              <a:rPr sz="1200" b="1" lang="zh-CN">
+              <a:rPr lang="zh-CN" sz="1200" b="1">
                 <a:solidFill>
                   <a:srgbClr val="1F4E79"/>
                 </a:solidFill>
@@ -23177,14 +23119,14 @@
           <a:noFill/>
         </p:spPr>
         <p:txBody>
-          <a:bodyPr wrap="none" lIns="0" rIns="0" tIns="0" bIns="0">
+          <a:bodyPr wrap="none" lIns="0" tIns="0" rIns="0" bIns="0">
             <a:spAutoFit/>
           </a:bodyPr>
           <a:lstStyle/>
           <a:p>
             <a:pPr algn="ctr"/>
             <a:r>
-              <a:rPr sz="750" b="0" lang="zh-CN">
+              <a:rPr lang="zh-CN" sz="750" b="0">
                 <a:solidFill>
                   <a:srgbClr val="606060"/>
                 </a:solidFill>

--- a/银行流水分享_V1.8.pptx
+++ b/银行流水分享_V1.8.pptx
@@ -11437,6 +11437,138 @@
           </a:p>
         </p:txBody>
       </p:sp>
+      <p:sp>
+        <p:nvSpPr>
+          <p:cNvPr id="48" name="s2-bar"/>
+          <p:cNvSpPr/>
+          <p:nvPr/>
+        </p:nvSpPr>
+        <p:spPr>
+          <a:xfrm>
+            <a:off x="393192" y="1115568"/>
+            <a:ext cx="73152" cy="228600"/>
+          </a:xfrm>
+          <a:prstGeom prst="rect">
+            <a:avLst/>
+          </a:prstGeom>
+          <a:solidFill>
+            <a:srgbClr val="D6A000"/>
+          </a:solidFill>
+          <a:ln>
+            <a:noFill/>
+          </a:ln>
+          <a:effectLst/>
+        </p:spPr>
+        <p:style>
+          <a:lnRef idx="1">
+            <a:schemeClr val="accent1"/>
+          </a:lnRef>
+          <a:fillRef idx="3">
+            <a:schemeClr val="accent1"/>
+          </a:fillRef>
+          <a:effectRef idx="2">
+            <a:schemeClr val="accent1"/>
+          </a:effectRef>
+          <a:fontRef idx="minor">
+            <a:schemeClr val="lt1"/>
+          </a:fontRef>
+        </p:style>
+        <p:txBody>
+          <a:bodyPr rtlCol="0" anchor="ctr"/>
+          <a:lstStyle/>
+          <a:p>
+            <a:pPr algn="ctr"/>
+          </a:p>
+        </p:txBody>
+      </p:sp>
+      <p:sp>
+        <p:nvSpPr>
+          <p:cNvPr id="49" name="s2-bar"/>
+          <p:cNvSpPr/>
+          <p:nvPr/>
+        </p:nvSpPr>
+        <p:spPr>
+          <a:xfrm>
+            <a:off x="393192" y="2523744"/>
+            <a:ext cx="73152" cy="228600"/>
+          </a:xfrm>
+          <a:prstGeom prst="rect">
+            <a:avLst/>
+          </a:prstGeom>
+          <a:solidFill>
+            <a:srgbClr val="D6A000"/>
+          </a:solidFill>
+          <a:ln>
+            <a:noFill/>
+          </a:ln>
+          <a:effectLst/>
+        </p:spPr>
+        <p:style>
+          <a:lnRef idx="1">
+            <a:schemeClr val="accent1"/>
+          </a:lnRef>
+          <a:fillRef idx="3">
+            <a:schemeClr val="accent1"/>
+          </a:fillRef>
+          <a:effectRef idx="2">
+            <a:schemeClr val="accent1"/>
+          </a:effectRef>
+          <a:fontRef idx="minor">
+            <a:schemeClr val="lt1"/>
+          </a:fontRef>
+        </p:style>
+        <p:txBody>
+          <a:bodyPr rtlCol="0" anchor="ctr"/>
+          <a:lstStyle/>
+          <a:p>
+            <a:pPr algn="ctr"/>
+          </a:p>
+        </p:txBody>
+      </p:sp>
+      <p:sp>
+        <p:nvSpPr>
+          <p:cNvPr id="50" name="s2-bar"/>
+          <p:cNvSpPr/>
+          <p:nvPr/>
+        </p:nvSpPr>
+        <p:spPr>
+          <a:xfrm>
+            <a:off x="393192" y="3986784"/>
+            <a:ext cx="73152" cy="228600"/>
+          </a:xfrm>
+          <a:prstGeom prst="rect">
+            <a:avLst/>
+          </a:prstGeom>
+          <a:solidFill>
+            <a:srgbClr val="D6A000"/>
+          </a:solidFill>
+          <a:ln>
+            <a:noFill/>
+          </a:ln>
+          <a:effectLst/>
+        </p:spPr>
+        <p:style>
+          <a:lnRef idx="1">
+            <a:schemeClr val="accent1"/>
+          </a:lnRef>
+          <a:fillRef idx="3">
+            <a:schemeClr val="accent1"/>
+          </a:fillRef>
+          <a:effectRef idx="2">
+            <a:schemeClr val="accent1"/>
+          </a:effectRef>
+          <a:fontRef idx="minor">
+            <a:schemeClr val="lt1"/>
+          </a:fontRef>
+        </p:style>
+        <p:txBody>
+          <a:bodyPr rtlCol="0" anchor="ctr"/>
+          <a:lstStyle/>
+          <a:p>
+            <a:pPr algn="ctr"/>
+          </a:p>
+        </p:txBody>
+      </p:sp>
     </p:spTree>
     <p:extLst>
       <p:ext uri="{BB962C8B-B14F-4D97-AF65-F5344CB8AC3E}">

--- a/银行流水分享_V1.8.pptx
+++ b/银行流水分享_V1.8.pptx
@@ -7122,7 +7122,7 @@
                           <a:ea typeface="微软雅黑" panose="020B0503020204020204" pitchFamily="34" charset="-122"/>
                           <a:cs typeface="+mn-cs"/>
                         </a:rPr>
-                        <a:t>BILL PAY Fair Go Finance DT.58oa72 SACC 239</a:t>
+                        <a:t>BILL PAY FAIR GO FINANCE REF 58OA72 SACC 239</a:t>
                       </a:r>
                     </a:p>
                   </a:txBody>
@@ -7305,7 +7305,7 @@
                           <a:ea typeface="微软雅黑" panose="020B0503020204020204" pitchFamily="34" charset="-122"/>
                           <a:cs typeface="+mn-cs"/>
                         </a:rPr>
-                        <a:t>MCDONALDS BRISBANE</a:t>
+                        <a:t>MCDONALDS BRISBANE QLD</a:t>
                       </a:r>
                     </a:p>
                   </a:txBody>
@@ -7488,7 +7488,7 @@
                           <a:ea typeface="微软雅黑" panose="020B0503020204020204" pitchFamily="34" charset="-122"/>
                           <a:cs typeface="+mn-cs"/>
                         </a:rPr>
-                        <a:t>CHEMIST WAREHOUSE 123</a:t>
+                        <a:t>CHEMIST WAREHOUSE STORE 123</a:t>
                       </a:r>
                     </a:p>
                   </a:txBody>
@@ -7671,7 +7671,7 @@
                           <a:ea typeface="微软雅黑" panose="020B0503020204020204" pitchFamily="34" charset="-122"/>
                           <a:cs typeface="+mn-cs"/>
                         </a:rPr>
-                        <a:t>AMZNPRIMEA*</a:t>
+                        <a:t>AMZNPRIMEA*4V3KQ</a:t>
                       </a:r>
                     </a:p>
                   </a:txBody>
@@ -7854,7 +7854,7 @@
                           <a:ea typeface="微软雅黑" panose="020B0503020204020204" pitchFamily="34" charset="-122"/>
                           <a:cs typeface="+mn-cs"/>
                         </a:rPr>
-                        <a:t>PAYROLL ACME PTY LTD</a:t>
+                        <a:t>SALARY ACME PTY LTD</a:t>
                       </a:r>
                     </a:p>
                   </a:txBody>
@@ -8333,7 +8333,7 @@
                           <a:ea typeface="微软雅黑" panose="020B0503020204020204" pitchFamily="34" charset="-122"/>
                           <a:cs typeface="+mn-cs"/>
                         </a:rPr>
-                        <a:t>BILL PAY Fair Go Finance DT.58oa72 SACC 239</a:t>
+                        <a:t>BILL PAY FAIR GO FINANCE REF 58OA72 SACC 239</a:t>
                       </a:r>
                     </a:p>
                   </a:txBody>
@@ -8665,7 +8665,7 @@
                           <a:ea typeface="微软雅黑" panose="020B0503020204020204" pitchFamily="34" charset="-122"/>
                           <a:cs typeface="+mn-cs"/>
                         </a:rPr>
-                        <a:t>MCDONALDS BRISBANE</a:t>
+                        <a:t>MCDONALDS BRISBANE QLD</a:t>
                       </a:r>
                     </a:p>
                   </a:txBody>
@@ -8989,7 +8989,7 @@
                           <a:ea typeface="微软雅黑" panose="020B0503020204020204" pitchFamily="34" charset="-122"/>
                           <a:cs typeface="+mn-cs"/>
                         </a:rPr>
-                        <a:t>CHEMIST WAREHOUSE 123</a:t>
+                        <a:t>CHEMIST WAREHOUSE STORE 123</a:t>
                       </a:r>
                     </a:p>
                   </a:txBody>
@@ -9321,7 +9321,7 @@
                           <a:ea typeface="微软雅黑" panose="020B0503020204020204" pitchFamily="34" charset="-122"/>
                           <a:cs typeface="+mn-cs"/>
                         </a:rPr>
-                        <a:t>AMZNPRIMEA*</a:t>
+                        <a:t>AMZNPRIMEA*4V3KQ</a:t>
                       </a:r>
                     </a:p>
                   </a:txBody>
@@ -9645,7 +9645,7 @@
                           <a:ea typeface="微软雅黑" panose="020B0503020204020204" pitchFamily="34" charset="-122"/>
                           <a:cs typeface="+mn-cs"/>
                         </a:rPr>
-                        <a:t>PAYROLL ACME PTY LTD</a:t>
+                        <a:t>SALARY ACME PTY LTD</a:t>
                       </a:r>
                     </a:p>
                   </a:txBody>

--- a/银行流水分享_V1.8.pptx
+++ b/银行流水分享_V1.8.pptx
@@ -8107,7 +8107,7 @@
                       <a:r>
                         <a:rPr sz="800" b="1" dirty="0" err="1">
                           <a:solidFill>
-                            <a:srgbClr val="0A0A0A"/>
+                            <a:srgbClr val="D6A000"/>
                           </a:solidFill>
                           <a:latin typeface="微软雅黑"/>
                           <a:ea typeface="微软雅黑"/>
@@ -8150,7 +8150,7 @@
                       <a:r>
                         <a:rPr sz="800" b="1" dirty="0" err="1">
                           <a:solidFill>
-                            <a:srgbClr val="0A0A0A"/>
+                            <a:srgbClr val="D6A000"/>
                           </a:solidFill>
                           <a:latin typeface="微软雅黑"/>
                           <a:ea typeface="微软雅黑"/>
@@ -8197,7 +8197,7 @@
                       <a:r>
                         <a:rPr sz="800" b="1">
                           <a:solidFill>
-                            <a:srgbClr val="0A0A0A"/>
+                            <a:srgbClr val="D6A000"/>
                           </a:solidFill>
                           <a:latin typeface="微软雅黑"/>
                           <a:ea typeface="微软雅黑"/>
@@ -8237,7 +8237,7 @@
                       <a:r>
                         <a:rPr sz="800" b="1">
                           <a:solidFill>
-                            <a:srgbClr val="0A0A0A"/>
+                            <a:srgbClr val="D6A000"/>
                           </a:solidFill>
                           <a:latin typeface="微软雅黑"/>
                           <a:ea typeface="微软雅黑"/>

--- a/银行流水分享_V1.8.pptx
+++ b/银行流水分享_V1.8.pptx
@@ -7122,7 +7122,7 @@
                           <a:ea typeface="微软雅黑" panose="020B0503020204020204" pitchFamily="34" charset="-122"/>
                           <a:cs typeface="+mn-cs"/>
                         </a:rPr>
-                        <a:t>BILL PAY FAIR GO FINANCE REF 58OA72 SACC 239</a:t>
+                        <a:t>BPAY FAIR GO FINANCE BILLER 354127 REF 5837201937</a:t>
                       </a:r>
                     </a:p>
                   </a:txBody>
@@ -7305,7 +7305,7 @@
                           <a:ea typeface="微软雅黑" panose="020B0503020204020204" pitchFamily="34" charset="-122"/>
                           <a:cs typeface="+mn-cs"/>
                         </a:rPr>
-                        <a:t>MCDONALDS BRISBANE QLD</a:t>
+                        <a:t>MCDONALDS BRISBANE QLD STORE 006123</a:t>
                       </a:r>
                     </a:p>
                   </a:txBody>
@@ -7488,7 +7488,7 @@
                           <a:ea typeface="微软雅黑" panose="020B0503020204020204" pitchFamily="34" charset="-122"/>
                           <a:cs typeface="+mn-cs"/>
                         </a:rPr>
-                        <a:t>CHEMIST WAREHOUSE STORE 123</a:t>
+                        <a:t>CHEMIST WAREHOUSE BRISBANE STORE 123</a:t>
                       </a:r>
                     </a:p>
                   </a:txBody>
@@ -7671,7 +7671,7 @@
                           <a:ea typeface="微软雅黑" panose="020B0503020204020204" pitchFamily="34" charset="-122"/>
                           <a:cs typeface="+mn-cs"/>
                         </a:rPr>
-                        <a:t>AMZNPRIMEA*4V3KQ</a:t>
+                        <a:t>AMZNPRIMEA*4V3KQ AMAZON.COM.AU</a:t>
                       </a:r>
                     </a:p>
                   </a:txBody>
@@ -7854,7 +7854,7 @@
                           <a:ea typeface="微软雅黑" panose="020B0503020204020204" pitchFamily="34" charset="-122"/>
                           <a:cs typeface="+mn-cs"/>
                         </a:rPr>
-                        <a:t>SALARY ACME PTY LTD</a:t>
+                        <a:t>WAGES ACME PTY LTD FORTNIGHTLY PAY</a:t>
                       </a:r>
                     </a:p>
                   </a:txBody>
@@ -8333,7 +8333,7 @@
                           <a:ea typeface="微软雅黑" panose="020B0503020204020204" pitchFamily="34" charset="-122"/>
                           <a:cs typeface="+mn-cs"/>
                         </a:rPr>
-                        <a:t>BILL PAY FAIR GO FINANCE REF 58OA72 SACC 239</a:t>
+                        <a:t>BPAY FAIR GO FINANCE BILLER 354127 REF 5837201937</a:t>
                       </a:r>
                     </a:p>
                   </a:txBody>
@@ -8665,7 +8665,7 @@
                           <a:ea typeface="微软雅黑" panose="020B0503020204020204" pitchFamily="34" charset="-122"/>
                           <a:cs typeface="+mn-cs"/>
                         </a:rPr>
-                        <a:t>MCDONALDS BRISBANE QLD</a:t>
+                        <a:t>MCDONALDS BRISBANE QLD STORE 006123</a:t>
                       </a:r>
                     </a:p>
                   </a:txBody>
@@ -8989,7 +8989,7 @@
                           <a:ea typeface="微软雅黑" panose="020B0503020204020204" pitchFamily="34" charset="-122"/>
                           <a:cs typeface="+mn-cs"/>
                         </a:rPr>
-                        <a:t>CHEMIST WAREHOUSE STORE 123</a:t>
+                        <a:t>CHEMIST WAREHOUSE BRISBANE STORE 123</a:t>
                       </a:r>
                     </a:p>
                   </a:txBody>
@@ -9321,7 +9321,7 @@
                           <a:ea typeface="微软雅黑" panose="020B0503020204020204" pitchFamily="34" charset="-122"/>
                           <a:cs typeface="+mn-cs"/>
                         </a:rPr>
-                        <a:t>AMZNPRIMEA*4V3KQ</a:t>
+                        <a:t>AMZNPRIMEA*4V3KQ AMAZON.COM.AU</a:t>
                       </a:r>
                     </a:p>
                   </a:txBody>
@@ -9645,7 +9645,7 @@
                           <a:ea typeface="微软雅黑" panose="020B0503020204020204" pitchFamily="34" charset="-122"/>
                           <a:cs typeface="+mn-cs"/>
                         </a:rPr>
-                        <a:t>SALARY ACME PTY LTD</a:t>
+                        <a:t>WAGES ACME PTY LTD FORTNIGHTLY PAY</a:t>
                       </a:r>
                     </a:p>
                   </a:txBody>

--- a/银行流水分享_V1.8.pptx
+++ b/银行流水分享_V1.8.pptx
@@ -20071,8 +20071,8 @@
         </p:nvSpPr>
         <p:spPr>
           <a:xfrm>
-            <a:off x="512064" y="585216"/>
-            <a:ext cx="10899648" cy="438912"/>
+            <a:off x="512064" y="4206240"/>
+            <a:ext cx="4023360" cy="292608"/>
           </a:xfrm>
           <a:prstGeom prst="rect">
             <a:avLst/>
@@ -20087,7 +20087,7 @@
           <a:p>
             <a:pPr marL="0" marR="0" lvl="0" indent="0" algn="l" defTabSz="914400" rtl="0" eaLnBrk="1" fontAlgn="auto" latinLnBrk="0" hangingPunct="1">
               <a:lnSpc>
-                <a:spcPct val="140000"/>
+                <a:spcPct val="100000"/>
               </a:lnSpc>
               <a:spcBef>
                 <a:spcPts val="0"/>
@@ -20106,7 +20106,7 @@
               </a:defRPr>
             </a:pPr>
             <a:r>
-              <a:rPr sz="1800" lang="zh-CN">
+              <a:rPr sz="1200" lang="zh-CN" b="0">
                 <a:solidFill>
                   <a:srgbClr val="606060"/>
                 </a:solidFill>
@@ -20265,7 +20265,7 @@
         </p:nvSpPr>
         <p:spPr>
           <a:xfrm>
-            <a:off x="429767" y="4242816"/>
+            <a:off x="429767" y="4572000"/>
             <a:ext cx="1298448" cy="914400"/>
           </a:xfrm>
           <a:prstGeom prst="rect">
@@ -20342,7 +20342,7 @@
         </p:nvSpPr>
         <p:spPr>
           <a:xfrm>
-            <a:off x="429767" y="4242816"/>
+            <a:off x="429767" y="4572000"/>
             <a:ext cx="1298448" cy="54864"/>
           </a:xfrm>
           <a:prstGeom prst="rect">
@@ -20419,7 +20419,7 @@
         </p:nvSpPr>
         <p:spPr>
           <a:xfrm>
-            <a:off x="429767" y="4370832"/>
+            <a:off x="429767" y="4700016"/>
             <a:ext cx="1298448" cy="237744"/>
           </a:xfrm>
           <a:prstGeom prst="rect">
@@ -20481,7 +20481,7 @@
         </p:nvSpPr>
         <p:spPr>
           <a:xfrm>
-            <a:off x="429767" y="4608577"/>
+            <a:off x="429767" y="4937761"/>
             <a:ext cx="1298448" cy="310896"/>
           </a:xfrm>
           <a:prstGeom prst="rect">
@@ -20543,7 +20543,7 @@
         </p:nvSpPr>
         <p:spPr>
           <a:xfrm>
-            <a:off x="429767" y="4919473"/>
+            <a:off x="429767" y="5248657"/>
             <a:ext cx="1298448" cy="201168"/>
           </a:xfrm>
           <a:prstGeom prst="rect">
@@ -20605,7 +20605,7 @@
         </p:nvSpPr>
         <p:spPr>
           <a:xfrm>
-            <a:off x="1837943" y="4242816"/>
+            <a:off x="1837943" y="4572000"/>
             <a:ext cx="1298448" cy="914400"/>
           </a:xfrm>
           <a:prstGeom prst="rect">
@@ -20682,7 +20682,7 @@
         </p:nvSpPr>
         <p:spPr>
           <a:xfrm>
-            <a:off x="1837943" y="4242816"/>
+            <a:off x="1837943" y="4572000"/>
             <a:ext cx="1298448" cy="54864"/>
           </a:xfrm>
           <a:prstGeom prst="rect">
@@ -20759,7 +20759,7 @@
         </p:nvSpPr>
         <p:spPr>
           <a:xfrm>
-            <a:off x="1837943" y="4370832"/>
+            <a:off x="1837943" y="4700016"/>
             <a:ext cx="1298448" cy="237744"/>
           </a:xfrm>
           <a:prstGeom prst="rect">
@@ -20821,7 +20821,7 @@
         </p:nvSpPr>
         <p:spPr>
           <a:xfrm>
-            <a:off x="1837943" y="4608577"/>
+            <a:off x="1837943" y="4937761"/>
             <a:ext cx="1298448" cy="310896"/>
           </a:xfrm>
           <a:prstGeom prst="rect">
@@ -20883,7 +20883,7 @@
         </p:nvSpPr>
         <p:spPr>
           <a:xfrm>
-            <a:off x="1837943" y="4919473"/>
+            <a:off x="1837943" y="5248657"/>
             <a:ext cx="1298448" cy="201168"/>
           </a:xfrm>
           <a:prstGeom prst="rect">
@@ -20945,7 +20945,7 @@
         </p:nvSpPr>
         <p:spPr>
           <a:xfrm>
-            <a:off x="3246119" y="4242816"/>
+            <a:off x="3246119" y="4572000"/>
             <a:ext cx="1298448" cy="914400"/>
           </a:xfrm>
           <a:prstGeom prst="rect">
@@ -21022,7 +21022,7 @@
         </p:nvSpPr>
         <p:spPr>
           <a:xfrm>
-            <a:off x="3246119" y="4242816"/>
+            <a:off x="3246119" y="4572000"/>
             <a:ext cx="1298448" cy="54864"/>
           </a:xfrm>
           <a:prstGeom prst="rect">
@@ -21099,7 +21099,7 @@
         </p:nvSpPr>
         <p:spPr>
           <a:xfrm>
-            <a:off x="3246119" y="4370832"/>
+            <a:off x="3246119" y="4700016"/>
             <a:ext cx="1298448" cy="237744"/>
           </a:xfrm>
           <a:prstGeom prst="rect">
@@ -21161,7 +21161,7 @@
         </p:nvSpPr>
         <p:spPr>
           <a:xfrm>
-            <a:off x="3246119" y="4608577"/>
+            <a:off x="3246119" y="4937761"/>
             <a:ext cx="1298448" cy="310896"/>
           </a:xfrm>
           <a:prstGeom prst="rect">
@@ -21223,7 +21223,7 @@
         </p:nvSpPr>
         <p:spPr>
           <a:xfrm>
-            <a:off x="3246119" y="4919473"/>
+            <a:off x="3246119" y="5248657"/>
             <a:ext cx="1298448" cy="201168"/>
           </a:xfrm>
           <a:prstGeom prst="rect">
@@ -21285,7 +21285,7 @@
         </p:nvSpPr>
         <p:spPr>
           <a:xfrm>
-            <a:off x="429768" y="5321808"/>
+            <a:off x="429768" y="5650992"/>
             <a:ext cx="4114800" cy="457200"/>
           </a:xfrm>
           <a:prstGeom prst="rect">
@@ -21362,7 +21362,7 @@
         </p:nvSpPr>
         <p:spPr>
           <a:xfrm>
-            <a:off x="429767" y="5321808"/>
+            <a:off x="429767" y="5650992"/>
             <a:ext cx="64008" cy="457200"/>
           </a:xfrm>
           <a:prstGeom prst="rect">
@@ -21439,8 +21439,8 @@
         </p:nvSpPr>
         <p:spPr>
           <a:xfrm>
-            <a:off x="603503" y="5394960"/>
-            <a:ext cx="4206240" cy="329184"/>
+            <a:off x="603503" y="5724144"/>
+            <a:ext cx="4059936" cy="329184"/>
           </a:xfrm>
           <a:prstGeom prst="rect">
             <a:avLst/>
@@ -23270,6 +23270,44 @@
           </a:p>
         </p:txBody>
       </p:sp>
+      <p:sp>
+        <p:nvSpPr>
+          <p:cNvPr id="72" name="subtitle"/>
+          <p:cNvSpPr txBox="1"/>
+          <p:nvPr/>
+        </p:nvSpPr>
+        <p:spPr>
+          <a:xfrm>
+            <a:off x="512064" y="585216"/>
+            <a:ext cx="10899648" cy="438912"/>
+          </a:xfrm>
+          <a:prstGeom prst="rect">
+            <a:avLst/>
+          </a:prstGeom>
+          <a:noFill/>
+        </p:spPr>
+        <p:txBody>
+          <a:bodyPr wrap="square" lIns="0" rIns="0" tIns="0" bIns="0"/>
+          <a:lstStyle/>
+          <a:p>
+            <a:pPr>
+              <a:lnSpc>
+                <a:spcPct val="140000"/>
+              </a:lnSpc>
+            </a:pPr>
+            <a:r>
+              <a:rPr sz="1800" lang="zh-CN">
+                <a:solidFill>
+                  <a:srgbClr val="606060"/>
+                </a:solidFill>
+                <a:latin typeface="微软雅黑"/>
+                <a:ea typeface="微软雅黑"/>
+              </a:rPr>
+              <a:t>OOT 样本：1,519 申请 ｜ 1,958,480 笔交易，覆盖不同贷款类型与还款模式</a:t>
+            </a:r>
+          </a:p>
+        </p:txBody>
+      </p:sp>
     </p:spTree>
     <p:extLst>
       <p:ext uri="{BB962C8B-B14F-4D97-AF65-F5344CB8AC3E}">
